--- a/exports/pptx/lessons/middle-module-05-dot-addition/day-06-why-it-works.pptx
+++ b/exports/pptx/lessons/middle-module-05-dot-addition/day-06-why-it-works.pptx
@@ -17,9 +17,13 @@
     <p:sldId id="265" r:id="rId11"/>
     <p:sldId id="266" r:id="rId12"/>
     <p:sldId id="267" r:id="rId13"/>
+    <p:sldId id="268" r:id="rId14"/>
+    <p:sldId id="269" r:id="rId15"/>
+    <p:sldId id="270" r:id="rId16"/>
+    <p:sldId id="271" r:id="rId17"/>
   </p:sldIdLst>
   <p:notesMasterIdLst>
-    <p:notesMasterId r:id="rId14"/>
+    <p:notesMasterId r:id="rId18"/>
   </p:notesMasterIdLst>
   <p:sldSz cx="9144000" cy="5143500"/>
   <p:notesSz cx="5143500" cy="9144000"/>
@@ -801,6 +805,358 @@
             <a:fld id="{F7021451-1387-4CA6-816F-3879F97B5CBC}" type="slidenum">
               <a:rPr lang="en-US"/>
               <a:t>12</a:t>
+            </a:fld>
+            <a:endParaRPr lang="en-US"/>
+          </a:p>
+        </p:txBody>
+      </p:sp>
+    </p:spTree>
+    <p:extLst>
+      <p:ext uri="{BB962C8B-B14F-4D97-AF65-F5344CB8AC3E}">
+        <p14:creationId xmlns:p14="http://schemas.microsoft.com/office/powerpoint/2010/main" val="1024086991"/>
+      </p:ext>
+    </p:extLst>
+  </p:cSld>
+  <p:clrMapOvr>
+    <a:masterClrMapping/>
+  </p:clrMapOvr>
+</p:notes>
+</file>
+
+<file path=ppt/notesSlides/notesSlide13.xml><?xml version="1.0" encoding="utf-8"?>
+<p:notes xmlns:a="http://schemas.openxmlformats.org/drawingml/2006/main" xmlns:r="http://schemas.openxmlformats.org/officeDocument/2006/relationships" xmlns:p="http://schemas.openxmlformats.org/presentationml/2006/main">
+  <p:cSld>
+    <p:spTree>
+      <p:nvGrpSpPr>
+        <p:cNvPr id="1" name=""/>
+        <p:cNvGrpSpPr/>
+        <p:nvPr/>
+      </p:nvGrpSpPr>
+      <p:grpSpPr>
+        <a:xfrm>
+          <a:off x="0" y="0"/>
+          <a:ext cx="0" cy="0"/>
+          <a:chOff x="0" y="0"/>
+          <a:chExt cx="0" cy="0"/>
+        </a:xfrm>
+      </p:grpSpPr>
+      <p:sp>
+        <p:nvSpPr>
+          <p:cNvPr id="2" name="Slide Image Placeholder 1"/>
+          <p:cNvSpPr>
+            <a:spLocks noGrp="1" noRot="1" noChangeAspect="1"/>
+          </p:cNvSpPr>
+          <p:nvPr>
+            <p:ph type="sldImg"/>
+          </p:nvPr>
+        </p:nvSpPr>
+        <p:spPr/>
+      </p:sp>
+      <p:sp>
+        <p:nvSpPr>
+          <p:cNvPr id="3" name="Notes Placeholder 2"/>
+          <p:cNvSpPr>
+            <a:spLocks noGrp="1"/>
+          </p:cNvSpPr>
+          <p:nvPr>
+            <p:ph type="body" idx="1"/>
+          </p:nvPr>
+        </p:nvSpPr>
+        <p:spPr/>
+        <p:txBody>
+          <a:bodyPr/>
+          <a:lstStyle/>
+          <a:p>
+            <a:r>
+              <a:rPr lang="en-US" dirty="0"/>
+              <a:t/>
+            </a:r>
+            <a:endParaRPr lang="en-US" dirty="0"/>
+          </a:p>
+        </p:txBody>
+      </p:sp>
+      <p:sp>
+        <p:nvSpPr>
+          <p:cNvPr id="4" name="Slide Number Placeholder 3"/>
+          <p:cNvSpPr>
+            <a:spLocks noGrp="1"/>
+          </p:cNvSpPr>
+          <p:nvPr>
+            <p:ph type="sldNum" sz="quarter" idx="10"/>
+          </p:nvPr>
+        </p:nvSpPr>
+        <p:spPr/>
+        <p:txBody>
+          <a:bodyPr/>
+          <a:lstStyle/>
+          <a:p>
+            <a:fld id="{F7021451-1387-4CA6-816F-3879F97B5CBC}" type="slidenum">
+              <a:rPr lang="en-US"/>
+              <a:t>13</a:t>
+            </a:fld>
+            <a:endParaRPr lang="en-US"/>
+          </a:p>
+        </p:txBody>
+      </p:sp>
+    </p:spTree>
+    <p:extLst>
+      <p:ext uri="{BB962C8B-B14F-4D97-AF65-F5344CB8AC3E}">
+        <p14:creationId xmlns:p14="http://schemas.microsoft.com/office/powerpoint/2010/main" val="1024086991"/>
+      </p:ext>
+    </p:extLst>
+  </p:cSld>
+  <p:clrMapOvr>
+    <a:masterClrMapping/>
+  </p:clrMapOvr>
+</p:notes>
+</file>
+
+<file path=ppt/notesSlides/notesSlide14.xml><?xml version="1.0" encoding="utf-8"?>
+<p:notes xmlns:a="http://schemas.openxmlformats.org/drawingml/2006/main" xmlns:r="http://schemas.openxmlformats.org/officeDocument/2006/relationships" xmlns:p="http://schemas.openxmlformats.org/presentationml/2006/main">
+  <p:cSld>
+    <p:spTree>
+      <p:nvGrpSpPr>
+        <p:cNvPr id="1" name=""/>
+        <p:cNvGrpSpPr/>
+        <p:nvPr/>
+      </p:nvGrpSpPr>
+      <p:grpSpPr>
+        <a:xfrm>
+          <a:off x="0" y="0"/>
+          <a:ext cx="0" cy="0"/>
+          <a:chOff x="0" y="0"/>
+          <a:chExt cx="0" cy="0"/>
+        </a:xfrm>
+      </p:grpSpPr>
+      <p:sp>
+        <p:nvSpPr>
+          <p:cNvPr id="2" name="Slide Image Placeholder 1"/>
+          <p:cNvSpPr>
+            <a:spLocks noGrp="1" noRot="1" noChangeAspect="1"/>
+          </p:cNvSpPr>
+          <p:nvPr>
+            <p:ph type="sldImg"/>
+          </p:nvPr>
+        </p:nvSpPr>
+        <p:spPr/>
+      </p:sp>
+      <p:sp>
+        <p:nvSpPr>
+          <p:cNvPr id="3" name="Notes Placeholder 2"/>
+          <p:cNvSpPr>
+            <a:spLocks noGrp="1"/>
+          </p:cNvSpPr>
+          <p:nvPr>
+            <p:ph type="body" idx="1"/>
+          </p:nvPr>
+        </p:nvSpPr>
+        <p:spPr/>
+        <p:txBody>
+          <a:bodyPr/>
+          <a:lstStyle/>
+          <a:p>
+            <a:r>
+              <a:rPr lang="en-US" dirty="0"/>
+              <a:t/>
+            </a:r>
+            <a:endParaRPr lang="en-US" dirty="0"/>
+          </a:p>
+        </p:txBody>
+      </p:sp>
+      <p:sp>
+        <p:nvSpPr>
+          <p:cNvPr id="4" name="Slide Number Placeholder 3"/>
+          <p:cNvSpPr>
+            <a:spLocks noGrp="1"/>
+          </p:cNvSpPr>
+          <p:nvPr>
+            <p:ph type="sldNum" sz="quarter" idx="10"/>
+          </p:nvPr>
+        </p:nvSpPr>
+        <p:spPr/>
+        <p:txBody>
+          <a:bodyPr/>
+          <a:lstStyle/>
+          <a:p>
+            <a:fld id="{F7021451-1387-4CA6-816F-3879F97B5CBC}" type="slidenum">
+              <a:rPr lang="en-US"/>
+              <a:t>14</a:t>
+            </a:fld>
+            <a:endParaRPr lang="en-US"/>
+          </a:p>
+        </p:txBody>
+      </p:sp>
+    </p:spTree>
+    <p:extLst>
+      <p:ext uri="{BB962C8B-B14F-4D97-AF65-F5344CB8AC3E}">
+        <p14:creationId xmlns:p14="http://schemas.microsoft.com/office/powerpoint/2010/main" val="1024086991"/>
+      </p:ext>
+    </p:extLst>
+  </p:cSld>
+  <p:clrMapOvr>
+    <a:masterClrMapping/>
+  </p:clrMapOvr>
+</p:notes>
+</file>
+
+<file path=ppt/notesSlides/notesSlide15.xml><?xml version="1.0" encoding="utf-8"?>
+<p:notes xmlns:a="http://schemas.openxmlformats.org/drawingml/2006/main" xmlns:r="http://schemas.openxmlformats.org/officeDocument/2006/relationships" xmlns:p="http://schemas.openxmlformats.org/presentationml/2006/main">
+  <p:cSld>
+    <p:spTree>
+      <p:nvGrpSpPr>
+        <p:cNvPr id="1" name=""/>
+        <p:cNvGrpSpPr/>
+        <p:nvPr/>
+      </p:nvGrpSpPr>
+      <p:grpSpPr>
+        <a:xfrm>
+          <a:off x="0" y="0"/>
+          <a:ext cx="0" cy="0"/>
+          <a:chOff x="0" y="0"/>
+          <a:chExt cx="0" cy="0"/>
+        </a:xfrm>
+      </p:grpSpPr>
+      <p:sp>
+        <p:nvSpPr>
+          <p:cNvPr id="2" name="Slide Image Placeholder 1"/>
+          <p:cNvSpPr>
+            <a:spLocks noGrp="1" noRot="1" noChangeAspect="1"/>
+          </p:cNvSpPr>
+          <p:nvPr>
+            <p:ph type="sldImg"/>
+          </p:nvPr>
+        </p:nvSpPr>
+        <p:spPr/>
+      </p:sp>
+      <p:sp>
+        <p:nvSpPr>
+          <p:cNvPr id="3" name="Notes Placeholder 2"/>
+          <p:cNvSpPr>
+            <a:spLocks noGrp="1"/>
+          </p:cNvSpPr>
+          <p:nvPr>
+            <p:ph type="body" idx="1"/>
+          </p:nvPr>
+        </p:nvSpPr>
+        <p:spPr/>
+        <p:txBody>
+          <a:bodyPr/>
+          <a:lstStyle/>
+          <a:p>
+            <a:r>
+              <a:rPr lang="en-US" dirty="0"/>
+              <a:t/>
+            </a:r>
+            <a:endParaRPr lang="en-US" dirty="0"/>
+          </a:p>
+        </p:txBody>
+      </p:sp>
+      <p:sp>
+        <p:nvSpPr>
+          <p:cNvPr id="4" name="Slide Number Placeholder 3"/>
+          <p:cNvSpPr>
+            <a:spLocks noGrp="1"/>
+          </p:cNvSpPr>
+          <p:nvPr>
+            <p:ph type="sldNum" sz="quarter" idx="10"/>
+          </p:nvPr>
+        </p:nvSpPr>
+        <p:spPr/>
+        <p:txBody>
+          <a:bodyPr/>
+          <a:lstStyle/>
+          <a:p>
+            <a:fld id="{F7021451-1387-4CA6-816F-3879F97B5CBC}" type="slidenum">
+              <a:rPr lang="en-US"/>
+              <a:t>15</a:t>
+            </a:fld>
+            <a:endParaRPr lang="en-US"/>
+          </a:p>
+        </p:txBody>
+      </p:sp>
+    </p:spTree>
+    <p:extLst>
+      <p:ext uri="{BB962C8B-B14F-4D97-AF65-F5344CB8AC3E}">
+        <p14:creationId xmlns:p14="http://schemas.microsoft.com/office/powerpoint/2010/main" val="1024086991"/>
+      </p:ext>
+    </p:extLst>
+  </p:cSld>
+  <p:clrMapOvr>
+    <a:masterClrMapping/>
+  </p:clrMapOvr>
+</p:notes>
+</file>
+
+<file path=ppt/notesSlides/notesSlide16.xml><?xml version="1.0" encoding="utf-8"?>
+<p:notes xmlns:a="http://schemas.openxmlformats.org/drawingml/2006/main" xmlns:r="http://schemas.openxmlformats.org/officeDocument/2006/relationships" xmlns:p="http://schemas.openxmlformats.org/presentationml/2006/main">
+  <p:cSld>
+    <p:spTree>
+      <p:nvGrpSpPr>
+        <p:cNvPr id="1" name=""/>
+        <p:cNvGrpSpPr/>
+        <p:nvPr/>
+      </p:nvGrpSpPr>
+      <p:grpSpPr>
+        <a:xfrm>
+          <a:off x="0" y="0"/>
+          <a:ext cx="0" cy="0"/>
+          <a:chOff x="0" y="0"/>
+          <a:chExt cx="0" cy="0"/>
+        </a:xfrm>
+      </p:grpSpPr>
+      <p:sp>
+        <p:nvSpPr>
+          <p:cNvPr id="2" name="Slide Image Placeholder 1"/>
+          <p:cNvSpPr>
+            <a:spLocks noGrp="1" noRot="1" noChangeAspect="1"/>
+          </p:cNvSpPr>
+          <p:nvPr>
+            <p:ph type="sldImg"/>
+          </p:nvPr>
+        </p:nvSpPr>
+        <p:spPr/>
+      </p:sp>
+      <p:sp>
+        <p:nvSpPr>
+          <p:cNvPr id="3" name="Notes Placeholder 2"/>
+          <p:cNvSpPr>
+            <a:spLocks noGrp="1"/>
+          </p:cNvSpPr>
+          <p:nvPr>
+            <p:ph type="body" idx="1"/>
+          </p:nvPr>
+        </p:nvSpPr>
+        <p:spPr/>
+        <p:txBody>
+          <a:bodyPr/>
+          <a:lstStyle/>
+          <a:p>
+            <a:r>
+              <a:rPr lang="en-US" dirty="0"/>
+              <a:t/>
+            </a:r>
+            <a:endParaRPr lang="en-US" dirty="0"/>
+          </a:p>
+        </p:txBody>
+      </p:sp>
+      <p:sp>
+        <p:nvSpPr>
+          <p:cNvPr id="4" name="Slide Number Placeholder 3"/>
+          <p:cNvSpPr>
+            <a:spLocks noGrp="1"/>
+          </p:cNvSpPr>
+          <p:nvPr>
+            <p:ph type="sldNum" sz="quarter" idx="10"/>
+          </p:nvPr>
+        </p:nvSpPr>
+        <p:spPr/>
+        <p:txBody>
+          <a:bodyPr/>
+          <a:lstStyle/>
+          <a:p>
+            <a:fld id="{F7021451-1387-4CA6-816F-3879F97B5CBC}" type="slidenum">
+              <a:rPr lang="en-US"/>
+              <a:t>16</a:t>
             </a:fld>
             <a:endParaRPr lang="en-US"/>
           </a:p>
@@ -2100,102 +2456,6 @@
         </p:nvSpPr>
         <p:spPr>
           <a:xfrm>
-            <a:off x="406301" y="1223963"/>
-            <a:ext cx="8498026" cy="274290"/>
-          </a:xfrm>
-          <a:prstGeom prst="rect">
-            <a:avLst/>
-          </a:prstGeom>
-          <a:noFill/>
-          <a:ln/>
-        </p:spPr>
-        <p:txBody>
-          <a:bodyPr wrap="square" lIns="0" tIns="0" rIns="0" bIns="0" rtlCol="0" anchor="t"/>
-          <a:lstStyle/>
-          <a:p>
-            <a:pPr algn="l" indent="0" marL="0">
-              <a:lnSpc>
-                <a:spcPts val="2160"/>
-              </a:lnSpc>
-              <a:spcBef>
-                <a:spcPts val="600"/>
-              </a:spcBef>
-              <a:spcAft>
-                <a:spcPts val="800"/>
-              </a:spcAft>
-              <a:buNone/>
-            </a:pPr>
-            <a:r>
-              <a:rPr lang="en-US" sz="1800" b="1" dirty="0">
-                <a:solidFill>
-                  <a:srgbClr val="FE4447"/>
-                </a:solidFill>
-                <a:latin typeface="Georgia" pitchFamily="34" charset="0"/>
-                <a:ea typeface="Georgia" pitchFamily="34" charset="-122"/>
-                <a:cs typeface="Georgia" pitchFamily="34" charset="-120"/>
-              </a:rPr>
-              <a:t>Learning objective</a:t>
-            </a:r>
-            <a:endParaRPr lang="en-US" sz="1800" dirty="0"/>
-          </a:p>
-        </p:txBody>
-      </p:sp>
-      <p:sp>
-        <p:nvSpPr>
-          <p:cNvPr id="6" name="Text 4"/>
-          <p:cNvSpPr/>
-          <p:nvPr/>
-        </p:nvSpPr>
-        <p:spPr>
-          <a:xfrm>
-            <a:off x="406301" y="1637854"/>
-            <a:ext cx="8498026" cy="426541"/>
-          </a:xfrm>
-          <a:prstGeom prst="rect">
-            <a:avLst/>
-          </a:prstGeom>
-          <a:noFill/>
-          <a:ln/>
-        </p:spPr>
-        <p:txBody>
-          <a:bodyPr wrap="square" lIns="0" tIns="0" rIns="0" bIns="0" rtlCol="0" anchor="t"/>
-          <a:lstStyle/>
-          <a:p>
-            <a:pPr algn="l" indent="0" marL="0">
-              <a:lnSpc>
-                <a:spcPts val="1680"/>
-              </a:lnSpc>
-              <a:spcBef>
-                <a:spcPts val="300"/>
-              </a:spcBef>
-              <a:spcAft>
-                <a:spcPts val="300"/>
-              </a:spcAft>
-              <a:buNone/>
-            </a:pPr>
-            <a:r>
-              <a:rPr lang="en-US" sz="1200" dirty="0">
-                <a:solidFill>
-                  <a:srgbClr val="1C2833"/>
-                </a:solidFill>
-                <a:latin typeface="Arial" pitchFamily="34" charset="0"/>
-                <a:ea typeface="Arial" pitchFamily="34" charset="-122"/>
-                <a:cs typeface="Arial" pitchFamily="34" charset="-120"/>
-              </a:rPr>
-              <a:t>By the end of this lesson, students will explain in their own words why the dot method gives the same answer as the standard algorithm, citing place value and the fact that a "dot" represents a 10 carried.</a:t>
-            </a:r>
-            <a:endParaRPr lang="en-US" sz="1200" dirty="0"/>
-          </a:p>
-        </p:txBody>
-      </p:sp>
-      <p:sp>
-        <p:nvSpPr>
-          <p:cNvPr id="7" name="Text 5"/>
-          <p:cNvSpPr/>
-          <p:nvPr/>
-        </p:nvSpPr>
-        <p:spPr>
-          <a:xfrm>
             <a:off x="406301" y="4434929"/>
             <a:ext cx="8498026" cy="213271"/>
           </a:xfrm>
@@ -2340,7 +2600,7 @@
                 <a:ea typeface="Georgia" pitchFamily="34" charset="-122"/>
                 <a:cs typeface="Georgia" pitchFamily="34" charset="-120"/>
               </a:rPr>
-              <a:t>Differentiation</a:t>
+              <a:t>Activity (15 min) — Explain to a friend</a:t>
             </a:r>
             <a:endParaRPr lang="en-US" sz="1800" dirty="0"/>
           </a:p>
@@ -2355,7 +2615,7 @@
         <p:spPr>
           <a:xfrm>
             <a:off x="634901" y="883593"/>
-            <a:ext cx="8102798" cy="731341"/>
+            <a:ext cx="8102798" cy="281880"/>
           </a:xfrm>
           <a:prstGeom prst="rect">
             <a:avLst/>
@@ -2378,7 +2638,7 @@
               <a:buChar char="•"/>
             </a:pPr>
             <a:r>
-              <a:rPr lang="en-US" sz="1200" b="1" dirty="0">
+              <a:rPr lang="en-US" sz="1200" dirty="0">
                 <a:solidFill>
                   <a:srgbClr val="1C2833"/>
                 </a:solidFill>
@@ -2386,16 +2646,327 @@
                 <a:ea typeface="Arial" pitchFamily="34" charset="-122"/>
                 <a:cs typeface="Arial" pitchFamily="34" charset="-120"/>
               </a:rPr>
-              <a:t>Tier up:</a:t>
-            </a:r>
-            <a:pPr algn="l" indent="0" marL="0">
+              <a:t>Worksheet prompt:</a:t>
+            </a:r>
+            <a:endParaRPr lang="en-US" sz="1200" dirty="0"/>
+          </a:p>
+        </p:txBody>
+      </p:sp>
+      <p:sp>
+        <p:nvSpPr>
+          <p:cNvPr id="5" name="Text 3"/>
+          <p:cNvSpPr/>
+          <p:nvPr/>
+        </p:nvSpPr>
+        <p:spPr>
+          <a:xfrm>
+            <a:off x="406301" y="1266974"/>
+            <a:ext cx="8331398" cy="842963"/>
+          </a:xfrm>
+          <a:prstGeom prst="rect">
+            <a:avLst/>
+          </a:prstGeom>
+          <a:solidFill>
+            <a:srgbClr val="F4F8F9"/>
+          </a:solidFill>
+          <a:ln/>
+        </p:spPr>
+        <p:txBody>
+          <a:bodyPr wrap="square" rtlCol="0" anchor="ctr"/>
+          <a:lstStyle/>
+          <a:p>
+            <a:pPr indent="0" marL="0">
+              <a:buNone/>
+            </a:pPr>
+            <a:endParaRPr lang="en-US" dirty="0"/>
+          </a:p>
+        </p:txBody>
+      </p:sp>
+      <p:sp>
+        <p:nvSpPr>
+          <p:cNvPr id="6" name="Shape 4"/>
+          <p:cNvSpPr/>
+          <p:nvPr/>
+        </p:nvSpPr>
+        <p:spPr>
+          <a:xfrm>
+            <a:off x="434876" y="1266974"/>
+            <a:ext cx="0" cy="842962"/>
+          </a:xfrm>
+          <a:prstGeom prst="line">
+            <a:avLst/>
+          </a:prstGeom>
+          <a:noFill/>
+          <a:ln w="57150">
+            <a:solidFill>
+              <a:srgbClr val="FE4447"/>
+            </a:solidFill>
+            <a:prstDash val="solid"/>
+          </a:ln>
+        </p:spPr>
+      </p:sp>
+      <p:sp>
+        <p:nvSpPr>
+          <p:cNvPr id="7" name="Text 5"/>
+          <p:cNvSpPr/>
+          <p:nvPr/>
+        </p:nvSpPr>
+        <p:spPr>
+          <a:xfrm>
+            <a:off x="692051" y="1457474"/>
+            <a:ext cx="7973389" cy="461963"/>
+          </a:xfrm>
+          <a:prstGeom prst="rect">
+            <a:avLst/>
+          </a:prstGeom>
+          <a:noFill/>
+          <a:ln/>
+        </p:spPr>
+        <p:txBody>
+          <a:bodyPr wrap="square" lIns="0" tIns="0" rIns="0" bIns="0" rtlCol="0" anchor="t"/>
+          <a:lstStyle/>
+          <a:p>
+            <a:pPr algn="l" indent="0" marL="0">
+              <a:lnSpc>
+                <a:spcPts val="1820"/>
+              </a:lnSpc>
+              <a:spcBef>
+                <a:spcPts val="300"/>
+              </a:spcBef>
+              <a:spcAft>
+                <a:spcPts val="300"/>
+              </a:spcAft>
+              <a:buNone/>
+            </a:pPr>
+            <a:r>
+              <a:rPr lang="en-US" sz="1300" dirty="0">
+                <a:solidFill>
+                  <a:srgbClr val="1C2833"/>
+                </a:solidFill>
+                <a:latin typeface="Georgia" pitchFamily="34" charset="0"/>
+                <a:ea typeface="Georgia" pitchFamily="34" charset="-122"/>
+                <a:cs typeface="Georgia" pitchFamily="34" charset="-120"/>
+              </a:rPr>
+              <a:t>Imagine your Grade 4 cousin asks: </a:t>
+            </a:r>
+            <a:pPr algn="l" indent="0" marL="0">
+              <a:lnSpc>
+                <a:spcPts val="1820"/>
+              </a:lnSpc>
+              <a:spcBef>
+                <a:spcPts val="300"/>
+              </a:spcBef>
+              <a:spcAft>
+                <a:spcPts val="300"/>
+              </a:spcAft>
+              <a:buNone/>
+            </a:pPr>
+            <a:r>
+              <a:rPr lang="en-US" sz="1300" i="1" dirty="0">
+                <a:solidFill>
+                  <a:srgbClr val="1C2833"/>
+                </a:solidFill>
+                <a:latin typeface="Georgia" pitchFamily="34" charset="0"/>
+                <a:ea typeface="Georgia" pitchFamily="34" charset="-122"/>
+                <a:cs typeface="Georgia" pitchFamily="34" charset="-120"/>
+              </a:rPr>
+              <a:t>"Why does that dot trick work? Isn't it just magic?"</a:t>
+            </a:r>
+            <a:pPr algn="l" indent="0" marL="0">
+              <a:lnSpc>
+                <a:spcPts val="1820"/>
+              </a:lnSpc>
+              <a:spcBef>
+                <a:spcPts val="300"/>
+              </a:spcBef>
+              <a:spcAft>
+                <a:spcPts val="300"/>
+              </a:spcAft>
+              <a:buNone/>
+            </a:pPr>
+            <a:r>
+              <a:rPr lang="en-US" sz="1300" dirty="0">
+                <a:solidFill>
+                  <a:srgbClr val="1C2833"/>
+                </a:solidFill>
+                <a:latin typeface="Georgia" pitchFamily="34" charset="0"/>
+                <a:ea typeface="Georgia" pitchFamily="34" charset="-122"/>
+                <a:cs typeface="Georgia" pitchFamily="34" charset="-120"/>
+              </a:rPr>
+              <a:t> Write 4–6 sentences explaining why it's NOT magic. Use the words </a:t>
+            </a:r>
+            <a:pPr algn="l" indent="0" marL="0">
+              <a:lnSpc>
+                <a:spcPts val="1820"/>
+              </a:lnSpc>
+              <a:spcBef>
+                <a:spcPts val="300"/>
+              </a:spcBef>
+              <a:spcAft>
+                <a:spcPts val="300"/>
+              </a:spcAft>
+              <a:buNone/>
+            </a:pPr>
+            <a:r>
+              <a:rPr lang="en-US" sz="1300" i="1" dirty="0">
+                <a:solidFill>
+                  <a:srgbClr val="1C2833"/>
+                </a:solidFill>
+                <a:latin typeface="Georgia" pitchFamily="34" charset="0"/>
+                <a:ea typeface="Georgia" pitchFamily="34" charset="-122"/>
+                <a:cs typeface="Georgia" pitchFamily="34" charset="-120"/>
+              </a:rPr>
+              <a:t>carry</a:t>
+            </a:r>
+            <a:pPr algn="l" indent="0" marL="0">
+              <a:lnSpc>
+                <a:spcPts val="1820"/>
+              </a:lnSpc>
+              <a:spcBef>
+                <a:spcPts val="300"/>
+              </a:spcBef>
+              <a:spcAft>
+                <a:spcPts val="300"/>
+              </a:spcAft>
+              <a:buNone/>
+            </a:pPr>
+            <a:r>
+              <a:rPr lang="en-US" sz="1300" dirty="0">
+                <a:solidFill>
+                  <a:srgbClr val="1C2833"/>
+                </a:solidFill>
+                <a:latin typeface="Georgia" pitchFamily="34" charset="0"/>
+                <a:ea typeface="Georgia" pitchFamily="34" charset="-122"/>
+                <a:cs typeface="Georgia" pitchFamily="34" charset="-120"/>
+              </a:rPr>
+              <a:t>, </a:t>
+            </a:r>
+            <a:pPr algn="l" indent="0" marL="0">
+              <a:lnSpc>
+                <a:spcPts val="1820"/>
+              </a:lnSpc>
+              <a:spcBef>
+                <a:spcPts val="300"/>
+              </a:spcBef>
+              <a:spcAft>
+                <a:spcPts val="300"/>
+              </a:spcAft>
+              <a:buNone/>
+            </a:pPr>
+            <a:r>
+              <a:rPr lang="en-US" sz="1300" i="1" dirty="0">
+                <a:solidFill>
+                  <a:srgbClr val="1C2833"/>
+                </a:solidFill>
+                <a:latin typeface="Georgia" pitchFamily="34" charset="0"/>
+                <a:ea typeface="Georgia" pitchFamily="34" charset="-122"/>
+                <a:cs typeface="Georgia" pitchFamily="34" charset="-120"/>
+              </a:rPr>
+              <a:t>place value</a:t>
+            </a:r>
+            <a:pPr algn="l" indent="0" marL="0">
+              <a:lnSpc>
+                <a:spcPts val="1820"/>
+              </a:lnSpc>
+              <a:spcBef>
+                <a:spcPts val="300"/>
+              </a:spcBef>
+              <a:spcAft>
+                <a:spcPts val="300"/>
+              </a:spcAft>
+              <a:buNone/>
+            </a:pPr>
+            <a:r>
+              <a:rPr lang="en-US" sz="1300" dirty="0">
+                <a:solidFill>
+                  <a:srgbClr val="1C2833"/>
+                </a:solidFill>
+                <a:latin typeface="Georgia" pitchFamily="34" charset="0"/>
+                <a:ea typeface="Georgia" pitchFamily="34" charset="-122"/>
+                <a:cs typeface="Georgia" pitchFamily="34" charset="-120"/>
+              </a:rPr>
+              <a:t>, and </a:t>
+            </a:r>
+            <a:pPr algn="l" indent="0" marL="0">
+              <a:lnSpc>
+                <a:spcPts val="1820"/>
+              </a:lnSpc>
+              <a:spcBef>
+                <a:spcPts val="300"/>
+              </a:spcBef>
+              <a:spcAft>
+                <a:spcPts val="300"/>
+              </a:spcAft>
+              <a:buNone/>
+            </a:pPr>
+            <a:r>
+              <a:rPr lang="en-US" sz="1300" i="1" dirty="0">
+                <a:solidFill>
+                  <a:srgbClr val="1C2833"/>
+                </a:solidFill>
+                <a:latin typeface="Georgia" pitchFamily="34" charset="0"/>
+                <a:ea typeface="Georgia" pitchFamily="34" charset="-122"/>
+                <a:cs typeface="Georgia" pitchFamily="34" charset="-120"/>
+              </a:rPr>
+              <a:t>10</a:t>
+            </a:r>
+            <a:pPr algn="l" indent="0" marL="0">
+              <a:lnSpc>
+                <a:spcPts val="1820"/>
+              </a:lnSpc>
+              <a:spcBef>
+                <a:spcPts val="300"/>
+              </a:spcBef>
+              <a:spcAft>
+                <a:spcPts val="300"/>
+              </a:spcAft>
+              <a:buNone/>
+            </a:pPr>
+            <a:r>
+              <a:rPr lang="en-US" sz="1300" dirty="0">
+                <a:solidFill>
+                  <a:srgbClr val="1C2833"/>
+                </a:solidFill>
+                <a:latin typeface="Georgia" pitchFamily="34" charset="0"/>
+                <a:ea typeface="Georgia" pitchFamily="34" charset="-122"/>
+                <a:cs typeface="Georgia" pitchFamily="34" charset="-120"/>
+              </a:rPr>
+              <a:t>.</a:t>
+            </a:r>
+            <a:endParaRPr lang="en-US" sz="1300" dirty="0"/>
+          </a:p>
+        </p:txBody>
+      </p:sp>
+      <p:sp>
+        <p:nvSpPr>
+          <p:cNvPr id="8" name="Text 6"/>
+          <p:cNvSpPr/>
+          <p:nvPr/>
+        </p:nvSpPr>
+        <p:spPr>
+          <a:xfrm>
+            <a:off x="634901" y="2211437"/>
+            <a:ext cx="8102798" cy="487561"/>
+          </a:xfrm>
+          <a:prstGeom prst="rect">
+            <a:avLst/>
+          </a:prstGeom>
+          <a:noFill/>
+          <a:ln/>
+        </p:spPr>
+        <p:txBody>
+          <a:bodyPr wrap="square" lIns="0" tIns="0" rIns="0" bIns="0" rtlCol="0" anchor="t"/>
+          <a:lstStyle/>
+          <a:p>
+            <a:pPr algn="l" marL="342900" indent="-342900">
               <a:lnSpc>
                 <a:spcPts val="1620"/>
               </a:lnSpc>
               <a:spcAft>
                 <a:spcPts val="300"/>
               </a:spcAft>
-              <a:buNone/>
+              <a:buSzPct val="100000"/>
+              <a:buChar char="•"/>
             </a:pPr>
             <a:r>
               <a:rPr lang="en-US" sz="1200" dirty="0">
@@ -2406,59 +2977,15 @@
                 <a:ea typeface="Arial" pitchFamily="34" charset="-122"/>
                 <a:cs typeface="Arial" pitchFamily="34" charset="-120"/>
               </a:rPr>
-              <a:t> Write a 1-paragraph explanation suitable for a Grade 11 student. Include the connection to base-10 representation and to the carry algorithm.</a:t>
+              <a:t>10 min individual writing. 5 min pair-sharing: read your paragraph to your partner; they tell you one part that's clear and one part that's unclear.</a:t>
             </a:r>
             <a:endParaRPr lang="en-US" sz="1200" dirty="0"/>
           </a:p>
-          <a:p>
-            <a:pPr algn="l" marL="342900" indent="-342900">
-              <a:lnSpc>
-                <a:spcPts val="1620"/>
-              </a:lnSpc>
-              <a:spcAft>
-                <a:spcPts val="300"/>
-              </a:spcAft>
-              <a:buSzPct val="100000"/>
-              <a:buChar char="•"/>
-            </a:pPr>
-            <a:r>
-              <a:rPr lang="en-US" sz="1200" b="1" dirty="0">
-                <a:solidFill>
-                  <a:srgbClr val="1C2833"/>
-                </a:solidFill>
-                <a:latin typeface="Arial" pitchFamily="34" charset="0"/>
-                <a:ea typeface="Arial" pitchFamily="34" charset="-122"/>
-                <a:cs typeface="Arial" pitchFamily="34" charset="-120"/>
-              </a:rPr>
-              <a:t>Tier down:</a:t>
-            </a:r>
-            <a:pPr algn="l" indent="0" marL="0">
-              <a:lnSpc>
-                <a:spcPts val="1620"/>
-              </a:lnSpc>
-              <a:spcAft>
-                <a:spcPts val="300"/>
-              </a:spcAft>
-              <a:buNone/>
-            </a:pPr>
-            <a:r>
-              <a:rPr lang="en-US" sz="1200" dirty="0">
-                <a:solidFill>
-                  <a:srgbClr val="1C2833"/>
-                </a:solidFill>
-                <a:latin typeface="Arial" pitchFamily="34" charset="0"/>
-                <a:ea typeface="Arial" pitchFamily="34" charset="-122"/>
-                <a:cs typeface="Arial" pitchFamily="34" charset="-120"/>
-              </a:rPr>
-              <a:t> Skip the writing; just verbalise the explanation to your partner.</a:t>
-            </a:r>
-            <a:endParaRPr lang="en-US" sz="1200" dirty="0"/>
-          </a:p>
-        </p:txBody>
-      </p:sp>
-      <p:sp>
-        <p:nvSpPr>
-          <p:cNvPr id="5" name="Text 3"/>
+        </p:txBody>
+      </p:sp>
+      <p:sp>
+        <p:nvSpPr>
+          <p:cNvPr id="9" name="Text 7"/>
           <p:cNvSpPr/>
           <p:nvPr/>
         </p:nvSpPr>
@@ -2608,7 +3135,7 @@
                 <a:ea typeface="Georgia" pitchFamily="34" charset="-122"/>
                 <a:cs typeface="Georgia" pitchFamily="34" charset="-120"/>
               </a:rPr>
-              <a:t>Teacher notes</a:t>
+              <a:t>Wrap-up (5 min)</a:t>
             </a:r>
             <a:endParaRPr lang="en-US" sz="1800" dirty="0"/>
           </a:p>
@@ -2622,8 +3149,8 @@
         </p:nvSpPr>
         <p:spPr>
           <a:xfrm>
-            <a:off x="406301" y="870942"/>
-            <a:ext cx="8498026" cy="853083"/>
+            <a:off x="634901" y="883593"/>
+            <a:ext cx="8102798" cy="731341"/>
           </a:xfrm>
           <a:prstGeom prst="rect">
             <a:avLst/>
@@ -2635,17 +3162,15 @@
           <a:bodyPr wrap="square" lIns="0" tIns="0" rIns="0" bIns="0" rtlCol="0" anchor="t"/>
           <a:lstStyle/>
           <a:p>
-            <a:pPr algn="l" indent="0" marL="0">
-              <a:lnSpc>
-                <a:spcPts val="1680"/>
-              </a:lnSpc>
-              <a:spcBef>
-                <a:spcPts val="300"/>
-              </a:spcBef>
-              <a:spcAft>
-                <a:spcPts val="300"/>
-              </a:spcAft>
-              <a:buNone/>
+            <a:pPr algn="l" marL="342900" indent="-342900">
+              <a:lnSpc>
+                <a:spcPts val="1620"/>
+              </a:lnSpc>
+              <a:spcAft>
+                <a:spcPts val="300"/>
+              </a:spcAft>
+              <a:buSzPct val="100000"/>
+              <a:buChar char="•"/>
             </a:pPr>
             <a:r>
               <a:rPr lang="en-US" sz="1200" dirty="0">
@@ -2656,22 +3181,23 @@
                 <a:ea typeface="Arial" pitchFamily="34" charset="-122"/>
                 <a:cs typeface="Arial" pitchFamily="34" charset="-120"/>
               </a:rPr>
-              <a:t>– The honest "not in any sūtra" framing matters. Some students (or parents) believe the dot method is "ancient Vedic mathematics" — clarify gently. The achievement here is good </a:t>
-            </a:r>
-            <a:pPr algn="l" indent="0" marL="0">
-              <a:lnSpc>
-                <a:spcPts val="1680"/>
-              </a:lnSpc>
-              <a:spcBef>
-                <a:spcPts val="300"/>
-              </a:spcBef>
-              <a:spcAft>
-                <a:spcPts val="300"/>
-              </a:spcAft>
-              <a:buNone/>
-            </a:pPr>
-            <a:r>
-              <a:rPr lang="en-US" sz="1200" i="1" dirty="0">
+              <a:t>Read aloud one strong paragraph (with permission).</a:t>
+            </a:r>
+            <a:endParaRPr lang="en-US" sz="1200" dirty="0"/>
+          </a:p>
+          <a:p>
+            <a:pPr algn="l" marL="342900" indent="-342900">
+              <a:lnSpc>
+                <a:spcPts val="1620"/>
+              </a:lnSpc>
+              <a:spcAft>
+                <a:spcPts val="300"/>
+              </a:spcAft>
+              <a:buSzPct val="100000"/>
+              <a:buChar char="•"/>
+            </a:pPr>
+            <a:r>
+              <a:rPr lang="en-US" sz="1200" dirty="0">
                 <a:solidFill>
                   <a:srgbClr val="1C2833"/>
                 </a:solidFill>
@@ -2679,22 +3205,19 @@
                 <a:ea typeface="Arial" pitchFamily="34" charset="-122"/>
                 <a:cs typeface="Arial" pitchFamily="34" charset="-120"/>
               </a:rPr>
-              <a:t>teaching</a:t>
-            </a:r>
-            <a:pPr algn="l" indent="0" marL="0">
-              <a:lnSpc>
-                <a:spcPts val="1680"/>
-              </a:lnSpc>
-              <a:spcBef>
-                <a:spcPts val="300"/>
-              </a:spcBef>
-              <a:spcAft>
-                <a:spcPts val="300"/>
-              </a:spcAft>
-              <a:buNone/>
-            </a:pPr>
-            <a:r>
-              <a:rPr lang="en-US" sz="1200" dirty="0">
+              <a:t>Preview Day 7: </a:t>
+            </a:r>
+            <a:pPr algn="l" indent="0" marL="0">
+              <a:lnSpc>
+                <a:spcPts val="1620"/>
+              </a:lnSpc>
+              <a:spcAft>
+                <a:spcPts val="300"/>
+              </a:spcAft>
+              <a:buNone/>
+            </a:pPr>
+            <a:r>
+              <a:rPr lang="en-US" sz="1200" i="1" dirty="0">
                 <a:solidFill>
                   <a:srgbClr val="1C2833"/>
                 </a:solidFill>
@@ -2702,53 +3225,7 @@
                 <a:ea typeface="Arial" pitchFamily="34" charset="-122"/>
                 <a:cs typeface="Arial" pitchFamily="34" charset="-120"/>
               </a:rPr>
-              <a:t>, which is also a real achievement. – The most common error in student paragraphs: confusing the dot with "skip counting." Reinforce that the dot represents </a:t>
-            </a:r>
-            <a:pPr algn="l" indent="0" marL="0">
-              <a:lnSpc>
-                <a:spcPts val="1680"/>
-              </a:lnSpc>
-              <a:spcBef>
-                <a:spcPts val="300"/>
-              </a:spcBef>
-              <a:spcAft>
-                <a:spcPts val="300"/>
-              </a:spcAft>
-              <a:buNone/>
-            </a:pPr>
-            <a:r>
-              <a:rPr lang="en-US" sz="1200" i="1" dirty="0">
-                <a:solidFill>
-                  <a:srgbClr val="1C2833"/>
-                </a:solidFill>
-                <a:latin typeface="Arial" pitchFamily="34" charset="0"/>
-                <a:ea typeface="Arial" pitchFamily="34" charset="-122"/>
-                <a:cs typeface="Arial" pitchFamily="34" charset="-120"/>
-              </a:rPr>
-              <a:t>the carry</a:t>
-            </a:r>
-            <a:pPr algn="l" indent="0" marL="0">
-              <a:lnSpc>
-                <a:spcPts val="1680"/>
-              </a:lnSpc>
-              <a:spcBef>
-                <a:spcPts val="300"/>
-              </a:spcBef>
-              <a:spcAft>
-                <a:spcPts val="300"/>
-              </a:spcAft>
-              <a:buNone/>
-            </a:pPr>
-            <a:r>
-              <a:rPr lang="en-US" sz="1200" dirty="0">
-                <a:solidFill>
-                  <a:srgbClr val="1C2833"/>
-                </a:solidFill>
-                <a:latin typeface="Arial" pitchFamily="34" charset="0"/>
-                <a:ea typeface="Arial" pitchFamily="34" charset="-122"/>
-                <a:cs typeface="Arial" pitchFamily="34" charset="-120"/>
-              </a:rPr>
-              <a:t>, not "I'm skipping a number."</a:t>
+              <a:t>"Tomorrow — using the same 'completion to 10' trick for mental addition of 2-digit numbers near a base."</a:t>
             </a:r>
             <a:endParaRPr lang="en-US" sz="1200" dirty="0"/>
           </a:p>
@@ -2906,7 +3383,7 @@
                 <a:ea typeface="Georgia" pitchFamily="34" charset="-122"/>
                 <a:cs typeface="Georgia" pitchFamily="34" charset="-120"/>
               </a:rPr>
-              <a:t>Citation(s) used in this lesson</a:t>
+              <a:t>Student-facing content</a:t>
             </a:r>
             <a:endParaRPr lang="en-US" sz="1800" dirty="0"/>
           </a:p>
@@ -2920,31 +3397,508 @@
         </p:nvSpPr>
         <p:spPr>
           <a:xfrm>
-            <a:off x="634901" y="883593"/>
-            <a:ext cx="8102798" cy="281880"/>
-          </a:xfrm>
-          <a:prstGeom prst="rect">
+            <a:off x="406301" y="883593"/>
+            <a:ext cx="8331398" cy="2112169"/>
+          </a:xfrm>
+          <a:prstGeom prst="rect">
+            <a:avLst/>
+          </a:prstGeom>
+          <a:solidFill>
+            <a:srgbClr val="F4F8F9"/>
+          </a:solidFill>
+          <a:ln/>
+        </p:spPr>
+        <p:txBody>
+          <a:bodyPr wrap="square" rtlCol="0" anchor="ctr"/>
+          <a:lstStyle/>
+          <a:p>
+            <a:pPr indent="0" marL="0">
+              <a:buNone/>
+            </a:pPr>
+            <a:endParaRPr lang="en-US" dirty="0"/>
+          </a:p>
+        </p:txBody>
+      </p:sp>
+      <p:sp>
+        <p:nvSpPr>
+          <p:cNvPr id="5" name="Shape 3"/>
+          <p:cNvSpPr/>
+          <p:nvPr/>
+        </p:nvSpPr>
+        <p:spPr>
+          <a:xfrm>
+            <a:off x="434876" y="883593"/>
+            <a:ext cx="0" cy="2112169"/>
+          </a:xfrm>
+          <a:prstGeom prst="line">
             <a:avLst/>
           </a:prstGeom>
           <a:noFill/>
+          <a:ln w="57150">
+            <a:solidFill>
+              <a:srgbClr val="FE4447"/>
+            </a:solidFill>
+            <a:prstDash val="solid"/>
+          </a:ln>
+        </p:spPr>
+      </p:sp>
+      <p:sp>
+        <p:nvSpPr>
+          <p:cNvPr id="6" name="Text 4"/>
+          <p:cNvSpPr/>
+          <p:nvPr/>
+        </p:nvSpPr>
+        <p:spPr>
+          <a:xfrm>
+            <a:off x="692051" y="1074093"/>
+            <a:ext cx="7973389" cy="230981"/>
+          </a:xfrm>
+          <a:prstGeom prst="rect">
+            <a:avLst/>
+          </a:prstGeom>
+          <a:noFill/>
           <a:ln/>
         </p:spPr>
         <p:txBody>
           <a:bodyPr wrap="square" lIns="0" tIns="0" rIns="0" bIns="0" rtlCol="0" anchor="t"/>
           <a:lstStyle/>
           <a:p>
-            <a:pPr algn="l" marL="342900" indent="-342900">
-              <a:lnSpc>
-                <a:spcPts val="1620"/>
-              </a:lnSpc>
-              <a:spcAft>
-                <a:spcPts val="300"/>
-              </a:spcAft>
-              <a:buSzPct val="100000"/>
-              <a:buChar char="•"/>
-            </a:pPr>
-            <a:r>
-              <a:rPr lang="en-US" sz="1200" i="1" dirty="0">
+            <a:pPr algn="l" indent="0" marL="0">
+              <a:lnSpc>
+                <a:spcPts val="1820"/>
+              </a:lnSpc>
+              <a:spcBef>
+                <a:spcPts val="300"/>
+              </a:spcBef>
+              <a:spcAft>
+                <a:spcPts val="300"/>
+              </a:spcAft>
+              <a:buNone/>
+            </a:pPr>
+            <a:r>
+              <a:rPr lang="en-US" sz="1300" b="1" i="1" dirty="0">
+                <a:solidFill>
+                  <a:srgbClr val="1C2833"/>
+                </a:solidFill>
+                <a:latin typeface="Georgia" pitchFamily="34" charset="0"/>
+                <a:ea typeface="Georgia" pitchFamily="34" charset="-122"/>
+                <a:cs typeface="Georgia" pitchFamily="34" charset="-120"/>
+              </a:rPr>
+              <a:t>Why the dot method works</a:t>
+            </a:r>
+            <a:endParaRPr lang="en-US" sz="1300" dirty="0"/>
+          </a:p>
+        </p:txBody>
+      </p:sp>
+      <p:sp>
+        <p:nvSpPr>
+          <p:cNvPr id="7" name="Text 5"/>
+          <p:cNvSpPr/>
+          <p:nvPr/>
+        </p:nvSpPr>
+        <p:spPr>
+          <a:xfrm>
+            <a:off x="692051" y="1343174"/>
+            <a:ext cx="7973389" cy="461963"/>
+          </a:xfrm>
+          <a:prstGeom prst="rect">
+            <a:avLst/>
+          </a:prstGeom>
+          <a:noFill/>
+          <a:ln/>
+        </p:spPr>
+        <p:txBody>
+          <a:bodyPr wrap="square" lIns="0" tIns="0" rIns="0" bIns="0" rtlCol="0" anchor="t"/>
+          <a:lstStyle/>
+          <a:p>
+            <a:pPr algn="l" indent="0" marL="0">
+              <a:lnSpc>
+                <a:spcPts val="1820"/>
+              </a:lnSpc>
+              <a:spcBef>
+                <a:spcPts val="300"/>
+              </a:spcBef>
+              <a:spcAft>
+                <a:spcPts val="300"/>
+              </a:spcAft>
+              <a:buNone/>
+            </a:pPr>
+            <a:r>
+              <a:rPr lang="en-US" sz="1300" dirty="0">
+                <a:solidFill>
+                  <a:srgbClr val="1C2833"/>
+                </a:solidFill>
+                <a:latin typeface="Georgia" pitchFamily="34" charset="0"/>
+                <a:ea typeface="Georgia" pitchFamily="34" charset="-122"/>
+                <a:cs typeface="Georgia" pitchFamily="34" charset="-120"/>
+              </a:rPr>
+              <a:t>A column of digits is in some place-value column — units, tens, hundreds. When the running total reaches 10, that's literally </a:t>
+            </a:r>
+            <a:pPr algn="l" indent="0" marL="0">
+              <a:lnSpc>
+                <a:spcPts val="1820"/>
+              </a:lnSpc>
+              <a:spcBef>
+                <a:spcPts val="300"/>
+              </a:spcBef>
+              <a:spcAft>
+                <a:spcPts val="300"/>
+              </a:spcAft>
+              <a:buNone/>
+            </a:pPr>
+            <a:r>
+              <a:rPr lang="en-US" sz="1300" b="1" i="1" dirty="0">
+                <a:solidFill>
+                  <a:srgbClr val="1C2833"/>
+                </a:solidFill>
+                <a:latin typeface="Georgia" pitchFamily="34" charset="0"/>
+                <a:ea typeface="Georgia" pitchFamily="34" charset="-122"/>
+                <a:cs typeface="Georgia" pitchFamily="34" charset="-120"/>
+              </a:rPr>
+              <a:t>one</a:t>
+            </a:r>
+            <a:pPr algn="l" indent="0" marL="0">
+              <a:lnSpc>
+                <a:spcPts val="1820"/>
+              </a:lnSpc>
+              <a:spcBef>
+                <a:spcPts val="300"/>
+              </a:spcBef>
+              <a:spcAft>
+                <a:spcPts val="300"/>
+              </a:spcAft>
+              <a:buNone/>
+            </a:pPr>
+            <a:r>
+              <a:rPr lang="en-US" sz="1300" dirty="0">
+                <a:solidFill>
+                  <a:srgbClr val="1C2833"/>
+                </a:solidFill>
+                <a:latin typeface="Georgia" pitchFamily="34" charset="0"/>
+                <a:ea typeface="Georgia" pitchFamily="34" charset="-122"/>
+                <a:cs typeface="Georgia" pitchFamily="34" charset="-120"/>
+              </a:rPr>
+              <a:t> of the next place value. So the dot is just a </a:t>
+            </a:r>
+            <a:pPr algn="l" indent="0" marL="0">
+              <a:lnSpc>
+                <a:spcPts val="1820"/>
+              </a:lnSpc>
+              <a:spcBef>
+                <a:spcPts val="300"/>
+              </a:spcBef>
+              <a:spcAft>
+                <a:spcPts val="300"/>
+              </a:spcAft>
+              <a:buNone/>
+            </a:pPr>
+            <a:r>
+              <a:rPr lang="en-US" sz="1300" i="1" dirty="0">
+                <a:solidFill>
+                  <a:srgbClr val="1C2833"/>
+                </a:solidFill>
+                <a:latin typeface="Georgia" pitchFamily="34" charset="0"/>
+                <a:ea typeface="Georgia" pitchFamily="34" charset="-122"/>
+                <a:cs typeface="Georgia" pitchFamily="34" charset="-120"/>
+              </a:rPr>
+              <a:t>visible</a:t>
+            </a:r>
+            <a:pPr algn="l" indent="0" marL="0">
+              <a:lnSpc>
+                <a:spcPts val="1820"/>
+              </a:lnSpc>
+              <a:spcBef>
+                <a:spcPts val="300"/>
+              </a:spcBef>
+              <a:spcAft>
+                <a:spcPts val="300"/>
+              </a:spcAft>
+              <a:buNone/>
+            </a:pPr>
+            <a:r>
+              <a:rPr lang="en-US" sz="1300" dirty="0">
+                <a:solidFill>
+                  <a:srgbClr val="1C2833"/>
+                </a:solidFill>
+                <a:latin typeface="Georgia" pitchFamily="34" charset="0"/>
+                <a:ea typeface="Georgia" pitchFamily="34" charset="-122"/>
+                <a:cs typeface="Georgia" pitchFamily="34" charset="-120"/>
+              </a:rPr>
+              <a:t> carry.</a:t>
+            </a:r>
+            <a:endParaRPr lang="en-US" sz="1300" dirty="0"/>
+          </a:p>
+        </p:txBody>
+      </p:sp>
+      <p:sp>
+        <p:nvSpPr>
+          <p:cNvPr id="8" name="Text 6"/>
+          <p:cNvSpPr/>
+          <p:nvPr/>
+        </p:nvSpPr>
+        <p:spPr>
+          <a:xfrm>
+            <a:off x="692051" y="1843236"/>
+            <a:ext cx="7973389" cy="692944"/>
+          </a:xfrm>
+          <a:prstGeom prst="rect">
+            <a:avLst/>
+          </a:prstGeom>
+          <a:noFill/>
+          <a:ln/>
+        </p:spPr>
+        <p:txBody>
+          <a:bodyPr wrap="square" lIns="0" tIns="0" rIns="0" bIns="0" rtlCol="0" anchor="t"/>
+          <a:lstStyle/>
+          <a:p>
+            <a:pPr algn="l" indent="0" marL="0">
+              <a:lnSpc>
+                <a:spcPts val="1820"/>
+              </a:lnSpc>
+              <a:spcBef>
+                <a:spcPts val="300"/>
+              </a:spcBef>
+              <a:spcAft>
+                <a:spcPts val="300"/>
+              </a:spcAft>
+              <a:buNone/>
+            </a:pPr>
+            <a:r>
+              <a:rPr lang="en-US" sz="1300" dirty="0">
+                <a:solidFill>
+                  <a:srgbClr val="1C2833"/>
+                </a:solidFill>
+                <a:latin typeface="Georgia" pitchFamily="34" charset="0"/>
+                <a:ea typeface="Georgia" pitchFamily="34" charset="-122"/>
+                <a:cs typeface="Georgia" pitchFamily="34" charset="-120"/>
+              </a:rPr>
+              <a:t>The 16 sūtras of Vedic mathematics (Tirthaji, 1965) include </a:t>
+            </a:r>
+            <a:pPr algn="l" indent="0" marL="0">
+              <a:lnSpc>
+                <a:spcPts val="1820"/>
+              </a:lnSpc>
+              <a:spcBef>
+                <a:spcPts val="300"/>
+              </a:spcBef>
+              <a:spcAft>
+                <a:spcPts val="300"/>
+              </a:spcAft>
+              <a:buNone/>
+            </a:pPr>
+            <a:r>
+              <a:rPr lang="en-US" sz="1300" i="1" dirty="0">
+                <a:solidFill>
+                  <a:srgbClr val="1C2833"/>
+                </a:solidFill>
+                <a:latin typeface="Georgia" pitchFamily="34" charset="0"/>
+                <a:ea typeface="Georgia" pitchFamily="34" charset="-122"/>
+                <a:cs typeface="Georgia" pitchFamily="34" charset="-120"/>
+              </a:rPr>
+              <a:t>Sankalana Vyavakalanābhyām</a:t>
+            </a:r>
+            <a:pPr algn="l" indent="0" marL="0">
+              <a:lnSpc>
+                <a:spcPts val="1820"/>
+              </a:lnSpc>
+              <a:spcBef>
+                <a:spcPts val="300"/>
+              </a:spcBef>
+              <a:spcAft>
+                <a:spcPts val="300"/>
+              </a:spcAft>
+              <a:buNone/>
+            </a:pPr>
+            <a:r>
+              <a:rPr lang="en-US" sz="1300" dirty="0">
+                <a:solidFill>
+                  <a:srgbClr val="1C2833"/>
+                </a:solidFill>
+                <a:latin typeface="Georgia" pitchFamily="34" charset="0"/>
+                <a:ea typeface="Georgia" pitchFamily="34" charset="-122"/>
+                <a:cs typeface="Georgia" pitchFamily="34" charset="-120"/>
+              </a:rPr>
+              <a:t> ("by addition and by subtraction") and </a:t>
+            </a:r>
+            <a:pPr algn="l" indent="0" marL="0">
+              <a:lnSpc>
+                <a:spcPts val="1820"/>
+              </a:lnSpc>
+              <a:spcBef>
+                <a:spcPts val="300"/>
+              </a:spcBef>
+              <a:spcAft>
+                <a:spcPts val="300"/>
+              </a:spcAft>
+              <a:buNone/>
+            </a:pPr>
+            <a:r>
+              <a:rPr lang="en-US" sz="1300" i="1" dirty="0">
+                <a:solidFill>
+                  <a:srgbClr val="1C2833"/>
+                </a:solidFill>
+                <a:latin typeface="Georgia" pitchFamily="34" charset="0"/>
+                <a:ea typeface="Georgia" pitchFamily="34" charset="-122"/>
+                <a:cs typeface="Georgia" pitchFamily="34" charset="-120"/>
+              </a:rPr>
+              <a:t>Pūraṇāpūraṇābhyāṁ</a:t>
+            </a:r>
+            <a:pPr algn="l" indent="0" marL="0">
+              <a:lnSpc>
+                <a:spcPts val="1820"/>
+              </a:lnSpc>
+              <a:spcBef>
+                <a:spcPts val="300"/>
+              </a:spcBef>
+              <a:spcAft>
+                <a:spcPts val="300"/>
+              </a:spcAft>
+              <a:buNone/>
+            </a:pPr>
+            <a:r>
+              <a:rPr lang="en-US" sz="1300" dirty="0">
+                <a:solidFill>
+                  <a:srgbClr val="1C2833"/>
+                </a:solidFill>
+                <a:latin typeface="Georgia" pitchFamily="34" charset="0"/>
+                <a:ea typeface="Georgia" pitchFamily="34" charset="-122"/>
+                <a:cs typeface="Georgia" pitchFamily="34" charset="-120"/>
+              </a:rPr>
+              <a:t> ("by completing or non-completing") — both use the </a:t>
+            </a:r>
+            <a:pPr algn="l" indent="0" marL="0">
+              <a:lnSpc>
+                <a:spcPts val="1820"/>
+              </a:lnSpc>
+              <a:spcBef>
+                <a:spcPts val="300"/>
+              </a:spcBef>
+              <a:spcAft>
+                <a:spcPts val="300"/>
+              </a:spcAft>
+              <a:buNone/>
+            </a:pPr>
+            <a:r>
+              <a:rPr lang="en-US" sz="1300" i="1" dirty="0">
+                <a:solidFill>
+                  <a:srgbClr val="1C2833"/>
+                </a:solidFill>
+                <a:latin typeface="Georgia" pitchFamily="34" charset="0"/>
+                <a:ea typeface="Georgia" pitchFamily="34" charset="-122"/>
+                <a:cs typeface="Georgia" pitchFamily="34" charset="-120"/>
+              </a:rPr>
+              <a:t>idea</a:t>
+            </a:r>
+            <a:pPr algn="l" indent="0" marL="0">
+              <a:lnSpc>
+                <a:spcPts val="1820"/>
+              </a:lnSpc>
+              <a:spcBef>
+                <a:spcPts val="300"/>
+              </a:spcBef>
+              <a:spcAft>
+                <a:spcPts val="300"/>
+              </a:spcAft>
+              <a:buNone/>
+            </a:pPr>
+            <a:r>
+              <a:rPr lang="en-US" sz="1300" dirty="0">
+                <a:solidFill>
+                  <a:srgbClr val="1C2833"/>
+                </a:solidFill>
+                <a:latin typeface="Georgia" pitchFamily="34" charset="0"/>
+                <a:ea typeface="Georgia" pitchFamily="34" charset="-122"/>
+                <a:cs typeface="Georgia" pitchFamily="34" charset="-120"/>
+              </a:rPr>
+              <a:t> of looking for completions to a base (like 10). The dot method makes this idea concrete and visible.</a:t>
+            </a:r>
+            <a:endParaRPr lang="en-US" sz="1300" dirty="0"/>
+          </a:p>
+        </p:txBody>
+      </p:sp>
+      <p:sp>
+        <p:nvSpPr>
+          <p:cNvPr id="9" name="Text 7"/>
+          <p:cNvSpPr/>
+          <p:nvPr/>
+        </p:nvSpPr>
+        <p:spPr>
+          <a:xfrm>
+            <a:off x="692051" y="2574280"/>
+            <a:ext cx="7973389" cy="230981"/>
+          </a:xfrm>
+          <a:prstGeom prst="rect">
+            <a:avLst/>
+          </a:prstGeom>
+          <a:noFill/>
+          <a:ln/>
+        </p:spPr>
+        <p:txBody>
+          <a:bodyPr wrap="square" lIns="0" tIns="0" rIns="0" bIns="0" rtlCol="0" anchor="t"/>
+          <a:lstStyle/>
+          <a:p>
+            <a:pPr algn="l" indent="0" marL="0">
+              <a:lnSpc>
+                <a:spcPts val="1820"/>
+              </a:lnSpc>
+              <a:spcBef>
+                <a:spcPts val="300"/>
+              </a:spcBef>
+              <a:spcAft>
+                <a:spcPts val="300"/>
+              </a:spcAft>
+              <a:buNone/>
+            </a:pPr>
+            <a:r>
+              <a:rPr lang="en-US" sz="1300" b="1" i="1" dirty="0">
+                <a:solidFill>
+                  <a:srgbClr val="1C2833"/>
+                </a:solidFill>
+                <a:latin typeface="Georgia" pitchFamily="34" charset="0"/>
+                <a:ea typeface="Georgia" pitchFamily="34" charset="-122"/>
+                <a:cs typeface="Georgia" pitchFamily="34" charset="-120"/>
+              </a:rPr>
+              <a:t>It is not magic. It is good notation.</a:t>
+            </a:r>
+            <a:endParaRPr lang="en-US" sz="1300" dirty="0"/>
+          </a:p>
+        </p:txBody>
+      </p:sp>
+      <p:sp>
+        <p:nvSpPr>
+          <p:cNvPr id="10" name="Text 8"/>
+          <p:cNvSpPr/>
+          <p:nvPr/>
+        </p:nvSpPr>
+        <p:spPr>
+          <a:xfrm>
+            <a:off x="406301" y="4434929"/>
+            <a:ext cx="8498026" cy="213271"/>
+          </a:xfrm>
+          <a:prstGeom prst="rect">
+            <a:avLst/>
+          </a:prstGeom>
+          <a:noFill/>
+          <a:ln/>
+        </p:spPr>
+        <p:txBody>
+          <a:bodyPr wrap="square" lIns="0" tIns="0" rIns="0" bIns="0" rtlCol="0" anchor="t"/>
+          <a:lstStyle/>
+          <a:p>
+            <a:pPr algn="l" indent="0" marL="0">
+              <a:lnSpc>
+                <a:spcPts val="1680"/>
+              </a:lnSpc>
+              <a:spcBef>
+                <a:spcPts val="300"/>
+              </a:spcBef>
+              <a:spcAft>
+                <a:spcPts val="300"/>
+              </a:spcAft>
+              <a:buNone/>
+            </a:pPr>
+            <a:r>
+              <a:rPr lang="en-US" sz="1200" dirty="0">
                 <a:solidFill>
                   <a:srgbClr val="1C2833"/>
                 </a:solidFill>
@@ -2952,16 +3906,152 @@
                 <a:ea typeface="Arial" pitchFamily="34" charset="-122"/>
                 <a:cs typeface="Arial" pitchFamily="34" charset="-120"/>
               </a:rPr>
-              <a:t>Microsoft Word - sutras1.pdf</a:t>
-            </a:r>
-            <a:pPr algn="l" indent="0" marL="0">
+              <a:t>Middle ·  · IKS Curriculum</a:t>
+            </a:r>
+            <a:endParaRPr lang="en-US" sz="1200" dirty="0"/>
+          </a:p>
+        </p:txBody>
+      </p:sp>
+    </p:spTree>
+  </p:cSld>
+  <p:clrMapOvr>
+    <a:masterClrMapping/>
+  </p:clrMapOvr>
+</p:sld>
+</file>
+
+<file path=ppt/slides/slide13.xml><?xml version="1.0" encoding="utf-8"?>
+<p:sld xmlns:a="http://schemas.openxmlformats.org/drawingml/2006/main" xmlns:r="http://schemas.openxmlformats.org/officeDocument/2006/relationships" xmlns:p="http://schemas.openxmlformats.org/presentationml/2006/main">
+  <p:cSld name="Slide 13">
+    <p:bg>
+      <p:bgPr>
+        <a:solidFill>
+          <a:srgbClr val="FFFFFF"/>
+        </a:solidFill>
+      </p:bgPr>
+    </p:bg>
+    <p:spTree>
+      <p:nvGrpSpPr>
+        <p:cNvPr id="1" name=""/>
+        <p:cNvGrpSpPr/>
+        <p:nvPr/>
+      </p:nvGrpSpPr>
+      <p:grpSpPr>
+        <a:xfrm>
+          <a:off x="0" y="0"/>
+          <a:ext cx="0" cy="0"/>
+          <a:chOff x="0" y="0"/>
+          <a:chExt cx="0" cy="0"/>
+        </a:xfrm>
+      </p:grpSpPr>
+      <p:sp>
+        <p:nvSpPr>
+          <p:cNvPr id="2" name="Text 0"/>
+          <p:cNvSpPr/>
+          <p:nvPr/>
+        </p:nvSpPr>
+        <p:spPr>
+          <a:xfrm>
+            <a:off x="0" y="0"/>
+            <a:ext cx="9144000" cy="101501"/>
+          </a:xfrm>
+          <a:prstGeom prst="rect">
+            <a:avLst/>
+          </a:prstGeom>
+          <a:solidFill>
+            <a:srgbClr val="277884"/>
+          </a:solidFill>
+          <a:ln/>
+        </p:spPr>
+        <p:txBody>
+          <a:bodyPr wrap="square" rtlCol="0" anchor="ctr"/>
+          <a:lstStyle/>
+          <a:p>
+            <a:pPr indent="0" marL="0">
+              <a:buNone/>
+            </a:pPr>
+            <a:endParaRPr lang="en-US" dirty="0"/>
+          </a:p>
+        </p:txBody>
+      </p:sp>
+      <p:sp>
+        <p:nvSpPr>
+          <p:cNvPr id="3" name="Text 1"/>
+          <p:cNvSpPr/>
+          <p:nvPr/>
+        </p:nvSpPr>
+        <p:spPr>
+          <a:xfrm>
+            <a:off x="406301" y="457051"/>
+            <a:ext cx="8498026" cy="274290"/>
+          </a:xfrm>
+          <a:prstGeom prst="rect">
+            <a:avLst/>
+          </a:prstGeom>
+          <a:noFill/>
+          <a:ln/>
+        </p:spPr>
+        <p:txBody>
+          <a:bodyPr wrap="square" lIns="0" tIns="0" rIns="0" bIns="0" rtlCol="0" anchor="t"/>
+          <a:lstStyle/>
+          <a:p>
+            <a:pPr algn="l" indent="0" marL="0">
+              <a:lnSpc>
+                <a:spcPts val="2160"/>
+              </a:lnSpc>
+              <a:spcBef>
+                <a:spcPts val="600"/>
+              </a:spcBef>
+              <a:spcAft>
+                <a:spcPts val="800"/>
+              </a:spcAft>
+              <a:buNone/>
+            </a:pPr>
+            <a:r>
+              <a:rPr lang="en-US" sz="1800" b="1" dirty="0">
+                <a:solidFill>
+                  <a:srgbClr val="FE4447"/>
+                </a:solidFill>
+                <a:latin typeface="Georgia" pitchFamily="34" charset="0"/>
+                <a:ea typeface="Georgia" pitchFamily="34" charset="-122"/>
+                <a:cs typeface="Georgia" pitchFamily="34" charset="-120"/>
+              </a:rPr>
+              <a:t>Homework</a:t>
+            </a:r>
+            <a:endParaRPr lang="en-US" sz="1800" dirty="0"/>
+          </a:p>
+        </p:txBody>
+      </p:sp>
+      <p:sp>
+        <p:nvSpPr>
+          <p:cNvPr id="4" name="Text 2"/>
+          <p:cNvSpPr/>
+          <p:nvPr/>
+        </p:nvSpPr>
+        <p:spPr>
+          <a:xfrm>
+            <a:off x="634901" y="883593"/>
+            <a:ext cx="8102798" cy="487561"/>
+          </a:xfrm>
+          <a:prstGeom prst="rect">
+            <a:avLst/>
+          </a:prstGeom>
+          <a:noFill/>
+          <a:ln/>
+        </p:spPr>
+        <p:txBody>
+          <a:bodyPr wrap="square" lIns="0" tIns="0" rIns="0" bIns="0" rtlCol="0" anchor="t"/>
+          <a:lstStyle/>
+          <a:p>
+            <a:pPr algn="l" marL="342900" indent="-342900">
               <a:lnSpc>
                 <a:spcPts val="1620"/>
               </a:lnSpc>
               <a:spcAft>
                 <a:spcPts val="300"/>
               </a:spcAft>
-              <a:buNone/>
+              <a:buSzPct val="100000"/>
+              <a:buChar char="•"/>
             </a:pPr>
             <a:r>
               <a:rPr lang="en-US" sz="1200" dirty="0">
@@ -2972,7 +4062,7 @@
                 <a:ea typeface="Arial" pitchFamily="34" charset="-122"/>
                 <a:cs typeface="Arial" pitchFamily="34" charset="-120"/>
               </a:rPr>
-              <a:t> — list of 16 Tirthaji sūtras (sūtras #7 and #8 specifically).</a:t>
+              <a:t>Find ONE example in your daily life where you naturally "complete to 10" without thinking. (E.g. adding tip to a bill — round to 10. Counting change. Adding minutes to a clock.) Write 2 sentences describing it.</a:t>
             </a:r>
             <a:endParaRPr lang="en-US" sz="1200" dirty="0"/>
           </a:p>
@@ -2986,7 +4076,7 @@
         </p:nvSpPr>
         <p:spPr>
           <a:xfrm>
-            <a:off x="406301" y="1254323"/>
+            <a:off x="406301" y="4434929"/>
             <a:ext cx="8498026" cy="213271"/>
           </a:xfrm>
           <a:prstGeom prst="rect">
@@ -3020,22 +4110,155 @@
                 <a:ea typeface="Arial" pitchFamily="34" charset="-122"/>
                 <a:cs typeface="Arial" pitchFamily="34" charset="-120"/>
               </a:rPr>
-              <a:t>– Optional teacher reference: </a:t>
-            </a:r>
-            <a:pPr algn="l" indent="0" marL="0">
-              <a:lnSpc>
-                <a:spcPts val="1680"/>
+              <a:t>Middle ·  · IKS Curriculum</a:t>
+            </a:r>
+            <a:endParaRPr lang="en-US" sz="1200" dirty="0"/>
+          </a:p>
+        </p:txBody>
+      </p:sp>
+    </p:spTree>
+  </p:cSld>
+  <p:clrMapOvr>
+    <a:masterClrMapping/>
+  </p:clrMapOvr>
+</p:sld>
+</file>
+
+<file path=ppt/slides/slide14.xml><?xml version="1.0" encoding="utf-8"?>
+<p:sld xmlns:a="http://schemas.openxmlformats.org/drawingml/2006/main" xmlns:r="http://schemas.openxmlformats.org/officeDocument/2006/relationships" xmlns:p="http://schemas.openxmlformats.org/presentationml/2006/main">
+  <p:cSld name="Slide 14">
+    <p:bg>
+      <p:bgPr>
+        <a:solidFill>
+          <a:srgbClr val="FFFFFF"/>
+        </a:solidFill>
+      </p:bgPr>
+    </p:bg>
+    <p:spTree>
+      <p:nvGrpSpPr>
+        <p:cNvPr id="1" name=""/>
+        <p:cNvGrpSpPr/>
+        <p:nvPr/>
+      </p:nvGrpSpPr>
+      <p:grpSpPr>
+        <a:xfrm>
+          <a:off x="0" y="0"/>
+          <a:ext cx="0" cy="0"/>
+          <a:chOff x="0" y="0"/>
+          <a:chExt cx="0" cy="0"/>
+        </a:xfrm>
+      </p:grpSpPr>
+      <p:sp>
+        <p:nvSpPr>
+          <p:cNvPr id="2" name="Text 0"/>
+          <p:cNvSpPr/>
+          <p:nvPr/>
+        </p:nvSpPr>
+        <p:spPr>
+          <a:xfrm>
+            <a:off x="0" y="0"/>
+            <a:ext cx="9144000" cy="101501"/>
+          </a:xfrm>
+          <a:prstGeom prst="rect">
+            <a:avLst/>
+          </a:prstGeom>
+          <a:solidFill>
+            <a:srgbClr val="277884"/>
+          </a:solidFill>
+          <a:ln/>
+        </p:spPr>
+        <p:txBody>
+          <a:bodyPr wrap="square" rtlCol="0" anchor="ctr"/>
+          <a:lstStyle/>
+          <a:p>
+            <a:pPr indent="0" marL="0">
+              <a:buNone/>
+            </a:pPr>
+            <a:endParaRPr lang="en-US" dirty="0"/>
+          </a:p>
+        </p:txBody>
+      </p:sp>
+      <p:sp>
+        <p:nvSpPr>
+          <p:cNvPr id="3" name="Text 1"/>
+          <p:cNvSpPr/>
+          <p:nvPr/>
+        </p:nvSpPr>
+        <p:spPr>
+          <a:xfrm>
+            <a:off x="406301" y="457051"/>
+            <a:ext cx="8498026" cy="274290"/>
+          </a:xfrm>
+          <a:prstGeom prst="rect">
+            <a:avLst/>
+          </a:prstGeom>
+          <a:noFill/>
+          <a:ln/>
+        </p:spPr>
+        <p:txBody>
+          <a:bodyPr wrap="square" lIns="0" tIns="0" rIns="0" bIns="0" rtlCol="0" anchor="t"/>
+          <a:lstStyle/>
+          <a:p>
+            <a:pPr algn="l" indent="0" marL="0">
+              <a:lnSpc>
+                <a:spcPts val="2160"/>
               </a:lnSpc>
               <a:spcBef>
-                <a:spcPts val="300"/>
+                <a:spcPts val="600"/>
               </a:spcBef>
               <a:spcAft>
-                <a:spcPts val="300"/>
-              </a:spcAft>
-              <a:buNone/>
-            </a:pPr>
-            <a:r>
-              <a:rPr lang="en-US" sz="1200" i="1" dirty="0">
+                <a:spcPts val="800"/>
+              </a:spcAft>
+              <a:buNone/>
+            </a:pPr>
+            <a:r>
+              <a:rPr lang="en-US" sz="1800" b="1" dirty="0">
+                <a:solidFill>
+                  <a:srgbClr val="FE4447"/>
+                </a:solidFill>
+                <a:latin typeface="Georgia" pitchFamily="34" charset="0"/>
+                <a:ea typeface="Georgia" pitchFamily="34" charset="-122"/>
+                <a:cs typeface="Georgia" pitchFamily="34" charset="-120"/>
+              </a:rPr>
+              <a:t>Differentiation</a:t>
+            </a:r>
+            <a:endParaRPr lang="en-US" sz="1800" dirty="0"/>
+          </a:p>
+        </p:txBody>
+      </p:sp>
+      <p:sp>
+        <p:nvSpPr>
+          <p:cNvPr id="4" name="Text 2"/>
+          <p:cNvSpPr/>
+          <p:nvPr/>
+        </p:nvSpPr>
+        <p:spPr>
+          <a:xfrm>
+            <a:off x="634901" y="883593"/>
+            <a:ext cx="8102798" cy="731341"/>
+          </a:xfrm>
+          <a:prstGeom prst="rect">
+            <a:avLst/>
+          </a:prstGeom>
+          <a:noFill/>
+          <a:ln/>
+        </p:spPr>
+        <p:txBody>
+          <a:bodyPr wrap="square" lIns="0" tIns="0" rIns="0" bIns="0" rtlCol="0" anchor="t"/>
+          <a:lstStyle/>
+          <a:p>
+            <a:pPr algn="l" marL="342900" indent="-342900">
+              <a:lnSpc>
+                <a:spcPts val="1620"/>
+              </a:lnSpc>
+              <a:spcAft>
+                <a:spcPts val="300"/>
+              </a:spcAft>
+              <a:buSzPct val="100000"/>
+              <a:buChar char="•"/>
+            </a:pPr>
+            <a:r>
+              <a:rPr lang="en-US" sz="1200" b="1" dirty="0">
                 <a:solidFill>
                   <a:srgbClr val="1C2833"/>
                 </a:solidFill>
@@ -3043,15 +4266,12 @@
                 <a:ea typeface="Arial" pitchFamily="34" charset="-122"/>
                 <a:cs typeface="Arial" pitchFamily="34" charset="-120"/>
               </a:rPr>
-              <a:t>FUNDAMENTAL AND VEDIC MATHEMATICS .pdf</a:t>
-            </a:r>
-            <a:pPr algn="l" indent="0" marL="0">
-              <a:lnSpc>
-                <a:spcPts val="1680"/>
-              </a:lnSpc>
-              <a:spcBef>
-                <a:spcPts val="300"/>
-              </a:spcBef>
+              <a:t>Tier up:</a:t>
+            </a:r>
+            <a:pPr algn="l" indent="0" marL="0">
+              <a:lnSpc>
+                <a:spcPts val="1620"/>
+              </a:lnSpc>
               <a:spcAft>
                 <a:spcPts val="300"/>
               </a:spcAft>
@@ -3066,6 +4286,646 @@
                 <a:ea typeface="Arial" pitchFamily="34" charset="-122"/>
                 <a:cs typeface="Arial" pitchFamily="34" charset="-120"/>
               </a:rPr>
+              <a:t> Write a 1-paragraph explanation suitable for a Grade 11 student. Include the connection to base-10 representation and to the carry algorithm.</a:t>
+            </a:r>
+            <a:endParaRPr lang="en-US" sz="1200" dirty="0"/>
+          </a:p>
+          <a:p>
+            <a:pPr algn="l" marL="342900" indent="-342900">
+              <a:lnSpc>
+                <a:spcPts val="1620"/>
+              </a:lnSpc>
+              <a:spcAft>
+                <a:spcPts val="300"/>
+              </a:spcAft>
+              <a:buSzPct val="100000"/>
+              <a:buChar char="•"/>
+            </a:pPr>
+            <a:r>
+              <a:rPr lang="en-US" sz="1200" b="1" dirty="0">
+                <a:solidFill>
+                  <a:srgbClr val="1C2833"/>
+                </a:solidFill>
+                <a:latin typeface="Arial" pitchFamily="34" charset="0"/>
+                <a:ea typeface="Arial" pitchFamily="34" charset="-122"/>
+                <a:cs typeface="Arial" pitchFamily="34" charset="-120"/>
+              </a:rPr>
+              <a:t>Tier down:</a:t>
+            </a:r>
+            <a:pPr algn="l" indent="0" marL="0">
+              <a:lnSpc>
+                <a:spcPts val="1620"/>
+              </a:lnSpc>
+              <a:spcAft>
+                <a:spcPts val="300"/>
+              </a:spcAft>
+              <a:buNone/>
+            </a:pPr>
+            <a:r>
+              <a:rPr lang="en-US" sz="1200" dirty="0">
+                <a:solidFill>
+                  <a:srgbClr val="1C2833"/>
+                </a:solidFill>
+                <a:latin typeface="Arial" pitchFamily="34" charset="0"/>
+                <a:ea typeface="Arial" pitchFamily="34" charset="-122"/>
+                <a:cs typeface="Arial" pitchFamily="34" charset="-120"/>
+              </a:rPr>
+              <a:t> Skip the writing; just verbalise the explanation to your partner.</a:t>
+            </a:r>
+            <a:endParaRPr lang="en-US" sz="1200" dirty="0"/>
+          </a:p>
+        </p:txBody>
+      </p:sp>
+      <p:sp>
+        <p:nvSpPr>
+          <p:cNvPr id="5" name="Text 3"/>
+          <p:cNvSpPr/>
+          <p:nvPr/>
+        </p:nvSpPr>
+        <p:spPr>
+          <a:xfrm>
+            <a:off x="406301" y="4434929"/>
+            <a:ext cx="8498026" cy="213271"/>
+          </a:xfrm>
+          <a:prstGeom prst="rect">
+            <a:avLst/>
+          </a:prstGeom>
+          <a:noFill/>
+          <a:ln/>
+        </p:spPr>
+        <p:txBody>
+          <a:bodyPr wrap="square" lIns="0" tIns="0" rIns="0" bIns="0" rtlCol="0" anchor="t"/>
+          <a:lstStyle/>
+          <a:p>
+            <a:pPr algn="l" indent="0" marL="0">
+              <a:lnSpc>
+                <a:spcPts val="1680"/>
+              </a:lnSpc>
+              <a:spcBef>
+                <a:spcPts val="300"/>
+              </a:spcBef>
+              <a:spcAft>
+                <a:spcPts val="300"/>
+              </a:spcAft>
+              <a:buNone/>
+            </a:pPr>
+            <a:r>
+              <a:rPr lang="en-US" sz="1200" dirty="0">
+                <a:solidFill>
+                  <a:srgbClr val="1C2833"/>
+                </a:solidFill>
+                <a:latin typeface="Arial" pitchFamily="34" charset="0"/>
+                <a:ea typeface="Arial" pitchFamily="34" charset="-122"/>
+                <a:cs typeface="Arial" pitchFamily="34" charset="-120"/>
+              </a:rPr>
+              <a:t>Middle ·  · IKS Curriculum</a:t>
+            </a:r>
+            <a:endParaRPr lang="en-US" sz="1200" dirty="0"/>
+          </a:p>
+        </p:txBody>
+      </p:sp>
+    </p:spTree>
+  </p:cSld>
+  <p:clrMapOvr>
+    <a:masterClrMapping/>
+  </p:clrMapOvr>
+</p:sld>
+</file>
+
+<file path=ppt/slides/slide15.xml><?xml version="1.0" encoding="utf-8"?>
+<p:sld xmlns:a="http://schemas.openxmlformats.org/drawingml/2006/main" xmlns:r="http://schemas.openxmlformats.org/officeDocument/2006/relationships" xmlns:p="http://schemas.openxmlformats.org/presentationml/2006/main">
+  <p:cSld name="Slide 15">
+    <p:bg>
+      <p:bgPr>
+        <a:solidFill>
+          <a:srgbClr val="FFFFFF"/>
+        </a:solidFill>
+      </p:bgPr>
+    </p:bg>
+    <p:spTree>
+      <p:nvGrpSpPr>
+        <p:cNvPr id="1" name=""/>
+        <p:cNvGrpSpPr/>
+        <p:nvPr/>
+      </p:nvGrpSpPr>
+      <p:grpSpPr>
+        <a:xfrm>
+          <a:off x="0" y="0"/>
+          <a:ext cx="0" cy="0"/>
+          <a:chOff x="0" y="0"/>
+          <a:chExt cx="0" cy="0"/>
+        </a:xfrm>
+      </p:grpSpPr>
+      <p:sp>
+        <p:nvSpPr>
+          <p:cNvPr id="2" name="Text 0"/>
+          <p:cNvSpPr/>
+          <p:nvPr/>
+        </p:nvSpPr>
+        <p:spPr>
+          <a:xfrm>
+            <a:off x="0" y="0"/>
+            <a:ext cx="9144000" cy="101501"/>
+          </a:xfrm>
+          <a:prstGeom prst="rect">
+            <a:avLst/>
+          </a:prstGeom>
+          <a:solidFill>
+            <a:srgbClr val="277884"/>
+          </a:solidFill>
+          <a:ln/>
+        </p:spPr>
+        <p:txBody>
+          <a:bodyPr wrap="square" rtlCol="0" anchor="ctr"/>
+          <a:lstStyle/>
+          <a:p>
+            <a:pPr indent="0" marL="0">
+              <a:buNone/>
+            </a:pPr>
+            <a:endParaRPr lang="en-US" dirty="0"/>
+          </a:p>
+        </p:txBody>
+      </p:sp>
+      <p:sp>
+        <p:nvSpPr>
+          <p:cNvPr id="3" name="Text 1"/>
+          <p:cNvSpPr/>
+          <p:nvPr/>
+        </p:nvSpPr>
+        <p:spPr>
+          <a:xfrm>
+            <a:off x="406301" y="457051"/>
+            <a:ext cx="8498026" cy="274290"/>
+          </a:xfrm>
+          <a:prstGeom prst="rect">
+            <a:avLst/>
+          </a:prstGeom>
+          <a:noFill/>
+          <a:ln/>
+        </p:spPr>
+        <p:txBody>
+          <a:bodyPr wrap="square" lIns="0" tIns="0" rIns="0" bIns="0" rtlCol="0" anchor="t"/>
+          <a:lstStyle/>
+          <a:p>
+            <a:pPr algn="l" indent="0" marL="0">
+              <a:lnSpc>
+                <a:spcPts val="2160"/>
+              </a:lnSpc>
+              <a:spcBef>
+                <a:spcPts val="600"/>
+              </a:spcBef>
+              <a:spcAft>
+                <a:spcPts val="800"/>
+              </a:spcAft>
+              <a:buNone/>
+            </a:pPr>
+            <a:r>
+              <a:rPr lang="en-US" sz="1800" b="1" dirty="0">
+                <a:solidFill>
+                  <a:srgbClr val="FE4447"/>
+                </a:solidFill>
+                <a:latin typeface="Georgia" pitchFamily="34" charset="0"/>
+                <a:ea typeface="Georgia" pitchFamily="34" charset="-122"/>
+                <a:cs typeface="Georgia" pitchFamily="34" charset="-120"/>
+              </a:rPr>
+              <a:t>Teacher notes</a:t>
+            </a:r>
+            <a:endParaRPr lang="en-US" sz="1800" dirty="0"/>
+          </a:p>
+        </p:txBody>
+      </p:sp>
+      <p:sp>
+        <p:nvSpPr>
+          <p:cNvPr id="4" name="Text 2"/>
+          <p:cNvSpPr/>
+          <p:nvPr/>
+        </p:nvSpPr>
+        <p:spPr>
+          <a:xfrm>
+            <a:off x="634901" y="883593"/>
+            <a:ext cx="8102798" cy="937022"/>
+          </a:xfrm>
+          <a:prstGeom prst="rect">
+            <a:avLst/>
+          </a:prstGeom>
+          <a:noFill/>
+          <a:ln/>
+        </p:spPr>
+        <p:txBody>
+          <a:bodyPr wrap="square" lIns="0" tIns="0" rIns="0" bIns="0" rtlCol="0" anchor="t"/>
+          <a:lstStyle/>
+          <a:p>
+            <a:pPr algn="l" marL="342900" indent="-342900">
+              <a:lnSpc>
+                <a:spcPts val="1620"/>
+              </a:lnSpc>
+              <a:spcAft>
+                <a:spcPts val="300"/>
+              </a:spcAft>
+              <a:buSzPct val="100000"/>
+              <a:buChar char="•"/>
+            </a:pPr>
+            <a:r>
+              <a:rPr lang="en-US" sz="1200" dirty="0">
+                <a:solidFill>
+                  <a:srgbClr val="1C2833"/>
+                </a:solidFill>
+                <a:latin typeface="Arial" pitchFamily="34" charset="0"/>
+                <a:ea typeface="Arial" pitchFamily="34" charset="-122"/>
+                <a:cs typeface="Arial" pitchFamily="34" charset="-120"/>
+              </a:rPr>
+              <a:t>The honest "not in any sūtra" framing matters. Some students (or parents) believe the dot method is "ancient Vedic mathematics" — clarify gently. The achievement here is good </a:t>
+            </a:r>
+            <a:pPr algn="l" indent="0" marL="0">
+              <a:lnSpc>
+                <a:spcPts val="1620"/>
+              </a:lnSpc>
+              <a:spcAft>
+                <a:spcPts val="300"/>
+              </a:spcAft>
+              <a:buNone/>
+            </a:pPr>
+            <a:r>
+              <a:rPr lang="en-US" sz="1200" i="1" dirty="0">
+                <a:solidFill>
+                  <a:srgbClr val="1C2833"/>
+                </a:solidFill>
+                <a:latin typeface="Arial" pitchFamily="34" charset="0"/>
+                <a:ea typeface="Arial" pitchFamily="34" charset="-122"/>
+                <a:cs typeface="Arial" pitchFamily="34" charset="-120"/>
+              </a:rPr>
+              <a:t>teaching</a:t>
+            </a:r>
+            <a:pPr algn="l" indent="0" marL="0">
+              <a:lnSpc>
+                <a:spcPts val="1620"/>
+              </a:lnSpc>
+              <a:spcAft>
+                <a:spcPts val="300"/>
+              </a:spcAft>
+              <a:buNone/>
+            </a:pPr>
+            <a:r>
+              <a:rPr lang="en-US" sz="1200" dirty="0">
+                <a:solidFill>
+                  <a:srgbClr val="1C2833"/>
+                </a:solidFill>
+                <a:latin typeface="Arial" pitchFamily="34" charset="0"/>
+                <a:ea typeface="Arial" pitchFamily="34" charset="-122"/>
+                <a:cs typeface="Arial" pitchFamily="34" charset="-120"/>
+              </a:rPr>
+              <a:t>, which is also a real achievement.</a:t>
+            </a:r>
+            <a:endParaRPr lang="en-US" sz="1200" dirty="0"/>
+          </a:p>
+          <a:p>
+            <a:pPr algn="l" marL="342900" indent="-342900">
+              <a:lnSpc>
+                <a:spcPts val="1620"/>
+              </a:lnSpc>
+              <a:spcAft>
+                <a:spcPts val="300"/>
+              </a:spcAft>
+              <a:buSzPct val="100000"/>
+              <a:buChar char="•"/>
+            </a:pPr>
+            <a:r>
+              <a:rPr lang="en-US" sz="1200" dirty="0">
+                <a:solidFill>
+                  <a:srgbClr val="1C2833"/>
+                </a:solidFill>
+                <a:latin typeface="Arial" pitchFamily="34" charset="0"/>
+                <a:ea typeface="Arial" pitchFamily="34" charset="-122"/>
+                <a:cs typeface="Arial" pitchFamily="34" charset="-120"/>
+              </a:rPr>
+              <a:t>The most common error in student paragraphs: confusing the dot with "skip counting." Reinforce that the dot represents </a:t>
+            </a:r>
+            <a:pPr algn="l" indent="0" marL="0">
+              <a:lnSpc>
+                <a:spcPts val="1620"/>
+              </a:lnSpc>
+              <a:spcAft>
+                <a:spcPts val="300"/>
+              </a:spcAft>
+              <a:buNone/>
+            </a:pPr>
+            <a:r>
+              <a:rPr lang="en-US" sz="1200" i="1" dirty="0">
+                <a:solidFill>
+                  <a:srgbClr val="1C2833"/>
+                </a:solidFill>
+                <a:latin typeface="Arial" pitchFamily="34" charset="0"/>
+                <a:ea typeface="Arial" pitchFamily="34" charset="-122"/>
+                <a:cs typeface="Arial" pitchFamily="34" charset="-120"/>
+              </a:rPr>
+              <a:t>the carry</a:t>
+            </a:r>
+            <a:pPr algn="l" indent="0" marL="0">
+              <a:lnSpc>
+                <a:spcPts val="1620"/>
+              </a:lnSpc>
+              <a:spcAft>
+                <a:spcPts val="300"/>
+              </a:spcAft>
+              <a:buNone/>
+            </a:pPr>
+            <a:r>
+              <a:rPr lang="en-US" sz="1200" dirty="0">
+                <a:solidFill>
+                  <a:srgbClr val="1C2833"/>
+                </a:solidFill>
+                <a:latin typeface="Arial" pitchFamily="34" charset="0"/>
+                <a:ea typeface="Arial" pitchFamily="34" charset="-122"/>
+                <a:cs typeface="Arial" pitchFamily="34" charset="-120"/>
+              </a:rPr>
+              <a:t>, not "I'm skipping a number."</a:t>
+            </a:r>
+            <a:endParaRPr lang="en-US" sz="1200" dirty="0"/>
+          </a:p>
+        </p:txBody>
+      </p:sp>
+      <p:sp>
+        <p:nvSpPr>
+          <p:cNvPr id="5" name="Text 3"/>
+          <p:cNvSpPr/>
+          <p:nvPr/>
+        </p:nvSpPr>
+        <p:spPr>
+          <a:xfrm>
+            <a:off x="406301" y="4434929"/>
+            <a:ext cx="8498026" cy="213271"/>
+          </a:xfrm>
+          <a:prstGeom prst="rect">
+            <a:avLst/>
+          </a:prstGeom>
+          <a:noFill/>
+          <a:ln/>
+        </p:spPr>
+        <p:txBody>
+          <a:bodyPr wrap="square" lIns="0" tIns="0" rIns="0" bIns="0" rtlCol="0" anchor="t"/>
+          <a:lstStyle/>
+          <a:p>
+            <a:pPr algn="l" indent="0" marL="0">
+              <a:lnSpc>
+                <a:spcPts val="1680"/>
+              </a:lnSpc>
+              <a:spcBef>
+                <a:spcPts val="300"/>
+              </a:spcBef>
+              <a:spcAft>
+                <a:spcPts val="300"/>
+              </a:spcAft>
+              <a:buNone/>
+            </a:pPr>
+            <a:r>
+              <a:rPr lang="en-US" sz="1200" dirty="0">
+                <a:solidFill>
+                  <a:srgbClr val="1C2833"/>
+                </a:solidFill>
+                <a:latin typeface="Arial" pitchFamily="34" charset="0"/>
+                <a:ea typeface="Arial" pitchFamily="34" charset="-122"/>
+                <a:cs typeface="Arial" pitchFamily="34" charset="-120"/>
+              </a:rPr>
+              <a:t>Middle ·  · IKS Curriculum</a:t>
+            </a:r>
+            <a:endParaRPr lang="en-US" sz="1200" dirty="0"/>
+          </a:p>
+        </p:txBody>
+      </p:sp>
+    </p:spTree>
+  </p:cSld>
+  <p:clrMapOvr>
+    <a:masterClrMapping/>
+  </p:clrMapOvr>
+</p:sld>
+</file>
+
+<file path=ppt/slides/slide16.xml><?xml version="1.0" encoding="utf-8"?>
+<p:sld xmlns:a="http://schemas.openxmlformats.org/drawingml/2006/main" xmlns:r="http://schemas.openxmlformats.org/officeDocument/2006/relationships" xmlns:p="http://schemas.openxmlformats.org/presentationml/2006/main">
+  <p:cSld name="Slide 16">
+    <p:bg>
+      <p:bgPr>
+        <a:solidFill>
+          <a:srgbClr val="FFFFFF"/>
+        </a:solidFill>
+      </p:bgPr>
+    </p:bg>
+    <p:spTree>
+      <p:nvGrpSpPr>
+        <p:cNvPr id="1" name=""/>
+        <p:cNvGrpSpPr/>
+        <p:nvPr/>
+      </p:nvGrpSpPr>
+      <p:grpSpPr>
+        <a:xfrm>
+          <a:off x="0" y="0"/>
+          <a:ext cx="0" cy="0"/>
+          <a:chOff x="0" y="0"/>
+          <a:chExt cx="0" cy="0"/>
+        </a:xfrm>
+      </p:grpSpPr>
+      <p:sp>
+        <p:nvSpPr>
+          <p:cNvPr id="2" name="Text 0"/>
+          <p:cNvSpPr/>
+          <p:nvPr/>
+        </p:nvSpPr>
+        <p:spPr>
+          <a:xfrm>
+            <a:off x="0" y="0"/>
+            <a:ext cx="9144000" cy="101501"/>
+          </a:xfrm>
+          <a:prstGeom prst="rect">
+            <a:avLst/>
+          </a:prstGeom>
+          <a:solidFill>
+            <a:srgbClr val="277884"/>
+          </a:solidFill>
+          <a:ln/>
+        </p:spPr>
+        <p:txBody>
+          <a:bodyPr wrap="square" rtlCol="0" anchor="ctr"/>
+          <a:lstStyle/>
+          <a:p>
+            <a:pPr indent="0" marL="0">
+              <a:buNone/>
+            </a:pPr>
+            <a:endParaRPr lang="en-US" dirty="0"/>
+          </a:p>
+        </p:txBody>
+      </p:sp>
+      <p:sp>
+        <p:nvSpPr>
+          <p:cNvPr id="3" name="Text 1"/>
+          <p:cNvSpPr/>
+          <p:nvPr/>
+        </p:nvSpPr>
+        <p:spPr>
+          <a:xfrm>
+            <a:off x="406301" y="457051"/>
+            <a:ext cx="8498026" cy="274290"/>
+          </a:xfrm>
+          <a:prstGeom prst="rect">
+            <a:avLst/>
+          </a:prstGeom>
+          <a:noFill/>
+          <a:ln/>
+        </p:spPr>
+        <p:txBody>
+          <a:bodyPr wrap="square" lIns="0" tIns="0" rIns="0" bIns="0" rtlCol="0" anchor="t"/>
+          <a:lstStyle/>
+          <a:p>
+            <a:pPr algn="l" indent="0" marL="0">
+              <a:lnSpc>
+                <a:spcPts val="2160"/>
+              </a:lnSpc>
+              <a:spcBef>
+                <a:spcPts val="600"/>
+              </a:spcBef>
+              <a:spcAft>
+                <a:spcPts val="800"/>
+              </a:spcAft>
+              <a:buNone/>
+            </a:pPr>
+            <a:r>
+              <a:rPr lang="en-US" sz="1800" b="1" dirty="0">
+                <a:solidFill>
+                  <a:srgbClr val="FE4447"/>
+                </a:solidFill>
+                <a:latin typeface="Georgia" pitchFamily="34" charset="0"/>
+                <a:ea typeface="Georgia" pitchFamily="34" charset="-122"/>
+                <a:cs typeface="Georgia" pitchFamily="34" charset="-120"/>
+              </a:rPr>
+              <a:t>Citation(s) used in this lesson</a:t>
+            </a:r>
+            <a:endParaRPr lang="en-US" sz="1800" dirty="0"/>
+          </a:p>
+        </p:txBody>
+      </p:sp>
+      <p:sp>
+        <p:nvSpPr>
+          <p:cNvPr id="4" name="Text 2"/>
+          <p:cNvSpPr/>
+          <p:nvPr/>
+        </p:nvSpPr>
+        <p:spPr>
+          <a:xfrm>
+            <a:off x="634901" y="883593"/>
+            <a:ext cx="8102798" cy="525661"/>
+          </a:xfrm>
+          <a:prstGeom prst="rect">
+            <a:avLst/>
+          </a:prstGeom>
+          <a:noFill/>
+          <a:ln/>
+        </p:spPr>
+        <p:txBody>
+          <a:bodyPr wrap="square" lIns="0" tIns="0" rIns="0" bIns="0" rtlCol="0" anchor="t"/>
+          <a:lstStyle/>
+          <a:p>
+            <a:pPr algn="l" marL="342900" indent="-342900">
+              <a:lnSpc>
+                <a:spcPts val="1620"/>
+              </a:lnSpc>
+              <a:spcAft>
+                <a:spcPts val="300"/>
+              </a:spcAft>
+              <a:buSzPct val="100000"/>
+              <a:buChar char="•"/>
+            </a:pPr>
+            <a:r>
+              <a:rPr lang="en-US" sz="1200" i="1" dirty="0">
+                <a:solidFill>
+                  <a:srgbClr val="1C2833"/>
+                </a:solidFill>
+                <a:latin typeface="Arial" pitchFamily="34" charset="0"/>
+                <a:ea typeface="Arial" pitchFamily="34" charset="-122"/>
+                <a:cs typeface="Arial" pitchFamily="34" charset="-120"/>
+              </a:rPr>
+              <a:t>Microsoft Word - sutras1.pdf</a:t>
+            </a:r>
+            <a:pPr algn="l" indent="0" marL="0">
+              <a:lnSpc>
+                <a:spcPts val="1620"/>
+              </a:lnSpc>
+              <a:spcAft>
+                <a:spcPts val="300"/>
+              </a:spcAft>
+              <a:buNone/>
+            </a:pPr>
+            <a:r>
+              <a:rPr lang="en-US" sz="1200" dirty="0">
+                <a:solidFill>
+                  <a:srgbClr val="1C2833"/>
+                </a:solidFill>
+                <a:latin typeface="Arial" pitchFamily="34" charset="0"/>
+                <a:ea typeface="Arial" pitchFamily="34" charset="-122"/>
+                <a:cs typeface="Arial" pitchFamily="34" charset="-120"/>
+              </a:rPr>
+              <a:t> — list of 16 Tirthaji sūtras (sūtras #7 and #8 specifically).</a:t>
+            </a:r>
+            <a:endParaRPr lang="en-US" sz="1200" dirty="0"/>
+          </a:p>
+          <a:p>
+            <a:pPr algn="l" marL="342900" indent="-342900">
+              <a:lnSpc>
+                <a:spcPts val="1620"/>
+              </a:lnSpc>
+              <a:spcAft>
+                <a:spcPts val="300"/>
+              </a:spcAft>
+              <a:buSzPct val="100000"/>
+              <a:buChar char="•"/>
+            </a:pPr>
+            <a:r>
+              <a:rPr lang="en-US" sz="1200" dirty="0">
+                <a:solidFill>
+                  <a:srgbClr val="1C2833"/>
+                </a:solidFill>
+                <a:latin typeface="Arial" pitchFamily="34" charset="0"/>
+                <a:ea typeface="Arial" pitchFamily="34" charset="-122"/>
+                <a:cs typeface="Arial" pitchFamily="34" charset="-120"/>
+              </a:rPr>
+              <a:t>Optional teacher reference: </a:t>
+            </a:r>
+            <a:pPr algn="l" indent="0" marL="0">
+              <a:lnSpc>
+                <a:spcPts val="1620"/>
+              </a:lnSpc>
+              <a:spcAft>
+                <a:spcPts val="300"/>
+              </a:spcAft>
+              <a:buNone/>
+            </a:pPr>
+            <a:r>
+              <a:rPr lang="en-US" sz="1200" i="1" dirty="0">
+                <a:solidFill>
+                  <a:srgbClr val="1C2833"/>
+                </a:solidFill>
+                <a:latin typeface="Arial" pitchFamily="34" charset="0"/>
+                <a:ea typeface="Arial" pitchFamily="34" charset="-122"/>
+                <a:cs typeface="Arial" pitchFamily="34" charset="-120"/>
+              </a:rPr>
+              <a:t>FUNDAMENTAL AND VEDIC MATHEMATICS .pdf</a:t>
+            </a:r>
+            <a:pPr algn="l" indent="0" marL="0">
+              <a:lnSpc>
+                <a:spcPts val="1620"/>
+              </a:lnSpc>
+              <a:spcAft>
+                <a:spcPts val="300"/>
+              </a:spcAft>
+              <a:buNone/>
+            </a:pPr>
+            <a:r>
+              <a:rPr lang="en-US" sz="1200" dirty="0">
+                <a:solidFill>
+                  <a:srgbClr val="1C2833"/>
+                </a:solidFill>
+                <a:latin typeface="Arial" pitchFamily="34" charset="0"/>
+                <a:ea typeface="Arial" pitchFamily="34" charset="-122"/>
+                <a:cs typeface="Arial" pitchFamily="34" charset="-120"/>
+              </a:rPr>
               <a:t>, full treatment.</a:t>
             </a:r>
             <a:endParaRPr lang="en-US" sz="1200" dirty="0"/>
@@ -3074,7 +4934,7 @@
       </p:sp>
       <p:sp>
         <p:nvSpPr>
-          <p:cNvPr id="6" name="Text 4"/>
+          <p:cNvPr id="5" name="Text 3"/>
           <p:cNvSpPr/>
           <p:nvPr/>
         </p:nvSpPr>
@@ -3224,7 +5084,7 @@
                 <a:ea typeface="Georgia" pitchFamily="34" charset="-122"/>
                 <a:cs typeface="Georgia" pitchFamily="34" charset="-120"/>
               </a:rPr>
-              <a:t>Materials</a:t>
+              <a:t>Learning objective</a:t>
             </a:r>
             <a:endParaRPr lang="en-US" sz="1800" dirty="0"/>
           </a:p>
@@ -3239,7 +5099,7 @@
         <p:spPr>
           <a:xfrm>
             <a:off x="406301" y="870942"/>
-            <a:ext cx="8498026" cy="436066"/>
+            <a:ext cx="8498026" cy="426541"/>
           </a:xfrm>
           <a:prstGeom prst="rect">
             <a:avLst/>
@@ -3272,53 +5132,7 @@
                 <a:ea typeface="Arial" pitchFamily="34" charset="-122"/>
                 <a:cs typeface="Arial" pitchFamily="34" charset="-120"/>
               </a:rPr>
-              <a:t>– Whiteboard. – The 16-Sūtra list (</a:t>
-            </a:r>
-            <a:pPr algn="l" indent="0" marL="0">
-              <a:lnSpc>
-                <a:spcPts val="1680"/>
-              </a:lnSpc>
-              <a:spcBef>
-                <a:spcPts val="300"/>
-              </a:spcBef>
-              <a:spcAft>
-                <a:spcPts val="300"/>
-              </a:spcAft>
-              <a:buNone/>
-            </a:pPr>
-            <a:r>
-              <a:rPr lang="en-US" sz="1200" dirty="0">
-                <a:solidFill>
-                  <a:srgbClr val="1C2833"/>
-                </a:solidFill>
-                <a:latin typeface="Arial" pitchFamily="34" charset="0"/>
-                <a:ea typeface="Arial" pitchFamily="34" charset="-122"/>
-                <a:cs typeface="Arial" pitchFamily="34" charset="-120"/>
-              </a:rPr>
-              <a:t>Microsoft Word - sutras1.pdf</a:t>
-            </a:r>
-            <a:pPr algn="l" indent="0" marL="0">
-              <a:lnSpc>
-                <a:spcPts val="1680"/>
-              </a:lnSpc>
-              <a:spcBef>
-                <a:spcPts val="300"/>
-              </a:spcBef>
-              <a:spcAft>
-                <a:spcPts val="300"/>
-              </a:spcAft>
-              <a:buNone/>
-            </a:pPr>
-            <a:r>
-              <a:rPr lang="en-US" sz="1200" dirty="0">
-                <a:solidFill>
-                  <a:srgbClr val="1C2833"/>
-                </a:solidFill>
-                <a:latin typeface="Arial" pitchFamily="34" charset="0"/>
-                <a:ea typeface="Arial" pitchFamily="34" charset="-122"/>
-                <a:cs typeface="Arial" pitchFamily="34" charset="-120"/>
-              </a:rPr>
-              <a:t>) — printed and visible. – Worksheet: "explain to a friend" prompt + space.</a:t>
+              <a:t>By the end of this lesson, students will explain in their own words why the dot method gives the same answer as the standard algorithm, citing place value and the fact that a "dot" represents a 10 carried.</a:t>
             </a:r>
             <a:endParaRPr lang="en-US" sz="1200" dirty="0"/>
           </a:p>
@@ -3476,7 +5290,7 @@
                 <a:ea typeface="Georgia" pitchFamily="34" charset="-122"/>
                 <a:cs typeface="Georgia" pitchFamily="34" charset="-120"/>
               </a:rPr>
-              <a:t>Lesson flow</a:t>
+              <a:t>Materials</a:t>
             </a:r>
             <a:endParaRPr lang="en-US" sz="1800" dirty="0"/>
           </a:p>
@@ -3485,6 +5299,140 @@
       <p:sp>
         <p:nvSpPr>
           <p:cNvPr id="4" name="Text 2"/>
+          <p:cNvSpPr/>
+          <p:nvPr/>
+        </p:nvSpPr>
+        <p:spPr>
+          <a:xfrm>
+            <a:off x="634901" y="883593"/>
+            <a:ext cx="8102798" cy="788491"/>
+          </a:xfrm>
+          <a:prstGeom prst="rect">
+            <a:avLst/>
+          </a:prstGeom>
+          <a:noFill/>
+          <a:ln/>
+        </p:spPr>
+        <p:txBody>
+          <a:bodyPr wrap="square" lIns="0" tIns="0" rIns="0" bIns="0" rtlCol="0" anchor="t"/>
+          <a:lstStyle/>
+          <a:p>
+            <a:pPr algn="l" marL="342900" indent="-342900">
+              <a:lnSpc>
+                <a:spcPts val="1620"/>
+              </a:lnSpc>
+              <a:spcAft>
+                <a:spcPts val="300"/>
+              </a:spcAft>
+              <a:buSzPct val="100000"/>
+              <a:buChar char="•"/>
+            </a:pPr>
+            <a:r>
+              <a:rPr lang="en-US" sz="1200" dirty="0">
+                <a:solidFill>
+                  <a:srgbClr val="1C2833"/>
+                </a:solidFill>
+                <a:latin typeface="Arial" pitchFamily="34" charset="0"/>
+                <a:ea typeface="Arial" pitchFamily="34" charset="-122"/>
+                <a:cs typeface="Arial" pitchFamily="34" charset="-120"/>
+              </a:rPr>
+              <a:t>Whiteboard.</a:t>
+            </a:r>
+            <a:endParaRPr lang="en-US" sz="1200" dirty="0"/>
+          </a:p>
+          <a:p>
+            <a:pPr algn="l" marL="342900" indent="-342900">
+              <a:lnSpc>
+                <a:spcPts val="1620"/>
+              </a:lnSpc>
+              <a:spcAft>
+                <a:spcPts val="300"/>
+              </a:spcAft>
+              <a:buSzPct val="100000"/>
+              <a:buChar char="•"/>
+            </a:pPr>
+            <a:r>
+              <a:rPr lang="en-US" sz="1200" dirty="0">
+                <a:solidFill>
+                  <a:srgbClr val="1C2833"/>
+                </a:solidFill>
+                <a:latin typeface="Arial" pitchFamily="34" charset="0"/>
+                <a:ea typeface="Arial" pitchFamily="34" charset="-122"/>
+                <a:cs typeface="Arial" pitchFamily="34" charset="-120"/>
+              </a:rPr>
+              <a:t>The 16-Sūtra list (</a:t>
+            </a:r>
+            <a:pPr algn="l" indent="0" marL="0">
+              <a:lnSpc>
+                <a:spcPts val="1620"/>
+              </a:lnSpc>
+              <a:spcAft>
+                <a:spcPts val="300"/>
+              </a:spcAft>
+              <a:buNone/>
+            </a:pPr>
+            <a:r>
+              <a:rPr lang="en-US" sz="1200" dirty="0">
+                <a:solidFill>
+                  <a:srgbClr val="1C2833"/>
+                </a:solidFill>
+                <a:latin typeface="Arial" pitchFamily="34" charset="0"/>
+                <a:ea typeface="Arial" pitchFamily="34" charset="-122"/>
+                <a:cs typeface="Arial" pitchFamily="34" charset="-120"/>
+              </a:rPr>
+              <a:t>Microsoft Word - sutras1.pdf</a:t>
+            </a:r>
+            <a:pPr algn="l" indent="0" marL="0">
+              <a:lnSpc>
+                <a:spcPts val="1620"/>
+              </a:lnSpc>
+              <a:spcAft>
+                <a:spcPts val="300"/>
+              </a:spcAft>
+              <a:buNone/>
+            </a:pPr>
+            <a:r>
+              <a:rPr lang="en-US" sz="1200" dirty="0">
+                <a:solidFill>
+                  <a:srgbClr val="1C2833"/>
+                </a:solidFill>
+                <a:latin typeface="Arial" pitchFamily="34" charset="0"/>
+                <a:ea typeface="Arial" pitchFamily="34" charset="-122"/>
+                <a:cs typeface="Arial" pitchFamily="34" charset="-120"/>
+              </a:rPr>
+              <a:t>) — printed and visible.</a:t>
+            </a:r>
+            <a:endParaRPr lang="en-US" sz="1200" dirty="0"/>
+          </a:p>
+          <a:p>
+            <a:pPr algn="l" marL="342900" indent="-342900">
+              <a:lnSpc>
+                <a:spcPts val="1620"/>
+              </a:lnSpc>
+              <a:spcAft>
+                <a:spcPts val="300"/>
+              </a:spcAft>
+              <a:buSzPct val="100000"/>
+              <a:buChar char="•"/>
+            </a:pPr>
+            <a:r>
+              <a:rPr lang="en-US" sz="1200" dirty="0">
+                <a:solidFill>
+                  <a:srgbClr val="1C2833"/>
+                </a:solidFill>
+                <a:latin typeface="Arial" pitchFamily="34" charset="0"/>
+                <a:ea typeface="Arial" pitchFamily="34" charset="-122"/>
+                <a:cs typeface="Arial" pitchFamily="34" charset="-120"/>
+              </a:rPr>
+              <a:t>Worksheet: "explain to a friend" prompt + space.</a:t>
+            </a:r>
+            <a:endParaRPr lang="en-US" sz="1200" dirty="0"/>
+          </a:p>
+        </p:txBody>
+      </p:sp>
+      <p:sp>
+        <p:nvSpPr>
+          <p:cNvPr id="5" name="Text 3"/>
           <p:cNvSpPr/>
           <p:nvPr/>
         </p:nvSpPr>
@@ -3634,7 +5582,7 @@
                 <a:ea typeface="Georgia" pitchFamily="34" charset="-122"/>
                 <a:cs typeface="Georgia" pitchFamily="34" charset="-120"/>
               </a:rPr>
-              <a:t>Warm-up (5 min)</a:t>
+              <a:t>Lesson flow</a:t>
             </a:r>
             <a:endParaRPr lang="en-US" sz="1800" dirty="0"/>
           </a:p>
@@ -3643,54 +5591,6 @@
       <p:sp>
         <p:nvSpPr>
           <p:cNvPr id="4" name="Text 2"/>
-          <p:cNvSpPr/>
-          <p:nvPr/>
-        </p:nvSpPr>
-        <p:spPr>
-          <a:xfrm>
-            <a:off x="406301" y="870942"/>
-            <a:ext cx="8498026" cy="213271"/>
-          </a:xfrm>
-          <a:prstGeom prst="rect">
-            <a:avLst/>
-          </a:prstGeom>
-          <a:noFill/>
-          <a:ln/>
-        </p:spPr>
-        <p:txBody>
-          <a:bodyPr wrap="square" lIns="0" tIns="0" rIns="0" bIns="0" rtlCol="0" anchor="t"/>
-          <a:lstStyle/>
-          <a:p>
-            <a:pPr algn="l" indent="0" marL="0">
-              <a:lnSpc>
-                <a:spcPts val="1680"/>
-              </a:lnSpc>
-              <a:spcBef>
-                <a:spcPts val="300"/>
-              </a:spcBef>
-              <a:spcAft>
-                <a:spcPts val="300"/>
-              </a:spcAft>
-              <a:buNone/>
-            </a:pPr>
-            <a:r>
-              <a:rPr lang="en-US" sz="1200" dirty="0">
-                <a:solidFill>
-                  <a:srgbClr val="1C2833"/>
-                </a:solidFill>
-                <a:latin typeface="Arial" pitchFamily="34" charset="0"/>
-                <a:ea typeface="Arial" pitchFamily="34" charset="-122"/>
-                <a:cs typeface="Arial" pitchFamily="34" charset="-120"/>
-              </a:rPr>
-              <a:t>– Make-10 round. – Hand back formative. Discuss any common error pattern from the quiz briefly.</a:t>
-            </a:r>
-            <a:endParaRPr lang="en-US" sz="1200" dirty="0"/>
-          </a:p>
-        </p:txBody>
-      </p:sp>
-      <p:sp>
-        <p:nvSpPr>
-          <p:cNvPr id="5" name="Text 3"/>
           <p:cNvSpPr/>
           <p:nvPr/>
         </p:nvSpPr>
@@ -3840,7 +5740,7 @@
                 <a:ea typeface="Georgia" pitchFamily="34" charset="-122"/>
                 <a:cs typeface="Georgia" pitchFamily="34" charset="-120"/>
               </a:rPr>
-              <a:t>Core (20 min) — The mathematical reasoning</a:t>
+              <a:t>Warm-up (5 min)</a:t>
             </a:r>
             <a:endParaRPr lang="en-US" sz="1800" dirty="0"/>
           </a:p>
@@ -3855,7 +5755,7 @@
         <p:spPr>
           <a:xfrm>
             <a:off x="634901" y="883593"/>
-            <a:ext cx="8102798" cy="281880"/>
+            <a:ext cx="8102798" cy="525661"/>
           </a:xfrm>
           <a:prstGeom prst="rect">
             <a:avLst/>
@@ -3878,7 +5778,7 @@
               <a:buChar char="•"/>
             </a:pPr>
             <a:r>
-              <a:rPr lang="en-US" sz="1200" b="1" dirty="0">
+              <a:rPr lang="en-US" sz="1200" dirty="0">
                 <a:solidFill>
                   <a:srgbClr val="1C2833"/>
                 </a:solidFill>
@@ -3886,16 +5786,20 @@
                 <a:ea typeface="Arial" pitchFamily="34" charset="-122"/>
                 <a:cs typeface="Arial" pitchFamily="34" charset="-120"/>
               </a:rPr>
-              <a:t>The core claim</a:t>
-            </a:r>
-            <a:pPr algn="l" indent="0" marL="0">
+              <a:t>Make-10 round.</a:t>
+            </a:r>
+            <a:endParaRPr lang="en-US" sz="1200" dirty="0"/>
+          </a:p>
+          <a:p>
+            <a:pPr algn="l" marL="342900" indent="-342900">
               <a:lnSpc>
                 <a:spcPts val="1620"/>
               </a:lnSpc>
               <a:spcAft>
                 <a:spcPts val="300"/>
               </a:spcAft>
-              <a:buNone/>
+              <a:buSzPct val="100000"/>
+              <a:buChar char="•"/>
             </a:pPr>
             <a:r>
               <a:rPr lang="en-US" sz="1200" dirty="0">
@@ -3906,7 +5810,7 @@
                 <a:ea typeface="Arial" pitchFamily="34" charset="-122"/>
                 <a:cs typeface="Arial" pitchFamily="34" charset="-120"/>
               </a:rPr>
-              <a:t> (write boxed on the board):</a:t>
+              <a:t>Hand back formative. Discuss any common error pattern from the quiz briefly.</a:t>
             </a:r>
             <a:endParaRPr lang="en-US" sz="1200" dirty="0"/>
           </a:p>
@@ -3920,971 +5824,7 @@
         </p:nvSpPr>
         <p:spPr>
           <a:xfrm>
-            <a:off x="406301" y="1254323"/>
-            <a:ext cx="8498026" cy="426541"/>
-          </a:xfrm>
-          <a:prstGeom prst="rect">
-            <a:avLst/>
-          </a:prstGeom>
-          <a:noFill/>
-          <a:ln/>
-        </p:spPr>
-        <p:txBody>
-          <a:bodyPr wrap="square" lIns="0" tIns="0" rIns="0" bIns="0" rtlCol="0" anchor="t"/>
-          <a:lstStyle/>
-          <a:p>
-            <a:pPr algn="l" indent="0" marL="0">
-              <a:lnSpc>
-                <a:spcPts val="1680"/>
-              </a:lnSpc>
-              <a:spcBef>
-                <a:spcPts val="300"/>
-              </a:spcBef>
-              <a:spcAft>
-                <a:spcPts val="300"/>
-              </a:spcAft>
-              <a:buNone/>
-            </a:pPr>
-            <a:r>
-              <a:rPr lang="en-US" sz="1200" dirty="0">
-                <a:solidFill>
-                  <a:srgbClr val="1C2833"/>
-                </a:solidFill>
-                <a:latin typeface="Arial" pitchFamily="34" charset="0"/>
-                <a:ea typeface="Arial" pitchFamily="34" charset="-122"/>
-                <a:cs typeface="Arial" pitchFamily="34" charset="-120"/>
-              </a:rPr>
-              <a:t>&gt; </a:t>
-            </a:r>
-            <a:pPr algn="l" indent="0" marL="0">
-              <a:lnSpc>
-                <a:spcPts val="1680"/>
-              </a:lnSpc>
-              <a:spcBef>
-                <a:spcPts val="300"/>
-              </a:spcBef>
-              <a:spcAft>
-                <a:spcPts val="300"/>
-              </a:spcAft>
-              <a:buNone/>
-            </a:pPr>
-            <a:r>
-              <a:rPr lang="en-US" sz="1200" b="1" dirty="0">
-                <a:solidFill>
-                  <a:srgbClr val="1C2833"/>
-                </a:solidFill>
-                <a:latin typeface="Arial" pitchFamily="34" charset="0"/>
-                <a:ea typeface="Arial" pitchFamily="34" charset="-122"/>
-                <a:cs typeface="Arial" pitchFamily="34" charset="-120"/>
-              </a:rPr>
-              <a:t>A dot in a column represents "10 has been used up." Since 10 in any column equals 1 in the next column, the dot count is the carry.</a:t>
-            </a:r>
-            <a:endParaRPr lang="en-US" sz="1200" dirty="0"/>
-          </a:p>
-        </p:txBody>
-      </p:sp>
-      <p:sp>
-        <p:nvSpPr>
-          <p:cNvPr id="6" name="Text 4"/>
-          <p:cNvSpPr/>
-          <p:nvPr/>
-        </p:nvSpPr>
-        <p:spPr>
-          <a:xfrm>
-            <a:off x="634901" y="1769715"/>
-            <a:ext cx="8102798" cy="281880"/>
-          </a:xfrm>
-          <a:prstGeom prst="rect">
-            <a:avLst/>
-          </a:prstGeom>
-          <a:noFill/>
-          <a:ln/>
-        </p:spPr>
-        <p:txBody>
-          <a:bodyPr wrap="square" lIns="0" tIns="0" rIns="0" bIns="0" rtlCol="0" anchor="t"/>
-          <a:lstStyle/>
-          <a:p>
-            <a:pPr algn="l" marL="342900" indent="-342900">
-              <a:lnSpc>
-                <a:spcPts val="1620"/>
-              </a:lnSpc>
-              <a:spcAft>
-                <a:spcPts val="300"/>
-              </a:spcAft>
-              <a:buSzPct val="100000"/>
-              <a:buChar char="•"/>
-            </a:pPr>
-            <a:r>
-              <a:rPr lang="en-US" sz="1200" b="1" dirty="0">
-                <a:solidFill>
-                  <a:srgbClr val="1C2833"/>
-                </a:solidFill>
-                <a:latin typeface="Arial" pitchFamily="34" charset="0"/>
-                <a:ea typeface="Arial" pitchFamily="34" charset="-122"/>
-                <a:cs typeface="Arial" pitchFamily="34" charset="-120"/>
-              </a:rPr>
-              <a:t>Walk through a simple example to prove it</a:t>
-            </a:r>
-            <a:pPr algn="l" indent="0" marL="0">
-              <a:lnSpc>
-                <a:spcPts val="1620"/>
-              </a:lnSpc>
-              <a:spcAft>
-                <a:spcPts val="300"/>
-              </a:spcAft>
-              <a:buNone/>
-            </a:pPr>
-            <a:r>
-              <a:rPr lang="en-US" sz="1200" dirty="0">
-                <a:solidFill>
-                  <a:srgbClr val="1C2833"/>
-                </a:solidFill>
-                <a:latin typeface="Arial" pitchFamily="34" charset="0"/>
-                <a:ea typeface="Arial" pitchFamily="34" charset="-122"/>
-                <a:cs typeface="Arial" pitchFamily="34" charset="-120"/>
-              </a:rPr>
-              <a:t>:</a:t>
-            </a:r>
-            <a:endParaRPr lang="en-US" sz="1200" dirty="0"/>
-          </a:p>
-        </p:txBody>
-      </p:sp>
-      <p:sp>
-        <p:nvSpPr>
-          <p:cNvPr id="7" name="Text 5"/>
-          <p:cNvSpPr/>
-          <p:nvPr/>
-        </p:nvSpPr>
-        <p:spPr>
-          <a:xfrm>
-            <a:off x="406301" y="2153096"/>
-            <a:ext cx="8331398" cy="2174230"/>
-          </a:xfrm>
-          <a:prstGeom prst="rect">
-            <a:avLst/>
-          </a:prstGeom>
-          <a:solidFill>
-            <a:srgbClr val="F4F8F9"/>
-          </a:solidFill>
-          <a:ln/>
-        </p:spPr>
-        <p:txBody>
-          <a:bodyPr wrap="square" rtlCol="0" anchor="ctr"/>
-          <a:lstStyle/>
-          <a:p>
-            <a:pPr indent="0" marL="0">
-              <a:buNone/>
-            </a:pPr>
-            <a:endParaRPr lang="en-US" dirty="0"/>
-          </a:p>
-        </p:txBody>
-      </p:sp>
-      <p:sp>
-        <p:nvSpPr>
-          <p:cNvPr id="8" name="Shape 6"/>
-          <p:cNvSpPr/>
-          <p:nvPr/>
-        </p:nvSpPr>
-        <p:spPr>
-          <a:xfrm>
-            <a:off x="430113" y="2153096"/>
-            <a:ext cx="0" cy="2174230"/>
-          </a:xfrm>
-          <a:prstGeom prst="line">
-            <a:avLst/>
-          </a:prstGeom>
-          <a:noFill/>
-          <a:ln w="47625">
-            <a:solidFill>
-              <a:srgbClr val="277884"/>
-            </a:solidFill>
-            <a:prstDash val="solid"/>
-          </a:ln>
-        </p:spPr>
-      </p:sp>
-      <p:sp>
-        <p:nvSpPr>
-          <p:cNvPr id="9" name="Text 7"/>
-          <p:cNvSpPr/>
-          <p:nvPr/>
-        </p:nvSpPr>
-        <p:spPr>
-          <a:xfrm>
-            <a:off x="631627" y="2280047"/>
-            <a:ext cx="8086939" cy="174575"/>
-          </a:xfrm>
-          <a:prstGeom prst="rect">
-            <a:avLst/>
-          </a:prstGeom>
-          <a:noFill/>
-          <a:ln/>
-        </p:spPr>
-        <p:txBody>
-          <a:bodyPr wrap="square" lIns="0" tIns="0" rIns="0" bIns="0" rtlCol="0" anchor="t"/>
-          <a:lstStyle/>
-          <a:p>
-            <a:pPr algn="l" indent="0" marL="0">
-              <a:lnSpc>
-                <a:spcPts val="1375"/>
-              </a:lnSpc>
-              <a:buNone/>
-            </a:pPr>
-            <a:r>
-              <a:rPr lang="en-US" sz="1100" dirty="0">
-                <a:solidFill>
-                  <a:srgbClr val="1C2833"/>
-                </a:solidFill>
-                <a:latin typeface="Courier New" pitchFamily="34" charset="0"/>
-                <a:ea typeface="Courier New" pitchFamily="34" charset="-122"/>
-                <a:cs typeface="Courier New" pitchFamily="34" charset="-120"/>
-              </a:rPr>
-              <a:t>Column: 8, 7, 2, 6, 4</a:t>
-            </a:r>
-            <a:endParaRPr lang="en-US" sz="1100" dirty="0"/>
-          </a:p>
-        </p:txBody>
-      </p:sp>
-      <p:sp>
-        <p:nvSpPr>
-          <p:cNvPr id="10" name="Text 8"/>
-          <p:cNvSpPr/>
-          <p:nvPr/>
-        </p:nvSpPr>
-        <p:spPr>
-          <a:xfrm>
-            <a:off x="631627" y="2629198"/>
-            <a:ext cx="8086939" cy="174575"/>
-          </a:xfrm>
-          <a:prstGeom prst="rect">
-            <a:avLst/>
-          </a:prstGeom>
-          <a:noFill/>
-          <a:ln/>
-        </p:spPr>
-        <p:txBody>
-          <a:bodyPr wrap="square" lIns="0" tIns="0" rIns="0" bIns="0" rtlCol="0" anchor="t"/>
-          <a:lstStyle/>
-          <a:p>
-            <a:pPr algn="l" indent="0" marL="0">
-              <a:lnSpc>
-                <a:spcPts val="1375"/>
-              </a:lnSpc>
-              <a:buNone/>
-            </a:pPr>
-            <a:r>
-              <a:rPr lang="en-US" sz="1100" dirty="0">
-                <a:solidFill>
-                  <a:srgbClr val="1C2833"/>
-                </a:solidFill>
-                <a:latin typeface="Courier New" pitchFamily="34" charset="0"/>
-                <a:ea typeface="Courier New" pitchFamily="34" charset="-122"/>
-                <a:cs typeface="Courier New" pitchFamily="34" charset="-120"/>
-              </a:rPr>
-              <a:t>Direct addition: 8+7+2+6+4 = 27.</a:t>
-            </a:r>
-            <a:endParaRPr lang="en-US" sz="1100" dirty="0"/>
-          </a:p>
-        </p:txBody>
-      </p:sp>
-      <p:sp>
-        <p:nvSpPr>
-          <p:cNvPr id="11" name="Text 9"/>
-          <p:cNvSpPr/>
-          <p:nvPr/>
-        </p:nvSpPr>
-        <p:spPr>
-          <a:xfrm>
-            <a:off x="631627" y="2803773"/>
-            <a:ext cx="8086939" cy="174575"/>
-          </a:xfrm>
-          <a:prstGeom prst="rect">
-            <a:avLst/>
-          </a:prstGeom>
-          <a:noFill/>
-          <a:ln/>
-        </p:spPr>
-        <p:txBody>
-          <a:bodyPr wrap="square" lIns="0" tIns="0" rIns="0" bIns="0" rtlCol="0" anchor="t"/>
-          <a:lstStyle/>
-          <a:p>
-            <a:pPr algn="l" indent="0" marL="0">
-              <a:lnSpc>
-                <a:spcPts val="1375"/>
-              </a:lnSpc>
-              <a:buNone/>
-            </a:pPr>
-            <a:r>
-              <a:rPr lang="en-US" sz="1100" dirty="0">
-                <a:solidFill>
-                  <a:srgbClr val="1C2833"/>
-                </a:solidFill>
-                <a:latin typeface="Courier New" pitchFamily="34" charset="0"/>
-                <a:ea typeface="Courier New" pitchFamily="34" charset="-122"/>
-                <a:cs typeface="Courier New" pitchFamily="34" charset="-120"/>
-              </a:rPr>
-              <a:t>Units = 7. Carry = 2.</a:t>
-            </a:r>
-            <a:endParaRPr lang="en-US" sz="1100" dirty="0"/>
-          </a:p>
-        </p:txBody>
-      </p:sp>
-      <p:sp>
-        <p:nvSpPr>
-          <p:cNvPr id="12" name="Text 10"/>
-          <p:cNvSpPr/>
-          <p:nvPr/>
-        </p:nvSpPr>
-        <p:spPr>
-          <a:xfrm>
-            <a:off x="631627" y="3152924"/>
-            <a:ext cx="8086939" cy="174575"/>
-          </a:xfrm>
-          <a:prstGeom prst="rect">
-            <a:avLst/>
-          </a:prstGeom>
-          <a:noFill/>
-          <a:ln/>
-        </p:spPr>
-        <p:txBody>
-          <a:bodyPr wrap="square" lIns="0" tIns="0" rIns="0" bIns="0" rtlCol="0" anchor="t"/>
-          <a:lstStyle/>
-          <a:p>
-            <a:pPr algn="l" indent="0" marL="0">
-              <a:lnSpc>
-                <a:spcPts val="1375"/>
-              </a:lnSpc>
-              <a:buNone/>
-            </a:pPr>
-            <a:r>
-              <a:rPr lang="en-US" sz="1100" dirty="0">
-                <a:solidFill>
-                  <a:srgbClr val="1C2833"/>
-                </a:solidFill>
-                <a:latin typeface="Courier New" pitchFamily="34" charset="0"/>
-                <a:ea typeface="Courier New" pitchFamily="34" charset="-122"/>
-                <a:cs typeface="Courier New" pitchFamily="34" charset="-120"/>
-              </a:rPr>
-              <a:t>Dot method:</a:t>
-            </a:r>
-            <a:endParaRPr lang="en-US" sz="1100" dirty="0"/>
-          </a:p>
-        </p:txBody>
-      </p:sp>
-      <p:sp>
-        <p:nvSpPr>
-          <p:cNvPr id="13" name="Text 11"/>
-          <p:cNvSpPr/>
-          <p:nvPr/>
-        </p:nvSpPr>
-        <p:spPr>
-          <a:xfrm>
-            <a:off x="631627" y="3327499"/>
-            <a:ext cx="8086939" cy="174575"/>
-          </a:xfrm>
-          <a:prstGeom prst="rect">
-            <a:avLst/>
-          </a:prstGeom>
-          <a:noFill/>
-          <a:ln/>
-        </p:spPr>
-        <p:txBody>
-          <a:bodyPr wrap="square" lIns="0" tIns="0" rIns="0" bIns="0" rtlCol="0" anchor="t"/>
-          <a:lstStyle/>
-          <a:p>
-            <a:pPr algn="l" indent="0" marL="0">
-              <a:lnSpc>
-                <a:spcPts val="1375"/>
-              </a:lnSpc>
-              <a:buNone/>
-            </a:pPr>
-            <a:r>
-              <a:rPr lang="en-US" sz="1100" dirty="0">
-                <a:solidFill>
-                  <a:srgbClr val="1C2833"/>
-                </a:solidFill>
-                <a:latin typeface="Courier New" pitchFamily="34" charset="0"/>
-                <a:ea typeface="Courier New" pitchFamily="34" charset="-122"/>
-                <a:cs typeface="Courier New" pitchFamily="34" charset="-120"/>
-              </a:rPr>
-              <a:t>Start 0. +8 = 8. +7 = 15 → dot · on 7, total = 5.</a:t>
-            </a:r>
-            <a:endParaRPr lang="en-US" sz="1100" dirty="0"/>
-          </a:p>
-        </p:txBody>
-      </p:sp>
-      <p:sp>
-        <p:nvSpPr>
-          <p:cNvPr id="14" name="Text 12"/>
-          <p:cNvSpPr/>
-          <p:nvPr/>
-        </p:nvSpPr>
-        <p:spPr>
-          <a:xfrm>
-            <a:off x="631627" y="3502075"/>
-            <a:ext cx="8086939" cy="174575"/>
-          </a:xfrm>
-          <a:prstGeom prst="rect">
-            <a:avLst/>
-          </a:prstGeom>
-          <a:noFill/>
-          <a:ln/>
-        </p:spPr>
-        <p:txBody>
-          <a:bodyPr wrap="square" lIns="0" tIns="0" rIns="0" bIns="0" rtlCol="0" anchor="t"/>
-          <a:lstStyle/>
-          <a:p>
-            <a:pPr algn="l" indent="0" marL="0">
-              <a:lnSpc>
-                <a:spcPts val="1375"/>
-              </a:lnSpc>
-              <a:buNone/>
-            </a:pPr>
-            <a:r>
-              <a:rPr lang="en-US" sz="1100" dirty="0">
-                <a:solidFill>
-                  <a:srgbClr val="1C2833"/>
-                </a:solidFill>
-                <a:latin typeface="Courier New" pitchFamily="34" charset="0"/>
-                <a:ea typeface="Courier New" pitchFamily="34" charset="-122"/>
-                <a:cs typeface="Courier New" pitchFamily="34" charset="-120"/>
-              </a:rPr>
-              <a:t>+2 = 7. +6 = 13 → dot · on 6, total = 3. +4 = 7.</a:t>
-            </a:r>
-            <a:endParaRPr lang="en-US" sz="1100" dirty="0"/>
-          </a:p>
-        </p:txBody>
-      </p:sp>
-      <p:sp>
-        <p:nvSpPr>
-          <p:cNvPr id="15" name="Text 13"/>
-          <p:cNvSpPr/>
-          <p:nvPr/>
-        </p:nvSpPr>
-        <p:spPr>
-          <a:xfrm>
-            <a:off x="631627" y="3676650"/>
-            <a:ext cx="8086939" cy="174575"/>
-          </a:xfrm>
-          <a:prstGeom prst="rect">
-            <a:avLst/>
-          </a:prstGeom>
-          <a:noFill/>
-          <a:ln/>
-        </p:spPr>
-        <p:txBody>
-          <a:bodyPr wrap="square" lIns="0" tIns="0" rIns="0" bIns="0" rtlCol="0" anchor="t"/>
-          <a:lstStyle/>
-          <a:p>
-            <a:pPr algn="l" indent="0" marL="0">
-              <a:lnSpc>
-                <a:spcPts val="1375"/>
-              </a:lnSpc>
-              <a:buNone/>
-            </a:pPr>
-            <a:r>
-              <a:rPr lang="en-US" sz="1100" dirty="0">
-                <a:solidFill>
-                  <a:srgbClr val="1C2833"/>
-                </a:solidFill>
-                <a:latin typeface="Courier New" pitchFamily="34" charset="0"/>
-                <a:ea typeface="Courier New" pitchFamily="34" charset="-122"/>
-                <a:cs typeface="Courier New" pitchFamily="34" charset="-120"/>
-              </a:rPr>
-              <a:t>Units = 7. Dots = 2. Carry = 2.</a:t>
-            </a:r>
-            <a:endParaRPr lang="en-US" sz="1100" dirty="0"/>
-          </a:p>
-        </p:txBody>
-      </p:sp>
-      <p:sp>
-        <p:nvSpPr>
-          <p:cNvPr id="16" name="Text 14"/>
-          <p:cNvSpPr/>
-          <p:nvPr/>
-        </p:nvSpPr>
-        <p:spPr>
-          <a:xfrm>
-            <a:off x="631627" y="4025801"/>
-            <a:ext cx="8086939" cy="174575"/>
-          </a:xfrm>
-          <a:prstGeom prst="rect">
-            <a:avLst/>
-          </a:prstGeom>
-          <a:noFill/>
-          <a:ln/>
-        </p:spPr>
-        <p:txBody>
-          <a:bodyPr wrap="square" lIns="0" tIns="0" rIns="0" bIns="0" rtlCol="0" anchor="t"/>
-          <a:lstStyle/>
-          <a:p>
-            <a:pPr algn="l" indent="0" marL="0">
-              <a:lnSpc>
-                <a:spcPts val="1375"/>
-              </a:lnSpc>
-              <a:buNone/>
-            </a:pPr>
-            <a:r>
-              <a:rPr lang="en-US" sz="1100" dirty="0">
-                <a:solidFill>
-                  <a:srgbClr val="1C2833"/>
-                </a:solidFill>
-                <a:latin typeface="Courier New" pitchFamily="34" charset="0"/>
-                <a:ea typeface="Courier New" pitchFamily="34" charset="-122"/>
-                <a:cs typeface="Courier New" pitchFamily="34" charset="-120"/>
-              </a:rPr>
-              <a:t>Same answer.</a:t>
-            </a:r>
-            <a:endParaRPr lang="en-US" sz="1100" dirty="0"/>
-          </a:p>
-        </p:txBody>
-      </p:sp>
-      <p:sp>
-        <p:nvSpPr>
-          <p:cNvPr id="17" name="Text 15"/>
-          <p:cNvSpPr/>
-          <p:nvPr/>
-        </p:nvSpPr>
-        <p:spPr>
-          <a:xfrm>
-            <a:off x="634901" y="4428827"/>
-            <a:ext cx="8102798" cy="281880"/>
-          </a:xfrm>
-          <a:prstGeom prst="rect">
-            <a:avLst/>
-          </a:prstGeom>
-          <a:noFill/>
-          <a:ln/>
-        </p:spPr>
-        <p:txBody>
-          <a:bodyPr wrap="square" lIns="0" tIns="0" rIns="0" bIns="0" rtlCol="0" anchor="t"/>
-          <a:lstStyle/>
-          <a:p>
-            <a:pPr algn="l" marL="342900" indent="-342900">
-              <a:lnSpc>
-                <a:spcPts val="1620"/>
-              </a:lnSpc>
-              <a:spcAft>
-                <a:spcPts val="300"/>
-              </a:spcAft>
-              <a:buSzPct val="100000"/>
-              <a:buChar char="•"/>
-            </a:pPr>
-            <a:r>
-              <a:rPr lang="en-US" sz="1200" b="1" dirty="0">
-                <a:solidFill>
-                  <a:srgbClr val="1C2833"/>
-                </a:solidFill>
-                <a:latin typeface="Arial" pitchFamily="34" charset="0"/>
-                <a:ea typeface="Arial" pitchFamily="34" charset="-122"/>
-                <a:cs typeface="Arial" pitchFamily="34" charset="-120"/>
-              </a:rPr>
-              <a:t>Why? Because each dot is precisely "I just crossed 10."</a:t>
-            </a:r>
-            <a:endParaRPr lang="en-US" sz="1200" dirty="0"/>
-          </a:p>
-        </p:txBody>
-      </p:sp>
-      <p:sp>
-        <p:nvSpPr>
-          <p:cNvPr id="18" name="Text 16"/>
-          <p:cNvSpPr/>
-          <p:nvPr/>
-        </p:nvSpPr>
-        <p:spPr>
-          <a:xfrm>
-            <a:off x="406301" y="4799558"/>
-            <a:ext cx="8498026" cy="213271"/>
-          </a:xfrm>
-          <a:prstGeom prst="rect">
-            <a:avLst/>
-          </a:prstGeom>
-          <a:noFill/>
-          <a:ln/>
-        </p:spPr>
-        <p:txBody>
-          <a:bodyPr wrap="square" lIns="0" tIns="0" rIns="0" bIns="0" rtlCol="0" anchor="t"/>
-          <a:lstStyle/>
-          <a:p>
-            <a:pPr algn="l" indent="0" marL="0">
-              <a:lnSpc>
-                <a:spcPts val="1680"/>
-              </a:lnSpc>
-              <a:spcBef>
-                <a:spcPts val="300"/>
-              </a:spcBef>
-              <a:spcAft>
-                <a:spcPts val="300"/>
-              </a:spcAft>
-              <a:buNone/>
-            </a:pPr>
-            <a:r>
-              <a:rPr lang="en-US" sz="1200" dirty="0">
-                <a:solidFill>
-                  <a:srgbClr val="1C2833"/>
-                </a:solidFill>
-                <a:latin typeface="Arial" pitchFamily="34" charset="0"/>
-                <a:ea typeface="Arial" pitchFamily="34" charset="-122"/>
-                <a:cs typeface="Arial" pitchFamily="34" charset="-120"/>
-              </a:rPr>
-              <a:t>– Crossing 10 once = 1 carry.    – Crossing 10 twice = 2 carry.    – The leftover is just whatever remains in the running total.</a:t>
-            </a:r>
-            <a:endParaRPr lang="en-US" sz="1200" dirty="0"/>
-          </a:p>
-        </p:txBody>
-      </p:sp>
-      <p:sp>
-        <p:nvSpPr>
-          <p:cNvPr id="19" name="Text 17"/>
-          <p:cNvSpPr/>
-          <p:nvPr/>
-        </p:nvSpPr>
-        <p:spPr>
-          <a:xfrm>
-            <a:off x="634901" y="5101679"/>
-            <a:ext cx="8102798" cy="281880"/>
-          </a:xfrm>
-          <a:prstGeom prst="rect">
-            <a:avLst/>
-          </a:prstGeom>
-          <a:noFill/>
-          <a:ln/>
-        </p:spPr>
-        <p:txBody>
-          <a:bodyPr wrap="square" lIns="0" tIns="0" rIns="0" bIns="0" rtlCol="0" anchor="t"/>
-          <a:lstStyle/>
-          <a:p>
-            <a:pPr algn="l" marL="342900" indent="-342900">
-              <a:lnSpc>
-                <a:spcPts val="1620"/>
-              </a:lnSpc>
-              <a:spcAft>
-                <a:spcPts val="300"/>
-              </a:spcAft>
-              <a:buSzPct val="100000"/>
-              <a:buChar char="•"/>
-            </a:pPr>
-            <a:r>
-              <a:rPr lang="en-US" sz="1200" b="1" dirty="0">
-                <a:solidFill>
-                  <a:srgbClr val="1C2833"/>
-                </a:solidFill>
-                <a:latin typeface="Arial" pitchFamily="34" charset="0"/>
-                <a:ea typeface="Arial" pitchFamily="34" charset="-122"/>
-                <a:cs typeface="Arial" pitchFamily="34" charset="-120"/>
-              </a:rPr>
-              <a:t>Connection to Tirthaji's 16 sūtras.</a:t>
-            </a:r>
-            <a:pPr algn="l" indent="0" marL="0">
-              <a:lnSpc>
-                <a:spcPts val="1620"/>
-              </a:lnSpc>
-              <a:spcAft>
-                <a:spcPts val="300"/>
-              </a:spcAft>
-              <a:buNone/>
-            </a:pPr>
-            <a:r>
-              <a:rPr lang="en-US" sz="1200" dirty="0">
-                <a:solidFill>
-                  <a:srgbClr val="1C2833"/>
-                </a:solidFill>
-                <a:latin typeface="Arial" pitchFamily="34" charset="0"/>
-                <a:ea typeface="Arial" pitchFamily="34" charset="-122"/>
-                <a:cs typeface="Arial" pitchFamily="34" charset="-120"/>
-              </a:rPr>
-              <a:t> Display the list:</a:t>
-            </a:r>
-            <a:endParaRPr lang="en-US" sz="1200" dirty="0"/>
-          </a:p>
-        </p:txBody>
-      </p:sp>
-      <p:sp>
-        <p:nvSpPr>
-          <p:cNvPr id="20" name="Text 18"/>
-          <p:cNvSpPr/>
-          <p:nvPr/>
-        </p:nvSpPr>
-        <p:spPr>
-          <a:xfrm>
-            <a:off x="406301" y="5472410"/>
-            <a:ext cx="8498026" cy="1066354"/>
-          </a:xfrm>
-          <a:prstGeom prst="rect">
-            <a:avLst/>
-          </a:prstGeom>
-          <a:noFill/>
-          <a:ln/>
-        </p:spPr>
-        <p:txBody>
-          <a:bodyPr wrap="square" lIns="0" tIns="0" rIns="0" bIns="0" rtlCol="0" anchor="t"/>
-          <a:lstStyle/>
-          <a:p>
-            <a:pPr algn="l" indent="0" marL="0">
-              <a:lnSpc>
-                <a:spcPts val="1680"/>
-              </a:lnSpc>
-              <a:spcBef>
-                <a:spcPts val="300"/>
-              </a:spcBef>
-              <a:spcAft>
-                <a:spcPts val="300"/>
-              </a:spcAft>
-              <a:buNone/>
-            </a:pPr>
-            <a:r>
-              <a:rPr lang="en-US" sz="1200" dirty="0">
-                <a:solidFill>
-                  <a:srgbClr val="1C2833"/>
-                </a:solidFill>
-                <a:latin typeface="Arial" pitchFamily="34" charset="0"/>
-                <a:ea typeface="Arial" pitchFamily="34" charset="-122"/>
-                <a:cs typeface="Arial" pitchFamily="34" charset="-120"/>
-              </a:rPr>
-              <a:t>– Sūtra #7: </a:t>
-            </a:r>
-            <a:pPr algn="l" indent="0" marL="0">
-              <a:lnSpc>
-                <a:spcPts val="1680"/>
-              </a:lnSpc>
-              <a:spcBef>
-                <a:spcPts val="300"/>
-              </a:spcBef>
-              <a:spcAft>
-                <a:spcPts val="300"/>
-              </a:spcAft>
-              <a:buNone/>
-            </a:pPr>
-            <a:r>
-              <a:rPr lang="en-US" sz="1200" b="1" dirty="0">
-                <a:solidFill>
-                  <a:srgbClr val="1C2833"/>
-                </a:solidFill>
-                <a:latin typeface="Arial" pitchFamily="34" charset="0"/>
-                <a:ea typeface="Arial" pitchFamily="34" charset="-122"/>
-                <a:cs typeface="Arial" pitchFamily="34" charset="-120"/>
-              </a:rPr>
-              <a:t>Sankalana Vyavakalanābhyām</a:t>
-            </a:r>
-            <a:pPr algn="l" indent="0" marL="0">
-              <a:lnSpc>
-                <a:spcPts val="1680"/>
-              </a:lnSpc>
-              <a:spcBef>
-                <a:spcPts val="300"/>
-              </a:spcBef>
-              <a:spcAft>
-                <a:spcPts val="300"/>
-              </a:spcAft>
-              <a:buNone/>
-            </a:pPr>
-            <a:r>
-              <a:rPr lang="en-US" sz="1200" dirty="0">
-                <a:solidFill>
-                  <a:srgbClr val="1C2833"/>
-                </a:solidFill>
-                <a:latin typeface="Arial" pitchFamily="34" charset="0"/>
-                <a:ea typeface="Arial" pitchFamily="34" charset="-122"/>
-                <a:cs typeface="Arial" pitchFamily="34" charset="-120"/>
-              </a:rPr>
-              <a:t> — "by addition and by subtraction." – Sūtra #8: </a:t>
-            </a:r>
-            <a:pPr algn="l" indent="0" marL="0">
-              <a:lnSpc>
-                <a:spcPts val="1680"/>
-              </a:lnSpc>
-              <a:spcBef>
-                <a:spcPts val="300"/>
-              </a:spcBef>
-              <a:spcAft>
-                <a:spcPts val="300"/>
-              </a:spcAft>
-              <a:buNone/>
-            </a:pPr>
-            <a:r>
-              <a:rPr lang="en-US" sz="1200" b="1" dirty="0">
-                <a:solidFill>
-                  <a:srgbClr val="1C2833"/>
-                </a:solidFill>
-                <a:latin typeface="Arial" pitchFamily="34" charset="0"/>
-                <a:ea typeface="Arial" pitchFamily="34" charset="-122"/>
-                <a:cs typeface="Arial" pitchFamily="34" charset="-120"/>
-              </a:rPr>
-              <a:t>Pūraṇāpūraṇābhyāṁ</a:t>
-            </a:r>
-            <a:pPr algn="l" indent="0" marL="0">
-              <a:lnSpc>
-                <a:spcPts val="1680"/>
-              </a:lnSpc>
-              <a:spcBef>
-                <a:spcPts val="300"/>
-              </a:spcBef>
-              <a:spcAft>
-                <a:spcPts val="300"/>
-              </a:spcAft>
-              <a:buNone/>
-            </a:pPr>
-            <a:r>
-              <a:rPr lang="en-US" sz="1200" dirty="0">
-                <a:solidFill>
-                  <a:srgbClr val="1C2833"/>
-                </a:solidFill>
-                <a:latin typeface="Arial" pitchFamily="34" charset="0"/>
-                <a:ea typeface="Arial" pitchFamily="34" charset="-122"/>
-                <a:cs typeface="Arial" pitchFamily="34" charset="-120"/>
-              </a:rPr>
-              <a:t> — "by completing or non-completing." – The dot method is </a:t>
-            </a:r>
-            <a:pPr algn="l" indent="0" marL="0">
-              <a:lnSpc>
-                <a:spcPts val="1680"/>
-              </a:lnSpc>
-              <a:spcBef>
-                <a:spcPts val="300"/>
-              </a:spcBef>
-              <a:spcAft>
-                <a:spcPts val="300"/>
-              </a:spcAft>
-              <a:buNone/>
-            </a:pPr>
-            <a:r>
-              <a:rPr lang="en-US" sz="1200" i="1" dirty="0">
-                <a:solidFill>
-                  <a:srgbClr val="1C2833"/>
-                </a:solidFill>
-                <a:latin typeface="Arial" pitchFamily="34" charset="0"/>
-                <a:ea typeface="Arial" pitchFamily="34" charset="-122"/>
-                <a:cs typeface="Arial" pitchFamily="34" charset="-120"/>
-              </a:rPr>
-              <a:t>not</a:t>
-            </a:r>
-            <a:pPr algn="l" indent="0" marL="0">
-              <a:lnSpc>
-                <a:spcPts val="1680"/>
-              </a:lnSpc>
-              <a:spcBef>
-                <a:spcPts val="300"/>
-              </a:spcBef>
-              <a:spcAft>
-                <a:spcPts val="300"/>
-              </a:spcAft>
-              <a:buNone/>
-            </a:pPr>
-            <a:r>
-              <a:rPr lang="en-US" sz="1200" dirty="0">
-                <a:solidFill>
-                  <a:srgbClr val="1C2833"/>
-                </a:solidFill>
-                <a:latin typeface="Arial" pitchFamily="34" charset="0"/>
-                <a:ea typeface="Arial" pitchFamily="34" charset="-122"/>
-                <a:cs typeface="Arial" pitchFamily="34" charset="-120"/>
-              </a:rPr>
-              <a:t> itself one of these sūtras — it's a 20th-century pedagogical technique that uses the </a:t>
-            </a:r>
-            <a:pPr algn="l" indent="0" marL="0">
-              <a:lnSpc>
-                <a:spcPts val="1680"/>
-              </a:lnSpc>
-              <a:spcBef>
-                <a:spcPts val="300"/>
-              </a:spcBef>
-              <a:spcAft>
-                <a:spcPts val="300"/>
-              </a:spcAft>
-              <a:buNone/>
-            </a:pPr>
-            <a:r>
-              <a:rPr lang="en-US" sz="1200" i="1" dirty="0">
-                <a:solidFill>
-                  <a:srgbClr val="1C2833"/>
-                </a:solidFill>
-                <a:latin typeface="Arial" pitchFamily="34" charset="0"/>
-                <a:ea typeface="Arial" pitchFamily="34" charset="-122"/>
-                <a:cs typeface="Arial" pitchFamily="34" charset="-120"/>
-              </a:rPr>
-              <a:t>spirit</a:t>
-            </a:r>
-            <a:pPr algn="l" indent="0" marL="0">
-              <a:lnSpc>
-                <a:spcPts val="1680"/>
-              </a:lnSpc>
-              <a:spcBef>
-                <a:spcPts val="300"/>
-              </a:spcBef>
-              <a:spcAft>
-                <a:spcPts val="300"/>
-              </a:spcAft>
-              <a:buNone/>
-            </a:pPr>
-            <a:r>
-              <a:rPr lang="en-US" sz="1200" dirty="0">
-                <a:solidFill>
-                  <a:srgbClr val="1C2833"/>
-                </a:solidFill>
-                <a:latin typeface="Arial" pitchFamily="34" charset="0"/>
-                <a:ea typeface="Arial" pitchFamily="34" charset="-122"/>
-                <a:cs typeface="Arial" pitchFamily="34" charset="-120"/>
-              </a:rPr>
-              <a:t> of these sūtras (looking for completions to a base). – Be honest: "There is no ancient Sanskrit verse that says 'use the dot method.' What we have is the </a:t>
-            </a:r>
-            <a:pPr algn="l" indent="0" marL="0">
-              <a:lnSpc>
-                <a:spcPts val="1680"/>
-              </a:lnSpc>
-              <a:spcBef>
-                <a:spcPts val="300"/>
-              </a:spcBef>
-              <a:spcAft>
-                <a:spcPts val="300"/>
-              </a:spcAft>
-              <a:buNone/>
-            </a:pPr>
-            <a:r>
-              <a:rPr lang="en-US" sz="1200" i="1" dirty="0">
-                <a:solidFill>
-                  <a:srgbClr val="1C2833"/>
-                </a:solidFill>
-                <a:latin typeface="Arial" pitchFamily="34" charset="0"/>
-                <a:ea typeface="Arial" pitchFamily="34" charset="-122"/>
-                <a:cs typeface="Arial" pitchFamily="34" charset="-120"/>
-              </a:rPr>
-              <a:t>idea</a:t>
-            </a:r>
-            <a:pPr algn="l" indent="0" marL="0">
-              <a:lnSpc>
-                <a:spcPts val="1680"/>
-              </a:lnSpc>
-              <a:spcBef>
-                <a:spcPts val="300"/>
-              </a:spcBef>
-              <a:spcAft>
-                <a:spcPts val="300"/>
-              </a:spcAft>
-              <a:buNone/>
-            </a:pPr>
-            <a:r>
-              <a:rPr lang="en-US" sz="1200" dirty="0">
-                <a:solidFill>
-                  <a:srgbClr val="1C2833"/>
-                </a:solidFill>
-                <a:latin typeface="Arial" pitchFamily="34" charset="0"/>
-                <a:ea typeface="Arial" pitchFamily="34" charset="-122"/>
-                <a:cs typeface="Arial" pitchFamily="34" charset="-120"/>
-              </a:rPr>
-              <a:t> of completion that classical Indian math used, and a modern teaching tool that makes it concrete."</a:t>
-            </a:r>
-            <a:endParaRPr lang="en-US" sz="1200" dirty="0"/>
-          </a:p>
-        </p:txBody>
-      </p:sp>
-      <p:sp>
-        <p:nvSpPr>
-          <p:cNvPr id="21" name="Text 19"/>
-          <p:cNvSpPr/>
-          <p:nvPr/>
-        </p:nvSpPr>
-        <p:spPr>
-          <a:xfrm>
-            <a:off x="406301" y="6691164"/>
+            <a:off x="406301" y="4434929"/>
             <a:ext cx="8498026" cy="213271"/>
           </a:xfrm>
           <a:prstGeom prst="rect">
@@ -5028,7 +5968,7 @@
                 <a:ea typeface="Georgia" pitchFamily="34" charset="-122"/>
                 <a:cs typeface="Georgia" pitchFamily="34" charset="-120"/>
               </a:rPr>
-              <a:t>Activity (15 min) — Explain to a friend</a:t>
+              <a:t>Core (20 min) — The mathematical reasoning</a:t>
             </a:r>
             <a:endParaRPr lang="en-US" sz="1800" dirty="0"/>
           </a:p>
@@ -5042,8 +5982,8 @@
         </p:nvSpPr>
         <p:spPr>
           <a:xfrm>
-            <a:off x="406301" y="870942"/>
-            <a:ext cx="8498026" cy="426541"/>
+            <a:off x="634901" y="883593"/>
+            <a:ext cx="8102798" cy="281880"/>
           </a:xfrm>
           <a:prstGeom prst="rect">
             <a:avLst/>
@@ -5055,20 +5995,18 @@
           <a:bodyPr wrap="square" lIns="0" tIns="0" rIns="0" bIns="0" rtlCol="0" anchor="t"/>
           <a:lstStyle/>
           <a:p>
-            <a:pPr algn="l" indent="0" marL="0">
-              <a:lnSpc>
-                <a:spcPts val="1680"/>
-              </a:lnSpc>
-              <a:spcBef>
-                <a:spcPts val="300"/>
-              </a:spcBef>
-              <a:spcAft>
-                <a:spcPts val="300"/>
-              </a:spcAft>
-              <a:buNone/>
-            </a:pPr>
-            <a:r>
-              <a:rPr lang="en-US" sz="1200" dirty="0">
+            <a:pPr algn="l" marL="342900" indent="-342900">
+              <a:lnSpc>
+                <a:spcPts val="1620"/>
+              </a:lnSpc>
+              <a:spcAft>
+                <a:spcPts val="300"/>
+              </a:spcAft>
+              <a:buSzPct val="100000"/>
+              <a:buChar char="•"/>
+            </a:pPr>
+            <a:r>
+              <a:rPr lang="en-US" sz="1200" b="1" dirty="0">
                 <a:solidFill>
                   <a:srgbClr val="1C2833"/>
                 </a:solidFill>
@@ -5076,22 +6014,19 @@
                 <a:ea typeface="Arial" pitchFamily="34" charset="-122"/>
                 <a:cs typeface="Arial" pitchFamily="34" charset="-120"/>
               </a:rPr>
-              <a:t>– Worksheet prompt: &gt; Imagine your Grade 4 cousin asks: </a:t>
-            </a:r>
-            <a:pPr algn="l" indent="0" marL="0">
-              <a:lnSpc>
-                <a:spcPts val="1680"/>
-              </a:lnSpc>
-              <a:spcBef>
-                <a:spcPts val="300"/>
-              </a:spcBef>
-              <a:spcAft>
-                <a:spcPts val="300"/>
-              </a:spcAft>
-              <a:buNone/>
-            </a:pPr>
-            <a:r>
-              <a:rPr lang="en-US" sz="1200" i="1" dirty="0">
+              <a:t>The core claim</a:t>
+            </a:r>
+            <a:pPr algn="l" indent="0" marL="0">
+              <a:lnSpc>
+                <a:spcPts val="1620"/>
+              </a:lnSpc>
+              <a:spcAft>
+                <a:spcPts val="300"/>
+              </a:spcAft>
+              <a:buNone/>
+            </a:pPr>
+            <a:r>
+              <a:rPr lang="en-US" sz="1200" dirty="0">
                 <a:solidFill>
                   <a:srgbClr val="1C2833"/>
                 </a:solidFill>
@@ -5099,11 +6034,89 @@
                 <a:ea typeface="Arial" pitchFamily="34" charset="-122"/>
                 <a:cs typeface="Arial" pitchFamily="34" charset="-120"/>
               </a:rPr>
-              <a:t>"Why does that dot trick work? Isn't it just magic?"</a:t>
-            </a:r>
-            <a:pPr algn="l" indent="0" marL="0">
-              <a:lnSpc>
-                <a:spcPts val="1680"/>
+              <a:t> (write boxed on the board):</a:t>
+            </a:r>
+            <a:endParaRPr lang="en-US" sz="1200" dirty="0"/>
+          </a:p>
+        </p:txBody>
+      </p:sp>
+      <p:sp>
+        <p:nvSpPr>
+          <p:cNvPr id="5" name="Text 3"/>
+          <p:cNvSpPr/>
+          <p:nvPr/>
+        </p:nvSpPr>
+        <p:spPr>
+          <a:xfrm>
+            <a:off x="406301" y="1266974"/>
+            <a:ext cx="8331398" cy="842963"/>
+          </a:xfrm>
+          <a:prstGeom prst="rect">
+            <a:avLst/>
+          </a:prstGeom>
+          <a:solidFill>
+            <a:srgbClr val="F4F8F9"/>
+          </a:solidFill>
+          <a:ln/>
+        </p:spPr>
+        <p:txBody>
+          <a:bodyPr wrap="square" rtlCol="0" anchor="ctr"/>
+          <a:lstStyle/>
+          <a:p>
+            <a:pPr indent="0" marL="0">
+              <a:buNone/>
+            </a:pPr>
+            <a:endParaRPr lang="en-US" dirty="0"/>
+          </a:p>
+        </p:txBody>
+      </p:sp>
+      <p:sp>
+        <p:nvSpPr>
+          <p:cNvPr id="6" name="Shape 4"/>
+          <p:cNvSpPr/>
+          <p:nvPr/>
+        </p:nvSpPr>
+        <p:spPr>
+          <a:xfrm>
+            <a:off x="434876" y="1266974"/>
+            <a:ext cx="0" cy="842962"/>
+          </a:xfrm>
+          <a:prstGeom prst="line">
+            <a:avLst/>
+          </a:prstGeom>
+          <a:noFill/>
+          <a:ln w="57150">
+            <a:solidFill>
+              <a:srgbClr val="FE4447"/>
+            </a:solidFill>
+            <a:prstDash val="solid"/>
+          </a:ln>
+        </p:spPr>
+      </p:sp>
+      <p:sp>
+        <p:nvSpPr>
+          <p:cNvPr id="7" name="Text 5"/>
+          <p:cNvSpPr/>
+          <p:nvPr/>
+        </p:nvSpPr>
+        <p:spPr>
+          <a:xfrm>
+            <a:off x="692051" y="1457474"/>
+            <a:ext cx="7973389" cy="461963"/>
+          </a:xfrm>
+          <a:prstGeom prst="rect">
+            <a:avLst/>
+          </a:prstGeom>
+          <a:noFill/>
+          <a:ln/>
+        </p:spPr>
+        <p:txBody>
+          <a:bodyPr wrap="square" lIns="0" tIns="0" rIns="0" bIns="0" rtlCol="0" anchor="t"/>
+          <a:lstStyle/>
+          <a:p>
+            <a:pPr algn="l" indent="0" marL="0">
+              <a:lnSpc>
+                <a:spcPts val="1820"/>
               </a:lnSpc>
               <a:spcBef>
                 <a:spcPts val="300"/>
@@ -5114,7 +6127,53 @@
               <a:buNone/>
             </a:pPr>
             <a:r>
-              <a:rPr lang="en-US" sz="1200" dirty="0">
+              <a:rPr lang="en-US" sz="1300" b="1" i="1" dirty="0">
+                <a:solidFill>
+                  <a:srgbClr val="1C2833"/>
+                </a:solidFill>
+                <a:latin typeface="Georgia" pitchFamily="34" charset="0"/>
+                <a:ea typeface="Georgia" pitchFamily="34" charset="-122"/>
+                <a:cs typeface="Georgia" pitchFamily="34" charset="-120"/>
+              </a:rPr>
+              <a:t>A dot in a column represents "10 has been used up." Since 10 in any column equals 1 in the next column, the dot count is the carry.</a:t>
+            </a:r>
+            <a:endParaRPr lang="en-US" sz="1300" dirty="0"/>
+          </a:p>
+        </p:txBody>
+      </p:sp>
+      <p:sp>
+        <p:nvSpPr>
+          <p:cNvPr id="8" name="Text 6"/>
+          <p:cNvSpPr/>
+          <p:nvPr/>
+        </p:nvSpPr>
+        <p:spPr>
+          <a:xfrm>
+            <a:off x="634901" y="2211437"/>
+            <a:ext cx="8102798" cy="281880"/>
+          </a:xfrm>
+          <a:prstGeom prst="rect">
+            <a:avLst/>
+          </a:prstGeom>
+          <a:noFill/>
+          <a:ln/>
+        </p:spPr>
+        <p:txBody>
+          <a:bodyPr wrap="square" lIns="0" tIns="0" rIns="0" bIns="0" rtlCol="0" anchor="t"/>
+          <a:lstStyle/>
+          <a:p>
+            <a:pPr algn="l" marL="342900" indent="-342900">
+              <a:lnSpc>
+                <a:spcPts val="1620"/>
+              </a:lnSpc>
+              <a:spcAft>
+                <a:spcPts val="300"/>
+              </a:spcAft>
+              <a:buSzPct val="100000"/>
+              <a:buChar char="•"/>
+            </a:pPr>
+            <a:r>
+              <a:rPr lang="en-US" sz="1200" b="1" dirty="0">
                 <a:solidFill>
                   <a:srgbClr val="1C2833"/>
                 </a:solidFill>
@@ -5122,22 +6181,19 @@
                 <a:ea typeface="Arial" pitchFamily="34" charset="-122"/>
                 <a:cs typeface="Arial" pitchFamily="34" charset="-120"/>
               </a:rPr>
-              <a:t> Write 4–6 sentences explaining why it's NOT magic. Use the words </a:t>
-            </a:r>
-            <a:pPr algn="l" indent="0" marL="0">
-              <a:lnSpc>
-                <a:spcPts val="1680"/>
-              </a:lnSpc>
-              <a:spcBef>
-                <a:spcPts val="300"/>
-              </a:spcBef>
-              <a:spcAft>
-                <a:spcPts val="300"/>
-              </a:spcAft>
-              <a:buNone/>
-            </a:pPr>
-            <a:r>
-              <a:rPr lang="en-US" sz="1200" i="1" dirty="0">
+              <a:t>Walk through a simple example to prove it</a:t>
+            </a:r>
+            <a:pPr algn="l" indent="0" marL="0">
+              <a:lnSpc>
+                <a:spcPts val="1620"/>
+              </a:lnSpc>
+              <a:spcAft>
+                <a:spcPts val="300"/>
+              </a:spcAft>
+              <a:buNone/>
+            </a:pPr>
+            <a:r>
+              <a:rPr lang="en-US" sz="1200" dirty="0">
                 <a:solidFill>
                   <a:srgbClr val="1C2833"/>
                 </a:solidFill>
@@ -5145,122 +6201,7 @@
                 <a:ea typeface="Arial" pitchFamily="34" charset="-122"/>
                 <a:cs typeface="Arial" pitchFamily="34" charset="-120"/>
               </a:rPr>
-              <a:t>carry</a:t>
-            </a:r>
-            <a:pPr algn="l" indent="0" marL="0">
-              <a:lnSpc>
-                <a:spcPts val="1680"/>
-              </a:lnSpc>
-              <a:spcBef>
-                <a:spcPts val="300"/>
-              </a:spcBef>
-              <a:spcAft>
-                <a:spcPts val="300"/>
-              </a:spcAft>
-              <a:buNone/>
-            </a:pPr>
-            <a:r>
-              <a:rPr lang="en-US" sz="1200" dirty="0">
-                <a:solidFill>
-                  <a:srgbClr val="1C2833"/>
-                </a:solidFill>
-                <a:latin typeface="Arial" pitchFamily="34" charset="0"/>
-                <a:ea typeface="Arial" pitchFamily="34" charset="-122"/>
-                <a:cs typeface="Arial" pitchFamily="34" charset="-120"/>
-              </a:rPr>
-              <a:t>, </a:t>
-            </a:r>
-            <a:pPr algn="l" indent="0" marL="0">
-              <a:lnSpc>
-                <a:spcPts val="1680"/>
-              </a:lnSpc>
-              <a:spcBef>
-                <a:spcPts val="300"/>
-              </a:spcBef>
-              <a:spcAft>
-                <a:spcPts val="300"/>
-              </a:spcAft>
-              <a:buNone/>
-            </a:pPr>
-            <a:r>
-              <a:rPr lang="en-US" sz="1200" i="1" dirty="0">
-                <a:solidFill>
-                  <a:srgbClr val="1C2833"/>
-                </a:solidFill>
-                <a:latin typeface="Arial" pitchFamily="34" charset="0"/>
-                <a:ea typeface="Arial" pitchFamily="34" charset="-122"/>
-                <a:cs typeface="Arial" pitchFamily="34" charset="-120"/>
-              </a:rPr>
-              <a:t>place value</a:t>
-            </a:r>
-            <a:pPr algn="l" indent="0" marL="0">
-              <a:lnSpc>
-                <a:spcPts val="1680"/>
-              </a:lnSpc>
-              <a:spcBef>
-                <a:spcPts val="300"/>
-              </a:spcBef>
-              <a:spcAft>
-                <a:spcPts val="300"/>
-              </a:spcAft>
-              <a:buNone/>
-            </a:pPr>
-            <a:r>
-              <a:rPr lang="en-US" sz="1200" dirty="0">
-                <a:solidFill>
-                  <a:srgbClr val="1C2833"/>
-                </a:solidFill>
-                <a:latin typeface="Arial" pitchFamily="34" charset="0"/>
-                <a:ea typeface="Arial" pitchFamily="34" charset="-122"/>
-                <a:cs typeface="Arial" pitchFamily="34" charset="-120"/>
-              </a:rPr>
-              <a:t>, and </a:t>
-            </a:r>
-            <a:pPr algn="l" indent="0" marL="0">
-              <a:lnSpc>
-                <a:spcPts val="1680"/>
-              </a:lnSpc>
-              <a:spcBef>
-                <a:spcPts val="300"/>
-              </a:spcBef>
-              <a:spcAft>
-                <a:spcPts val="300"/>
-              </a:spcAft>
-              <a:buNone/>
-            </a:pPr>
-            <a:r>
-              <a:rPr lang="en-US" sz="1200" i="1" dirty="0">
-                <a:solidFill>
-                  <a:srgbClr val="1C2833"/>
-                </a:solidFill>
-                <a:latin typeface="Arial" pitchFamily="34" charset="0"/>
-                <a:ea typeface="Arial" pitchFamily="34" charset="-122"/>
-                <a:cs typeface="Arial" pitchFamily="34" charset="-120"/>
-              </a:rPr>
-              <a:t>10</a:t>
-            </a:r>
-            <a:pPr algn="l" indent="0" marL="0">
-              <a:lnSpc>
-                <a:spcPts val="1680"/>
-              </a:lnSpc>
-              <a:spcBef>
-                <a:spcPts val="300"/>
-              </a:spcBef>
-              <a:spcAft>
-                <a:spcPts val="300"/>
-              </a:spcAft>
-              <a:buNone/>
-            </a:pPr>
-            <a:r>
-              <a:rPr lang="en-US" sz="1200" dirty="0">
-                <a:solidFill>
-                  <a:srgbClr val="1C2833"/>
-                </a:solidFill>
-                <a:latin typeface="Arial" pitchFamily="34" charset="0"/>
-                <a:ea typeface="Arial" pitchFamily="34" charset="-122"/>
-                <a:cs typeface="Arial" pitchFamily="34" charset="-120"/>
-              </a:rPr>
-              <a:t>.</a:t>
+              <a:t>:</a:t>
             </a:r>
             <a:endParaRPr lang="en-US" sz="1200" dirty="0"/>
           </a:p>
@@ -5268,55 +6209,7 @@
       </p:sp>
       <p:sp>
         <p:nvSpPr>
-          <p:cNvPr id="5" name="Text 3"/>
-          <p:cNvSpPr/>
-          <p:nvPr/>
-        </p:nvSpPr>
-        <p:spPr>
-          <a:xfrm>
-            <a:off x="406301" y="1373684"/>
-            <a:ext cx="8498026" cy="426541"/>
-          </a:xfrm>
-          <a:prstGeom prst="rect">
-            <a:avLst/>
-          </a:prstGeom>
-          <a:noFill/>
-          <a:ln/>
-        </p:spPr>
-        <p:txBody>
-          <a:bodyPr wrap="square" lIns="0" tIns="0" rIns="0" bIns="0" rtlCol="0" anchor="t"/>
-          <a:lstStyle/>
-          <a:p>
-            <a:pPr algn="l" indent="0" marL="0">
-              <a:lnSpc>
-                <a:spcPts val="1680"/>
-              </a:lnSpc>
-              <a:spcBef>
-                <a:spcPts val="300"/>
-              </a:spcBef>
-              <a:spcAft>
-                <a:spcPts val="300"/>
-              </a:spcAft>
-              <a:buNone/>
-            </a:pPr>
-            <a:r>
-              <a:rPr lang="en-US" sz="1200" dirty="0">
-                <a:solidFill>
-                  <a:srgbClr val="1C2833"/>
-                </a:solidFill>
-                <a:latin typeface="Arial" pitchFamily="34" charset="0"/>
-                <a:ea typeface="Arial" pitchFamily="34" charset="-122"/>
-                <a:cs typeface="Arial" pitchFamily="34" charset="-120"/>
-              </a:rPr>
-              <a:t>– 10 min individual writing. 5 min pair-sharing: read your paragraph to your partner; they tell you one part that's clear and one part that's unclear.</a:t>
-            </a:r>
-            <a:endParaRPr lang="en-US" sz="1200" dirty="0"/>
-          </a:p>
-        </p:txBody>
-      </p:sp>
-      <p:sp>
-        <p:nvSpPr>
-          <p:cNvPr id="6" name="Text 4"/>
+          <p:cNvPr id="9" name="Text 7"/>
           <p:cNvSpPr/>
           <p:nvPr/>
         </p:nvSpPr>
@@ -5466,7 +6359,7 @@
                 <a:ea typeface="Georgia" pitchFamily="34" charset="-122"/>
                 <a:cs typeface="Georgia" pitchFamily="34" charset="-120"/>
               </a:rPr>
-              <a:t>Wrap-up (5 min)</a:t>
+              <a:t>Core (20 min) — The mathematical reasoning (cont.)</a:t>
             </a:r>
             <a:endParaRPr lang="en-US" sz="1800" dirty="0"/>
           </a:p>
@@ -5480,13 +6373,66 @@
         </p:nvSpPr>
         <p:spPr>
           <a:xfrm>
-            <a:off x="406301" y="870942"/>
-            <a:ext cx="8498026" cy="426541"/>
-          </a:xfrm>
-          <a:prstGeom prst="rect">
+            <a:off x="406301" y="883593"/>
+            <a:ext cx="8331398" cy="2174230"/>
+          </a:xfrm>
+          <a:prstGeom prst="rect">
+            <a:avLst/>
+          </a:prstGeom>
+          <a:solidFill>
+            <a:srgbClr val="F4F8F9"/>
+          </a:solidFill>
+          <a:ln/>
+        </p:spPr>
+        <p:txBody>
+          <a:bodyPr wrap="square" rtlCol="0" anchor="ctr"/>
+          <a:lstStyle/>
+          <a:p>
+            <a:pPr indent="0" marL="0">
+              <a:buNone/>
+            </a:pPr>
+            <a:endParaRPr lang="en-US" dirty="0"/>
+          </a:p>
+        </p:txBody>
+      </p:sp>
+      <p:sp>
+        <p:nvSpPr>
+          <p:cNvPr id="5" name="Shape 3"/>
+          <p:cNvSpPr/>
+          <p:nvPr/>
+        </p:nvSpPr>
+        <p:spPr>
+          <a:xfrm>
+            <a:off x="430113" y="883593"/>
+            <a:ext cx="0" cy="2174230"/>
+          </a:xfrm>
+          <a:prstGeom prst="line">
             <a:avLst/>
           </a:prstGeom>
           <a:noFill/>
+          <a:ln w="47625">
+            <a:solidFill>
+              <a:srgbClr val="277884"/>
+            </a:solidFill>
+            <a:prstDash val="solid"/>
+          </a:ln>
+        </p:spPr>
+      </p:sp>
+      <p:sp>
+        <p:nvSpPr>
+          <p:cNvPr id="6" name="Text 4"/>
+          <p:cNvSpPr/>
+          <p:nvPr/>
+        </p:nvSpPr>
+        <p:spPr>
+          <a:xfrm>
+            <a:off x="631627" y="1010543"/>
+            <a:ext cx="8086939" cy="174575"/>
+          </a:xfrm>
+          <a:prstGeom prst="rect">
+            <a:avLst/>
+          </a:prstGeom>
+          <a:noFill/>
           <a:ln/>
         </p:spPr>
         <p:txBody>
@@ -5495,57 +6441,322 @@
           <a:p>
             <a:pPr algn="l" indent="0" marL="0">
               <a:lnSpc>
-                <a:spcPts val="1680"/>
-              </a:lnSpc>
-              <a:spcBef>
-                <a:spcPts val="300"/>
-              </a:spcBef>
-              <a:spcAft>
-                <a:spcPts val="300"/>
-              </a:spcAft>
-              <a:buNone/>
-            </a:pPr>
-            <a:r>
-              <a:rPr lang="en-US" sz="1200" dirty="0">
-                <a:solidFill>
-                  <a:srgbClr val="1C2833"/>
-                </a:solidFill>
-                <a:latin typeface="Arial" pitchFamily="34" charset="0"/>
-                <a:ea typeface="Arial" pitchFamily="34" charset="-122"/>
-                <a:cs typeface="Arial" pitchFamily="34" charset="-120"/>
-              </a:rPr>
-              <a:t>– Read aloud one strong paragraph (with permission). – Preview Day 7: </a:t>
-            </a:r>
-            <a:pPr algn="l" indent="0" marL="0">
-              <a:lnSpc>
-                <a:spcPts val="1680"/>
-              </a:lnSpc>
-              <a:spcBef>
-                <a:spcPts val="300"/>
-              </a:spcBef>
-              <a:spcAft>
-                <a:spcPts val="300"/>
-              </a:spcAft>
-              <a:buNone/>
-            </a:pPr>
-            <a:r>
-              <a:rPr lang="en-US" sz="1200" i="1" dirty="0">
-                <a:solidFill>
-                  <a:srgbClr val="1C2833"/>
-                </a:solidFill>
-                <a:latin typeface="Arial" pitchFamily="34" charset="0"/>
-                <a:ea typeface="Arial" pitchFamily="34" charset="-122"/>
-                <a:cs typeface="Arial" pitchFamily="34" charset="-120"/>
-              </a:rPr>
-              <a:t>"Tomorrow — using the same 'completion to 10' trick for mental addition of 2-digit numbers near a base."</a:t>
-            </a:r>
-            <a:endParaRPr lang="en-US" sz="1200" dirty="0"/>
-          </a:p>
-        </p:txBody>
-      </p:sp>
-      <p:sp>
-        <p:nvSpPr>
-          <p:cNvPr id="5" name="Text 3"/>
+                <a:spcPts val="1375"/>
+              </a:lnSpc>
+              <a:buNone/>
+            </a:pPr>
+            <a:r>
+              <a:rPr lang="en-US" sz="1100" dirty="0">
+                <a:solidFill>
+                  <a:srgbClr val="1C2833"/>
+                </a:solidFill>
+                <a:latin typeface="Courier New" pitchFamily="34" charset="0"/>
+                <a:ea typeface="Courier New" pitchFamily="34" charset="-122"/>
+                <a:cs typeface="Courier New" pitchFamily="34" charset="-120"/>
+              </a:rPr>
+              <a:t>Column: 8, 7, 2, 6, 4</a:t>
+            </a:r>
+            <a:endParaRPr lang="en-US" sz="1100" dirty="0"/>
+          </a:p>
+        </p:txBody>
+      </p:sp>
+      <p:sp>
+        <p:nvSpPr>
+          <p:cNvPr id="7" name="Text 5"/>
+          <p:cNvSpPr/>
+          <p:nvPr/>
+        </p:nvSpPr>
+        <p:spPr>
+          <a:xfrm>
+            <a:off x="631627" y="1359694"/>
+            <a:ext cx="8086939" cy="174575"/>
+          </a:xfrm>
+          <a:prstGeom prst="rect">
+            <a:avLst/>
+          </a:prstGeom>
+          <a:noFill/>
+          <a:ln/>
+        </p:spPr>
+        <p:txBody>
+          <a:bodyPr wrap="square" lIns="0" tIns="0" rIns="0" bIns="0" rtlCol="0" anchor="t"/>
+          <a:lstStyle/>
+          <a:p>
+            <a:pPr algn="l" indent="0" marL="0">
+              <a:lnSpc>
+                <a:spcPts val="1375"/>
+              </a:lnSpc>
+              <a:buNone/>
+            </a:pPr>
+            <a:r>
+              <a:rPr lang="en-US" sz="1100" dirty="0">
+                <a:solidFill>
+                  <a:srgbClr val="1C2833"/>
+                </a:solidFill>
+                <a:latin typeface="Courier New" pitchFamily="34" charset="0"/>
+                <a:ea typeface="Courier New" pitchFamily="34" charset="-122"/>
+                <a:cs typeface="Courier New" pitchFamily="34" charset="-120"/>
+              </a:rPr>
+              <a:t>Direct addition: 8+7+2+6+4 = 27.</a:t>
+            </a:r>
+            <a:endParaRPr lang="en-US" sz="1100" dirty="0"/>
+          </a:p>
+        </p:txBody>
+      </p:sp>
+      <p:sp>
+        <p:nvSpPr>
+          <p:cNvPr id="8" name="Text 6"/>
+          <p:cNvSpPr/>
+          <p:nvPr/>
+        </p:nvSpPr>
+        <p:spPr>
+          <a:xfrm>
+            <a:off x="631627" y="1534269"/>
+            <a:ext cx="8086939" cy="174575"/>
+          </a:xfrm>
+          <a:prstGeom prst="rect">
+            <a:avLst/>
+          </a:prstGeom>
+          <a:noFill/>
+          <a:ln/>
+        </p:spPr>
+        <p:txBody>
+          <a:bodyPr wrap="square" lIns="0" tIns="0" rIns="0" bIns="0" rtlCol="0" anchor="t"/>
+          <a:lstStyle/>
+          <a:p>
+            <a:pPr algn="l" indent="0" marL="0">
+              <a:lnSpc>
+                <a:spcPts val="1375"/>
+              </a:lnSpc>
+              <a:buNone/>
+            </a:pPr>
+            <a:r>
+              <a:rPr lang="en-US" sz="1100" dirty="0">
+                <a:solidFill>
+                  <a:srgbClr val="1C2833"/>
+                </a:solidFill>
+                <a:latin typeface="Courier New" pitchFamily="34" charset="0"/>
+                <a:ea typeface="Courier New" pitchFamily="34" charset="-122"/>
+                <a:cs typeface="Courier New" pitchFamily="34" charset="-120"/>
+              </a:rPr>
+              <a:t>Units = 7. Carry = 2.</a:t>
+            </a:r>
+            <a:endParaRPr lang="en-US" sz="1100" dirty="0"/>
+          </a:p>
+        </p:txBody>
+      </p:sp>
+      <p:sp>
+        <p:nvSpPr>
+          <p:cNvPr id="9" name="Text 7"/>
+          <p:cNvSpPr/>
+          <p:nvPr/>
+        </p:nvSpPr>
+        <p:spPr>
+          <a:xfrm>
+            <a:off x="631627" y="1883420"/>
+            <a:ext cx="8086939" cy="174575"/>
+          </a:xfrm>
+          <a:prstGeom prst="rect">
+            <a:avLst/>
+          </a:prstGeom>
+          <a:noFill/>
+          <a:ln/>
+        </p:spPr>
+        <p:txBody>
+          <a:bodyPr wrap="square" lIns="0" tIns="0" rIns="0" bIns="0" rtlCol="0" anchor="t"/>
+          <a:lstStyle/>
+          <a:p>
+            <a:pPr algn="l" indent="0" marL="0">
+              <a:lnSpc>
+                <a:spcPts val="1375"/>
+              </a:lnSpc>
+              <a:buNone/>
+            </a:pPr>
+            <a:r>
+              <a:rPr lang="en-US" sz="1100" dirty="0">
+                <a:solidFill>
+                  <a:srgbClr val="1C2833"/>
+                </a:solidFill>
+                <a:latin typeface="Courier New" pitchFamily="34" charset="0"/>
+                <a:ea typeface="Courier New" pitchFamily="34" charset="-122"/>
+                <a:cs typeface="Courier New" pitchFamily="34" charset="-120"/>
+              </a:rPr>
+              <a:t>Dot method:</a:t>
+            </a:r>
+            <a:endParaRPr lang="en-US" sz="1100" dirty="0"/>
+          </a:p>
+        </p:txBody>
+      </p:sp>
+      <p:sp>
+        <p:nvSpPr>
+          <p:cNvPr id="10" name="Text 8"/>
+          <p:cNvSpPr/>
+          <p:nvPr/>
+        </p:nvSpPr>
+        <p:spPr>
+          <a:xfrm>
+            <a:off x="631627" y="2057995"/>
+            <a:ext cx="8086939" cy="174575"/>
+          </a:xfrm>
+          <a:prstGeom prst="rect">
+            <a:avLst/>
+          </a:prstGeom>
+          <a:noFill/>
+          <a:ln/>
+        </p:spPr>
+        <p:txBody>
+          <a:bodyPr wrap="square" lIns="0" tIns="0" rIns="0" bIns="0" rtlCol="0" anchor="t"/>
+          <a:lstStyle/>
+          <a:p>
+            <a:pPr algn="l" indent="0" marL="0">
+              <a:lnSpc>
+                <a:spcPts val="1375"/>
+              </a:lnSpc>
+              <a:buNone/>
+            </a:pPr>
+            <a:r>
+              <a:rPr lang="en-US" sz="1100" dirty="0">
+                <a:solidFill>
+                  <a:srgbClr val="1C2833"/>
+                </a:solidFill>
+                <a:latin typeface="Courier New" pitchFamily="34" charset="0"/>
+                <a:ea typeface="Courier New" pitchFamily="34" charset="-122"/>
+                <a:cs typeface="Courier New" pitchFamily="34" charset="-120"/>
+              </a:rPr>
+              <a:t>Start 0. +8 = 8. +7 = 15 → dot · on 7, total = 5.</a:t>
+            </a:r>
+            <a:endParaRPr lang="en-US" sz="1100" dirty="0"/>
+          </a:p>
+        </p:txBody>
+      </p:sp>
+      <p:sp>
+        <p:nvSpPr>
+          <p:cNvPr id="11" name="Text 9"/>
+          <p:cNvSpPr/>
+          <p:nvPr/>
+        </p:nvSpPr>
+        <p:spPr>
+          <a:xfrm>
+            <a:off x="631627" y="2232571"/>
+            <a:ext cx="8086939" cy="174575"/>
+          </a:xfrm>
+          <a:prstGeom prst="rect">
+            <a:avLst/>
+          </a:prstGeom>
+          <a:noFill/>
+          <a:ln/>
+        </p:spPr>
+        <p:txBody>
+          <a:bodyPr wrap="square" lIns="0" tIns="0" rIns="0" bIns="0" rtlCol="0" anchor="t"/>
+          <a:lstStyle/>
+          <a:p>
+            <a:pPr algn="l" indent="0" marL="0">
+              <a:lnSpc>
+                <a:spcPts val="1375"/>
+              </a:lnSpc>
+              <a:buNone/>
+            </a:pPr>
+            <a:r>
+              <a:rPr lang="en-US" sz="1100" dirty="0">
+                <a:solidFill>
+                  <a:srgbClr val="1C2833"/>
+                </a:solidFill>
+                <a:latin typeface="Courier New" pitchFamily="34" charset="0"/>
+                <a:ea typeface="Courier New" pitchFamily="34" charset="-122"/>
+                <a:cs typeface="Courier New" pitchFamily="34" charset="-120"/>
+              </a:rPr>
+              <a:t>+2 = 7. +6 = 13 → dot · on 6, total = 3. +4 = 7.</a:t>
+            </a:r>
+            <a:endParaRPr lang="en-US" sz="1100" dirty="0"/>
+          </a:p>
+        </p:txBody>
+      </p:sp>
+      <p:sp>
+        <p:nvSpPr>
+          <p:cNvPr id="12" name="Text 10"/>
+          <p:cNvSpPr/>
+          <p:nvPr/>
+        </p:nvSpPr>
+        <p:spPr>
+          <a:xfrm>
+            <a:off x="631627" y="2407146"/>
+            <a:ext cx="8086939" cy="174575"/>
+          </a:xfrm>
+          <a:prstGeom prst="rect">
+            <a:avLst/>
+          </a:prstGeom>
+          <a:noFill/>
+          <a:ln/>
+        </p:spPr>
+        <p:txBody>
+          <a:bodyPr wrap="square" lIns="0" tIns="0" rIns="0" bIns="0" rtlCol="0" anchor="t"/>
+          <a:lstStyle/>
+          <a:p>
+            <a:pPr algn="l" indent="0" marL="0">
+              <a:lnSpc>
+                <a:spcPts val="1375"/>
+              </a:lnSpc>
+              <a:buNone/>
+            </a:pPr>
+            <a:r>
+              <a:rPr lang="en-US" sz="1100" dirty="0">
+                <a:solidFill>
+                  <a:srgbClr val="1C2833"/>
+                </a:solidFill>
+                <a:latin typeface="Courier New" pitchFamily="34" charset="0"/>
+                <a:ea typeface="Courier New" pitchFamily="34" charset="-122"/>
+                <a:cs typeface="Courier New" pitchFamily="34" charset="-120"/>
+              </a:rPr>
+              <a:t>Units = 7. Dots = 2. Carry = 2.</a:t>
+            </a:r>
+            <a:endParaRPr lang="en-US" sz="1100" dirty="0"/>
+          </a:p>
+        </p:txBody>
+      </p:sp>
+      <p:sp>
+        <p:nvSpPr>
+          <p:cNvPr id="13" name="Text 11"/>
+          <p:cNvSpPr/>
+          <p:nvPr/>
+        </p:nvSpPr>
+        <p:spPr>
+          <a:xfrm>
+            <a:off x="631627" y="2756297"/>
+            <a:ext cx="8086939" cy="174575"/>
+          </a:xfrm>
+          <a:prstGeom prst="rect">
+            <a:avLst/>
+          </a:prstGeom>
+          <a:noFill/>
+          <a:ln/>
+        </p:spPr>
+        <p:txBody>
+          <a:bodyPr wrap="square" lIns="0" tIns="0" rIns="0" bIns="0" rtlCol="0" anchor="t"/>
+          <a:lstStyle/>
+          <a:p>
+            <a:pPr algn="l" indent="0" marL="0">
+              <a:lnSpc>
+                <a:spcPts val="1375"/>
+              </a:lnSpc>
+              <a:buNone/>
+            </a:pPr>
+            <a:r>
+              <a:rPr lang="en-US" sz="1100" dirty="0">
+                <a:solidFill>
+                  <a:srgbClr val="1C2833"/>
+                </a:solidFill>
+                <a:latin typeface="Courier New" pitchFamily="34" charset="0"/>
+                <a:ea typeface="Courier New" pitchFamily="34" charset="-122"/>
+                <a:cs typeface="Courier New" pitchFamily="34" charset="-120"/>
+              </a:rPr>
+              <a:t>Same answer.</a:t>
+            </a:r>
+            <a:endParaRPr lang="en-US" sz="1100" dirty="0"/>
+          </a:p>
+        </p:txBody>
+      </p:sp>
+      <p:sp>
+        <p:nvSpPr>
+          <p:cNvPr id="14" name="Text 12"/>
           <p:cNvSpPr/>
           <p:nvPr/>
         </p:nvSpPr>
@@ -5695,7 +6906,7 @@
                 <a:ea typeface="Georgia" pitchFamily="34" charset="-122"/>
                 <a:cs typeface="Georgia" pitchFamily="34" charset="-120"/>
               </a:rPr>
-              <a:t>Student-facing content</a:t>
+              <a:t>Core (20 min) — The mathematical reasoning (cont.)</a:t>
             </a:r>
             <a:endParaRPr lang="en-US" sz="1800" dirty="0"/>
           </a:p>
@@ -5709,476 +6920,141 @@
         </p:nvSpPr>
         <p:spPr>
           <a:xfrm>
-            <a:off x="406301" y="883593"/>
-            <a:ext cx="8331398" cy="2112169"/>
-          </a:xfrm>
-          <a:prstGeom prst="rect">
-            <a:avLst/>
-          </a:prstGeom>
-          <a:solidFill>
-            <a:srgbClr val="F4F8F9"/>
-          </a:solidFill>
-          <a:ln/>
-        </p:spPr>
-        <p:txBody>
-          <a:bodyPr wrap="square" rtlCol="0" anchor="ctr"/>
-          <a:lstStyle/>
-          <a:p>
-            <a:pPr indent="0" marL="0">
-              <a:buNone/>
-            </a:pPr>
-            <a:endParaRPr lang="en-US" dirty="0"/>
-          </a:p>
-        </p:txBody>
-      </p:sp>
-      <p:sp>
-        <p:nvSpPr>
-          <p:cNvPr id="5" name="Shape 3"/>
-          <p:cNvSpPr/>
-          <p:nvPr/>
-        </p:nvSpPr>
-        <p:spPr>
-          <a:xfrm>
-            <a:off x="434876" y="883593"/>
-            <a:ext cx="0" cy="2112169"/>
-          </a:xfrm>
-          <a:prstGeom prst="line">
+            <a:off x="634901" y="883593"/>
+            <a:ext cx="8102798" cy="281880"/>
+          </a:xfrm>
+          <a:prstGeom prst="rect">
             <a:avLst/>
           </a:prstGeom>
           <a:noFill/>
-          <a:ln w="57150">
-            <a:solidFill>
-              <a:srgbClr val="FE4447"/>
-            </a:solidFill>
-            <a:prstDash val="solid"/>
-          </a:ln>
-        </p:spPr>
+          <a:ln/>
+        </p:spPr>
+        <p:txBody>
+          <a:bodyPr wrap="square" lIns="0" tIns="0" rIns="0" bIns="0" rtlCol="0" anchor="t"/>
+          <a:lstStyle/>
+          <a:p>
+            <a:pPr algn="l" marL="342900" indent="-342900">
+              <a:lnSpc>
+                <a:spcPts val="1620"/>
+              </a:lnSpc>
+              <a:spcAft>
+                <a:spcPts val="300"/>
+              </a:spcAft>
+              <a:buSzPct val="100000"/>
+              <a:buChar char="•"/>
+            </a:pPr>
+            <a:r>
+              <a:rPr lang="en-US" sz="1200" b="1" dirty="0">
+                <a:solidFill>
+                  <a:srgbClr val="1C2833"/>
+                </a:solidFill>
+                <a:latin typeface="Arial" pitchFamily="34" charset="0"/>
+                <a:ea typeface="Arial" pitchFamily="34" charset="-122"/>
+                <a:cs typeface="Arial" pitchFamily="34" charset="-120"/>
+              </a:rPr>
+              <a:t>Why? Because each dot is precisely "I just crossed 10."</a:t>
+            </a:r>
+            <a:endParaRPr lang="en-US" sz="1200" dirty="0"/>
+          </a:p>
+        </p:txBody>
+      </p:sp>
+      <p:sp>
+        <p:nvSpPr>
+          <p:cNvPr id="5" name="Text 3"/>
+          <p:cNvSpPr/>
+          <p:nvPr/>
+        </p:nvSpPr>
+        <p:spPr>
+          <a:xfrm>
+            <a:off x="634901" y="1266974"/>
+            <a:ext cx="8102798" cy="769441"/>
+          </a:xfrm>
+          <a:prstGeom prst="rect">
+            <a:avLst/>
+          </a:prstGeom>
+          <a:noFill/>
+          <a:ln/>
+        </p:spPr>
+        <p:txBody>
+          <a:bodyPr wrap="square" lIns="0" tIns="0" rIns="0" bIns="0" rtlCol="0" anchor="t"/>
+          <a:lstStyle/>
+          <a:p>
+            <a:pPr algn="l" marL="342900" indent="-342900">
+              <a:lnSpc>
+                <a:spcPts val="1620"/>
+              </a:lnSpc>
+              <a:spcAft>
+                <a:spcPts val="300"/>
+              </a:spcAft>
+              <a:buSzPct val="100000"/>
+              <a:buChar char="•"/>
+            </a:pPr>
+            <a:r>
+              <a:rPr lang="en-US" sz="1200" dirty="0">
+                <a:solidFill>
+                  <a:srgbClr val="1C2833"/>
+                </a:solidFill>
+                <a:latin typeface="Arial" pitchFamily="34" charset="0"/>
+                <a:ea typeface="Arial" pitchFamily="34" charset="-122"/>
+                <a:cs typeface="Arial" pitchFamily="34" charset="-120"/>
+              </a:rPr>
+              <a:t>Crossing 10 once = 1 carry.</a:t>
+            </a:r>
+            <a:endParaRPr lang="en-US" sz="1200" dirty="0"/>
+          </a:p>
+          <a:p>
+            <a:pPr algn="l" marL="342900" indent="-342900">
+              <a:lnSpc>
+                <a:spcPts val="1620"/>
+              </a:lnSpc>
+              <a:spcAft>
+                <a:spcPts val="300"/>
+              </a:spcAft>
+              <a:buSzPct val="100000"/>
+              <a:buChar char="•"/>
+            </a:pPr>
+            <a:r>
+              <a:rPr lang="en-US" sz="1200" dirty="0">
+                <a:solidFill>
+                  <a:srgbClr val="1C2833"/>
+                </a:solidFill>
+                <a:latin typeface="Arial" pitchFamily="34" charset="0"/>
+                <a:ea typeface="Arial" pitchFamily="34" charset="-122"/>
+                <a:cs typeface="Arial" pitchFamily="34" charset="-120"/>
+              </a:rPr>
+              <a:t>Crossing 10 twice = 2 carry.</a:t>
+            </a:r>
+            <a:endParaRPr lang="en-US" sz="1200" dirty="0"/>
+          </a:p>
+          <a:p>
+            <a:pPr algn="l" marL="342900" indent="-342900">
+              <a:lnSpc>
+                <a:spcPts val="1620"/>
+              </a:lnSpc>
+              <a:spcAft>
+                <a:spcPts val="300"/>
+              </a:spcAft>
+              <a:buSzPct val="100000"/>
+              <a:buChar char="•"/>
+            </a:pPr>
+            <a:r>
+              <a:rPr lang="en-US" sz="1200" dirty="0">
+                <a:solidFill>
+                  <a:srgbClr val="1C2833"/>
+                </a:solidFill>
+                <a:latin typeface="Arial" pitchFamily="34" charset="0"/>
+                <a:ea typeface="Arial" pitchFamily="34" charset="-122"/>
+                <a:cs typeface="Arial" pitchFamily="34" charset="-120"/>
+              </a:rPr>
+              <a:t>The leftover is just whatever remains in the running total.</a:t>
+            </a:r>
+            <a:endParaRPr lang="en-US" sz="1200" dirty="0"/>
+          </a:p>
+        </p:txBody>
       </p:sp>
       <p:sp>
         <p:nvSpPr>
           <p:cNvPr id="6" name="Text 4"/>
-          <p:cNvSpPr/>
-          <p:nvPr/>
-        </p:nvSpPr>
-        <p:spPr>
-          <a:xfrm>
-            <a:off x="692051" y="1074093"/>
-            <a:ext cx="7973389" cy="230981"/>
-          </a:xfrm>
-          <a:prstGeom prst="rect">
-            <a:avLst/>
-          </a:prstGeom>
-          <a:noFill/>
-          <a:ln/>
-        </p:spPr>
-        <p:txBody>
-          <a:bodyPr wrap="square" lIns="0" tIns="0" rIns="0" bIns="0" rtlCol="0" anchor="t"/>
-          <a:lstStyle/>
-          <a:p>
-            <a:pPr algn="l" indent="0" marL="0">
-              <a:lnSpc>
-                <a:spcPts val="1820"/>
-              </a:lnSpc>
-              <a:spcBef>
-                <a:spcPts val="300"/>
-              </a:spcBef>
-              <a:spcAft>
-                <a:spcPts val="300"/>
-              </a:spcAft>
-              <a:buNone/>
-            </a:pPr>
-            <a:r>
-              <a:rPr lang="en-US" sz="1300" b="1" i="1" dirty="0">
-                <a:solidFill>
-                  <a:srgbClr val="1C2833"/>
-                </a:solidFill>
-                <a:latin typeface="Georgia" pitchFamily="34" charset="0"/>
-                <a:ea typeface="Georgia" pitchFamily="34" charset="-122"/>
-                <a:cs typeface="Georgia" pitchFamily="34" charset="-120"/>
-              </a:rPr>
-              <a:t>Why the dot method works</a:t>
-            </a:r>
-            <a:endParaRPr lang="en-US" sz="1300" dirty="0"/>
-          </a:p>
-        </p:txBody>
-      </p:sp>
-      <p:sp>
-        <p:nvSpPr>
-          <p:cNvPr id="7" name="Text 5"/>
-          <p:cNvSpPr/>
-          <p:nvPr/>
-        </p:nvSpPr>
-        <p:spPr>
-          <a:xfrm>
-            <a:off x="692051" y="1343174"/>
-            <a:ext cx="7973389" cy="461963"/>
-          </a:xfrm>
-          <a:prstGeom prst="rect">
-            <a:avLst/>
-          </a:prstGeom>
-          <a:noFill/>
-          <a:ln/>
-        </p:spPr>
-        <p:txBody>
-          <a:bodyPr wrap="square" lIns="0" tIns="0" rIns="0" bIns="0" rtlCol="0" anchor="t"/>
-          <a:lstStyle/>
-          <a:p>
-            <a:pPr algn="l" indent="0" marL="0">
-              <a:lnSpc>
-                <a:spcPts val="1820"/>
-              </a:lnSpc>
-              <a:spcBef>
-                <a:spcPts val="300"/>
-              </a:spcBef>
-              <a:spcAft>
-                <a:spcPts val="300"/>
-              </a:spcAft>
-              <a:buNone/>
-            </a:pPr>
-            <a:r>
-              <a:rPr lang="en-US" sz="1300" dirty="0">
-                <a:solidFill>
-                  <a:srgbClr val="1C2833"/>
-                </a:solidFill>
-                <a:latin typeface="Georgia" pitchFamily="34" charset="0"/>
-                <a:ea typeface="Georgia" pitchFamily="34" charset="-122"/>
-                <a:cs typeface="Georgia" pitchFamily="34" charset="-120"/>
-              </a:rPr>
-              <a:t>A column of digits is in some place-value column — units, tens, hundreds. When the running total reaches 10, that's literally </a:t>
-            </a:r>
-            <a:pPr algn="l" indent="0" marL="0">
-              <a:lnSpc>
-                <a:spcPts val="1820"/>
-              </a:lnSpc>
-              <a:spcBef>
-                <a:spcPts val="300"/>
-              </a:spcBef>
-              <a:spcAft>
-                <a:spcPts val="300"/>
-              </a:spcAft>
-              <a:buNone/>
-            </a:pPr>
-            <a:r>
-              <a:rPr lang="en-US" sz="1300" b="1" i="1" dirty="0">
-                <a:solidFill>
-                  <a:srgbClr val="1C2833"/>
-                </a:solidFill>
-                <a:latin typeface="Georgia" pitchFamily="34" charset="0"/>
-                <a:ea typeface="Georgia" pitchFamily="34" charset="-122"/>
-                <a:cs typeface="Georgia" pitchFamily="34" charset="-120"/>
-              </a:rPr>
-              <a:t>one</a:t>
-            </a:r>
-            <a:pPr algn="l" indent="0" marL="0">
-              <a:lnSpc>
-                <a:spcPts val="1820"/>
-              </a:lnSpc>
-              <a:spcBef>
-                <a:spcPts val="300"/>
-              </a:spcBef>
-              <a:spcAft>
-                <a:spcPts val="300"/>
-              </a:spcAft>
-              <a:buNone/>
-            </a:pPr>
-            <a:r>
-              <a:rPr lang="en-US" sz="1300" dirty="0">
-                <a:solidFill>
-                  <a:srgbClr val="1C2833"/>
-                </a:solidFill>
-                <a:latin typeface="Georgia" pitchFamily="34" charset="0"/>
-                <a:ea typeface="Georgia" pitchFamily="34" charset="-122"/>
-                <a:cs typeface="Georgia" pitchFamily="34" charset="-120"/>
-              </a:rPr>
-              <a:t> of the next place value. So the dot is just a </a:t>
-            </a:r>
-            <a:pPr algn="l" indent="0" marL="0">
-              <a:lnSpc>
-                <a:spcPts val="1820"/>
-              </a:lnSpc>
-              <a:spcBef>
-                <a:spcPts val="300"/>
-              </a:spcBef>
-              <a:spcAft>
-                <a:spcPts val="300"/>
-              </a:spcAft>
-              <a:buNone/>
-            </a:pPr>
-            <a:r>
-              <a:rPr lang="en-US" sz="1300" i="1" dirty="0">
-                <a:solidFill>
-                  <a:srgbClr val="1C2833"/>
-                </a:solidFill>
-                <a:latin typeface="Georgia" pitchFamily="34" charset="0"/>
-                <a:ea typeface="Georgia" pitchFamily="34" charset="-122"/>
-                <a:cs typeface="Georgia" pitchFamily="34" charset="-120"/>
-              </a:rPr>
-              <a:t>visible</a:t>
-            </a:r>
-            <a:pPr algn="l" indent="0" marL="0">
-              <a:lnSpc>
-                <a:spcPts val="1820"/>
-              </a:lnSpc>
-              <a:spcBef>
-                <a:spcPts val="300"/>
-              </a:spcBef>
-              <a:spcAft>
-                <a:spcPts val="300"/>
-              </a:spcAft>
-              <a:buNone/>
-            </a:pPr>
-            <a:r>
-              <a:rPr lang="en-US" sz="1300" dirty="0">
-                <a:solidFill>
-                  <a:srgbClr val="1C2833"/>
-                </a:solidFill>
-                <a:latin typeface="Georgia" pitchFamily="34" charset="0"/>
-                <a:ea typeface="Georgia" pitchFamily="34" charset="-122"/>
-                <a:cs typeface="Georgia" pitchFamily="34" charset="-120"/>
-              </a:rPr>
-              <a:t> carry.</a:t>
-            </a:r>
-            <a:endParaRPr lang="en-US" sz="1300" dirty="0"/>
-          </a:p>
-        </p:txBody>
-      </p:sp>
-      <p:sp>
-        <p:nvSpPr>
-          <p:cNvPr id="8" name="Text 6"/>
-          <p:cNvSpPr/>
-          <p:nvPr/>
-        </p:nvSpPr>
-        <p:spPr>
-          <a:xfrm>
-            <a:off x="692051" y="1843236"/>
-            <a:ext cx="7973389" cy="692944"/>
-          </a:xfrm>
-          <a:prstGeom prst="rect">
-            <a:avLst/>
-          </a:prstGeom>
-          <a:noFill/>
-          <a:ln/>
-        </p:spPr>
-        <p:txBody>
-          <a:bodyPr wrap="square" lIns="0" tIns="0" rIns="0" bIns="0" rtlCol="0" anchor="t"/>
-          <a:lstStyle/>
-          <a:p>
-            <a:pPr algn="l" indent="0" marL="0">
-              <a:lnSpc>
-                <a:spcPts val="1820"/>
-              </a:lnSpc>
-              <a:spcBef>
-                <a:spcPts val="300"/>
-              </a:spcBef>
-              <a:spcAft>
-                <a:spcPts val="300"/>
-              </a:spcAft>
-              <a:buNone/>
-            </a:pPr>
-            <a:r>
-              <a:rPr lang="en-US" sz="1300" dirty="0">
-                <a:solidFill>
-                  <a:srgbClr val="1C2833"/>
-                </a:solidFill>
-                <a:latin typeface="Georgia" pitchFamily="34" charset="0"/>
-                <a:ea typeface="Georgia" pitchFamily="34" charset="-122"/>
-                <a:cs typeface="Georgia" pitchFamily="34" charset="-120"/>
-              </a:rPr>
-              <a:t>The 16 sūtras of Vedic mathematics (Tirthaji, 1965) include </a:t>
-            </a:r>
-            <a:pPr algn="l" indent="0" marL="0">
-              <a:lnSpc>
-                <a:spcPts val="1820"/>
-              </a:lnSpc>
-              <a:spcBef>
-                <a:spcPts val="300"/>
-              </a:spcBef>
-              <a:spcAft>
-                <a:spcPts val="300"/>
-              </a:spcAft>
-              <a:buNone/>
-            </a:pPr>
-            <a:r>
-              <a:rPr lang="en-US" sz="1300" i="1" dirty="0">
-                <a:solidFill>
-                  <a:srgbClr val="1C2833"/>
-                </a:solidFill>
-                <a:latin typeface="Georgia" pitchFamily="34" charset="0"/>
-                <a:ea typeface="Georgia" pitchFamily="34" charset="-122"/>
-                <a:cs typeface="Georgia" pitchFamily="34" charset="-120"/>
-              </a:rPr>
-              <a:t>Sankalana Vyavakalanābhyām</a:t>
-            </a:r>
-            <a:pPr algn="l" indent="0" marL="0">
-              <a:lnSpc>
-                <a:spcPts val="1820"/>
-              </a:lnSpc>
-              <a:spcBef>
-                <a:spcPts val="300"/>
-              </a:spcBef>
-              <a:spcAft>
-                <a:spcPts val="300"/>
-              </a:spcAft>
-              <a:buNone/>
-            </a:pPr>
-            <a:r>
-              <a:rPr lang="en-US" sz="1300" dirty="0">
-                <a:solidFill>
-                  <a:srgbClr val="1C2833"/>
-                </a:solidFill>
-                <a:latin typeface="Georgia" pitchFamily="34" charset="0"/>
-                <a:ea typeface="Georgia" pitchFamily="34" charset="-122"/>
-                <a:cs typeface="Georgia" pitchFamily="34" charset="-120"/>
-              </a:rPr>
-              <a:t> ("by addition and by subtraction") and </a:t>
-            </a:r>
-            <a:pPr algn="l" indent="0" marL="0">
-              <a:lnSpc>
-                <a:spcPts val="1820"/>
-              </a:lnSpc>
-              <a:spcBef>
-                <a:spcPts val="300"/>
-              </a:spcBef>
-              <a:spcAft>
-                <a:spcPts val="300"/>
-              </a:spcAft>
-              <a:buNone/>
-            </a:pPr>
-            <a:r>
-              <a:rPr lang="en-US" sz="1300" i="1" dirty="0">
-                <a:solidFill>
-                  <a:srgbClr val="1C2833"/>
-                </a:solidFill>
-                <a:latin typeface="Georgia" pitchFamily="34" charset="0"/>
-                <a:ea typeface="Georgia" pitchFamily="34" charset="-122"/>
-                <a:cs typeface="Georgia" pitchFamily="34" charset="-120"/>
-              </a:rPr>
-              <a:t>Pūraṇāpūraṇābhyāṁ</a:t>
-            </a:r>
-            <a:pPr algn="l" indent="0" marL="0">
-              <a:lnSpc>
-                <a:spcPts val="1820"/>
-              </a:lnSpc>
-              <a:spcBef>
-                <a:spcPts val="300"/>
-              </a:spcBef>
-              <a:spcAft>
-                <a:spcPts val="300"/>
-              </a:spcAft>
-              <a:buNone/>
-            </a:pPr>
-            <a:r>
-              <a:rPr lang="en-US" sz="1300" dirty="0">
-                <a:solidFill>
-                  <a:srgbClr val="1C2833"/>
-                </a:solidFill>
-                <a:latin typeface="Georgia" pitchFamily="34" charset="0"/>
-                <a:ea typeface="Georgia" pitchFamily="34" charset="-122"/>
-                <a:cs typeface="Georgia" pitchFamily="34" charset="-120"/>
-              </a:rPr>
-              <a:t> ("by completing or non-completing") — both use the </a:t>
-            </a:r>
-            <a:pPr algn="l" indent="0" marL="0">
-              <a:lnSpc>
-                <a:spcPts val="1820"/>
-              </a:lnSpc>
-              <a:spcBef>
-                <a:spcPts val="300"/>
-              </a:spcBef>
-              <a:spcAft>
-                <a:spcPts val="300"/>
-              </a:spcAft>
-              <a:buNone/>
-            </a:pPr>
-            <a:r>
-              <a:rPr lang="en-US" sz="1300" i="1" dirty="0">
-                <a:solidFill>
-                  <a:srgbClr val="1C2833"/>
-                </a:solidFill>
-                <a:latin typeface="Georgia" pitchFamily="34" charset="0"/>
-                <a:ea typeface="Georgia" pitchFamily="34" charset="-122"/>
-                <a:cs typeface="Georgia" pitchFamily="34" charset="-120"/>
-              </a:rPr>
-              <a:t>idea</a:t>
-            </a:r>
-            <a:pPr algn="l" indent="0" marL="0">
-              <a:lnSpc>
-                <a:spcPts val="1820"/>
-              </a:lnSpc>
-              <a:spcBef>
-                <a:spcPts val="300"/>
-              </a:spcBef>
-              <a:spcAft>
-                <a:spcPts val="300"/>
-              </a:spcAft>
-              <a:buNone/>
-            </a:pPr>
-            <a:r>
-              <a:rPr lang="en-US" sz="1300" dirty="0">
-                <a:solidFill>
-                  <a:srgbClr val="1C2833"/>
-                </a:solidFill>
-                <a:latin typeface="Georgia" pitchFamily="34" charset="0"/>
-                <a:ea typeface="Georgia" pitchFamily="34" charset="-122"/>
-                <a:cs typeface="Georgia" pitchFamily="34" charset="-120"/>
-              </a:rPr>
-              <a:t> of looking for completions to a base (like 10). The dot method makes this idea concrete and visible.</a:t>
-            </a:r>
-            <a:endParaRPr lang="en-US" sz="1300" dirty="0"/>
-          </a:p>
-        </p:txBody>
-      </p:sp>
-      <p:sp>
-        <p:nvSpPr>
-          <p:cNvPr id="9" name="Text 7"/>
-          <p:cNvSpPr/>
-          <p:nvPr/>
-        </p:nvSpPr>
-        <p:spPr>
-          <a:xfrm>
-            <a:off x="692051" y="2574280"/>
-            <a:ext cx="7973389" cy="230981"/>
-          </a:xfrm>
-          <a:prstGeom prst="rect">
-            <a:avLst/>
-          </a:prstGeom>
-          <a:noFill/>
-          <a:ln/>
-        </p:spPr>
-        <p:txBody>
-          <a:bodyPr wrap="square" lIns="0" tIns="0" rIns="0" bIns="0" rtlCol="0" anchor="t"/>
-          <a:lstStyle/>
-          <a:p>
-            <a:pPr algn="l" indent="0" marL="0">
-              <a:lnSpc>
-                <a:spcPts val="1820"/>
-              </a:lnSpc>
-              <a:spcBef>
-                <a:spcPts val="300"/>
-              </a:spcBef>
-              <a:spcAft>
-                <a:spcPts val="300"/>
-              </a:spcAft>
-              <a:buNone/>
-            </a:pPr>
-            <a:r>
-              <a:rPr lang="en-US" sz="1300" b="1" i="1" dirty="0">
-                <a:solidFill>
-                  <a:srgbClr val="1C2833"/>
-                </a:solidFill>
-                <a:latin typeface="Georgia" pitchFamily="34" charset="0"/>
-                <a:ea typeface="Georgia" pitchFamily="34" charset="-122"/>
-                <a:cs typeface="Georgia" pitchFamily="34" charset="-120"/>
-              </a:rPr>
-              <a:t>It is not magic. It is good notation.</a:t>
-            </a:r>
-            <a:endParaRPr lang="en-US" sz="1300" dirty="0"/>
-          </a:p>
-        </p:txBody>
-      </p:sp>
-      <p:sp>
-        <p:nvSpPr>
-          <p:cNvPr id="10" name="Text 8"/>
           <p:cNvSpPr/>
           <p:nvPr/>
         </p:nvSpPr>
@@ -6328,7 +7204,7 @@
                 <a:ea typeface="Georgia" pitchFamily="34" charset="-122"/>
                 <a:cs typeface="Georgia" pitchFamily="34" charset="-120"/>
               </a:rPr>
-              <a:t>Homework</a:t>
+              <a:t>Core (20 min) — The mathematical reasoning (cont.)</a:t>
             </a:r>
             <a:endParaRPr lang="en-US" sz="1800" dirty="0"/>
           </a:p>
@@ -6342,8 +7218,8 @@
         </p:nvSpPr>
         <p:spPr>
           <a:xfrm>
-            <a:off x="406301" y="870942"/>
-            <a:ext cx="8498026" cy="426541"/>
+            <a:off x="634901" y="883593"/>
+            <a:ext cx="8102798" cy="281880"/>
           </a:xfrm>
           <a:prstGeom prst="rect">
             <a:avLst/>
@@ -6355,20 +7231,18 @@
           <a:bodyPr wrap="square" lIns="0" tIns="0" rIns="0" bIns="0" rtlCol="0" anchor="t"/>
           <a:lstStyle/>
           <a:p>
-            <a:pPr algn="l" indent="0" marL="0">
-              <a:lnSpc>
-                <a:spcPts val="1680"/>
-              </a:lnSpc>
-              <a:spcBef>
-                <a:spcPts val="300"/>
-              </a:spcBef>
-              <a:spcAft>
-                <a:spcPts val="300"/>
-              </a:spcAft>
-              <a:buNone/>
-            </a:pPr>
-            <a:r>
-              <a:rPr lang="en-US" sz="1200" dirty="0">
+            <a:pPr algn="l" marL="342900" indent="-342900">
+              <a:lnSpc>
+                <a:spcPts val="1620"/>
+              </a:lnSpc>
+              <a:spcAft>
+                <a:spcPts val="300"/>
+              </a:spcAft>
+              <a:buSzPct val="100000"/>
+              <a:buChar char="•"/>
+            </a:pPr>
+            <a:r>
+              <a:rPr lang="en-US" sz="1200" b="1" dirty="0">
                 <a:solidFill>
                   <a:srgbClr val="1C2833"/>
                 </a:solidFill>
@@ -6376,7 +7250,27 @@
                 <a:ea typeface="Arial" pitchFamily="34" charset="-122"/>
                 <a:cs typeface="Arial" pitchFamily="34" charset="-120"/>
               </a:rPr>
-              <a:t>– Find ONE example in your daily life where you naturally "complete to 10" without thinking. (E.g. adding tip to a bill — round to 10. Counting change. Adding minutes to a clock.) Write 2 sentences describing it.</a:t>
+              <a:t>Connection to Tirthaji's 16 sūtras.</a:t>
+            </a:r>
+            <a:pPr algn="l" indent="0" marL="0">
+              <a:lnSpc>
+                <a:spcPts val="1620"/>
+              </a:lnSpc>
+              <a:spcAft>
+                <a:spcPts val="300"/>
+              </a:spcAft>
+              <a:buNone/>
+            </a:pPr>
+            <a:r>
+              <a:rPr lang="en-US" sz="1200" dirty="0">
+                <a:solidFill>
+                  <a:srgbClr val="1C2833"/>
+                </a:solidFill>
+                <a:latin typeface="Arial" pitchFamily="34" charset="0"/>
+                <a:ea typeface="Arial" pitchFamily="34" charset="-122"/>
+                <a:cs typeface="Arial" pitchFamily="34" charset="-120"/>
+              </a:rPr>
+              <a:t> Display the list:</a:t>
             </a:r>
             <a:endParaRPr lang="en-US" sz="1200" dirty="0"/>
           </a:p>
@@ -6385,6 +7279,324 @@
       <p:sp>
         <p:nvSpPr>
           <p:cNvPr id="5" name="Text 3"/>
+          <p:cNvSpPr/>
+          <p:nvPr/>
+        </p:nvSpPr>
+        <p:spPr>
+          <a:xfrm>
+            <a:off x="634901" y="1266974"/>
+            <a:ext cx="8102798" cy="1424583"/>
+          </a:xfrm>
+          <a:prstGeom prst="rect">
+            <a:avLst/>
+          </a:prstGeom>
+          <a:noFill/>
+          <a:ln/>
+        </p:spPr>
+        <p:txBody>
+          <a:bodyPr wrap="square" lIns="0" tIns="0" rIns="0" bIns="0" rtlCol="0" anchor="t"/>
+          <a:lstStyle/>
+          <a:p>
+            <a:pPr algn="l" marL="342900" indent="-342900">
+              <a:lnSpc>
+                <a:spcPts val="1620"/>
+              </a:lnSpc>
+              <a:spcAft>
+                <a:spcPts val="300"/>
+              </a:spcAft>
+              <a:buSzPct val="100000"/>
+              <a:buChar char="•"/>
+            </a:pPr>
+            <a:r>
+              <a:rPr lang="en-US" sz="1200" dirty="0">
+                <a:solidFill>
+                  <a:srgbClr val="1C2833"/>
+                </a:solidFill>
+                <a:latin typeface="Arial" pitchFamily="34" charset="0"/>
+                <a:ea typeface="Arial" pitchFamily="34" charset="-122"/>
+                <a:cs typeface="Arial" pitchFamily="34" charset="-120"/>
+              </a:rPr>
+              <a:t>Sūtra #7: </a:t>
+            </a:r>
+            <a:pPr algn="l" indent="0" marL="0">
+              <a:lnSpc>
+                <a:spcPts val="1620"/>
+              </a:lnSpc>
+              <a:spcAft>
+                <a:spcPts val="300"/>
+              </a:spcAft>
+              <a:buNone/>
+            </a:pPr>
+            <a:r>
+              <a:rPr lang="en-US" sz="1200" b="1" dirty="0">
+                <a:solidFill>
+                  <a:srgbClr val="1C2833"/>
+                </a:solidFill>
+                <a:latin typeface="Arial" pitchFamily="34" charset="0"/>
+                <a:ea typeface="Arial" pitchFamily="34" charset="-122"/>
+                <a:cs typeface="Arial" pitchFamily="34" charset="-120"/>
+              </a:rPr>
+              <a:t>Sankalana Vyavakalanābhyām</a:t>
+            </a:r>
+            <a:pPr algn="l" indent="0" marL="0">
+              <a:lnSpc>
+                <a:spcPts val="1620"/>
+              </a:lnSpc>
+              <a:spcAft>
+                <a:spcPts val="300"/>
+              </a:spcAft>
+              <a:buNone/>
+            </a:pPr>
+            <a:r>
+              <a:rPr lang="en-US" sz="1200" dirty="0">
+                <a:solidFill>
+                  <a:srgbClr val="1C2833"/>
+                </a:solidFill>
+                <a:latin typeface="Arial" pitchFamily="34" charset="0"/>
+                <a:ea typeface="Arial" pitchFamily="34" charset="-122"/>
+                <a:cs typeface="Arial" pitchFamily="34" charset="-120"/>
+              </a:rPr>
+              <a:t> — "by addition and by subtraction."</a:t>
+            </a:r>
+            <a:endParaRPr lang="en-US" sz="1200" dirty="0"/>
+          </a:p>
+          <a:p>
+            <a:pPr algn="l" marL="342900" indent="-342900">
+              <a:lnSpc>
+                <a:spcPts val="1620"/>
+              </a:lnSpc>
+              <a:spcAft>
+                <a:spcPts val="300"/>
+              </a:spcAft>
+              <a:buSzPct val="100000"/>
+              <a:buChar char="•"/>
+            </a:pPr>
+            <a:r>
+              <a:rPr lang="en-US" sz="1200" dirty="0">
+                <a:solidFill>
+                  <a:srgbClr val="1C2833"/>
+                </a:solidFill>
+                <a:latin typeface="Arial" pitchFamily="34" charset="0"/>
+                <a:ea typeface="Arial" pitchFamily="34" charset="-122"/>
+                <a:cs typeface="Arial" pitchFamily="34" charset="-120"/>
+              </a:rPr>
+              <a:t>Sūtra #8: </a:t>
+            </a:r>
+            <a:pPr algn="l" indent="0" marL="0">
+              <a:lnSpc>
+                <a:spcPts val="1620"/>
+              </a:lnSpc>
+              <a:spcAft>
+                <a:spcPts val="300"/>
+              </a:spcAft>
+              <a:buNone/>
+            </a:pPr>
+            <a:r>
+              <a:rPr lang="en-US" sz="1200" b="1" dirty="0">
+                <a:solidFill>
+                  <a:srgbClr val="1C2833"/>
+                </a:solidFill>
+                <a:latin typeface="Arial" pitchFamily="34" charset="0"/>
+                <a:ea typeface="Arial" pitchFamily="34" charset="-122"/>
+                <a:cs typeface="Arial" pitchFamily="34" charset="-120"/>
+              </a:rPr>
+              <a:t>Pūraṇāpūraṇābhyāṁ</a:t>
+            </a:r>
+            <a:pPr algn="l" indent="0" marL="0">
+              <a:lnSpc>
+                <a:spcPts val="1620"/>
+              </a:lnSpc>
+              <a:spcAft>
+                <a:spcPts val="300"/>
+              </a:spcAft>
+              <a:buNone/>
+            </a:pPr>
+            <a:r>
+              <a:rPr lang="en-US" sz="1200" dirty="0">
+                <a:solidFill>
+                  <a:srgbClr val="1C2833"/>
+                </a:solidFill>
+                <a:latin typeface="Arial" pitchFamily="34" charset="0"/>
+                <a:ea typeface="Arial" pitchFamily="34" charset="-122"/>
+                <a:cs typeface="Arial" pitchFamily="34" charset="-120"/>
+              </a:rPr>
+              <a:t> — "by completing or non-completing."</a:t>
+            </a:r>
+            <a:endParaRPr lang="en-US" sz="1200" dirty="0"/>
+          </a:p>
+          <a:p>
+            <a:pPr algn="l" marL="342900" indent="-342900">
+              <a:lnSpc>
+                <a:spcPts val="1620"/>
+              </a:lnSpc>
+              <a:spcAft>
+                <a:spcPts val="300"/>
+              </a:spcAft>
+              <a:buSzPct val="100000"/>
+              <a:buChar char="•"/>
+            </a:pPr>
+            <a:r>
+              <a:rPr lang="en-US" sz="1200" dirty="0">
+                <a:solidFill>
+                  <a:srgbClr val="1C2833"/>
+                </a:solidFill>
+                <a:latin typeface="Arial" pitchFamily="34" charset="0"/>
+                <a:ea typeface="Arial" pitchFamily="34" charset="-122"/>
+                <a:cs typeface="Arial" pitchFamily="34" charset="-120"/>
+              </a:rPr>
+              <a:t>The dot method is </a:t>
+            </a:r>
+            <a:pPr algn="l" indent="0" marL="0">
+              <a:lnSpc>
+                <a:spcPts val="1620"/>
+              </a:lnSpc>
+              <a:spcAft>
+                <a:spcPts val="300"/>
+              </a:spcAft>
+              <a:buNone/>
+            </a:pPr>
+            <a:r>
+              <a:rPr lang="en-US" sz="1200" i="1" dirty="0">
+                <a:solidFill>
+                  <a:srgbClr val="1C2833"/>
+                </a:solidFill>
+                <a:latin typeface="Arial" pitchFamily="34" charset="0"/>
+                <a:ea typeface="Arial" pitchFamily="34" charset="-122"/>
+                <a:cs typeface="Arial" pitchFamily="34" charset="-120"/>
+              </a:rPr>
+              <a:t>not</a:t>
+            </a:r>
+            <a:pPr algn="l" indent="0" marL="0">
+              <a:lnSpc>
+                <a:spcPts val="1620"/>
+              </a:lnSpc>
+              <a:spcAft>
+                <a:spcPts val="300"/>
+              </a:spcAft>
+              <a:buNone/>
+            </a:pPr>
+            <a:r>
+              <a:rPr lang="en-US" sz="1200" dirty="0">
+                <a:solidFill>
+                  <a:srgbClr val="1C2833"/>
+                </a:solidFill>
+                <a:latin typeface="Arial" pitchFamily="34" charset="0"/>
+                <a:ea typeface="Arial" pitchFamily="34" charset="-122"/>
+                <a:cs typeface="Arial" pitchFamily="34" charset="-120"/>
+              </a:rPr>
+              <a:t> itself one of these sūtras — it's a 20th-century pedagogical technique that uses the </a:t>
+            </a:r>
+            <a:pPr algn="l" indent="0" marL="0">
+              <a:lnSpc>
+                <a:spcPts val="1620"/>
+              </a:lnSpc>
+              <a:spcAft>
+                <a:spcPts val="300"/>
+              </a:spcAft>
+              <a:buNone/>
+            </a:pPr>
+            <a:r>
+              <a:rPr lang="en-US" sz="1200" i="1" dirty="0">
+                <a:solidFill>
+                  <a:srgbClr val="1C2833"/>
+                </a:solidFill>
+                <a:latin typeface="Arial" pitchFamily="34" charset="0"/>
+                <a:ea typeface="Arial" pitchFamily="34" charset="-122"/>
+                <a:cs typeface="Arial" pitchFamily="34" charset="-120"/>
+              </a:rPr>
+              <a:t>spirit</a:t>
+            </a:r>
+            <a:pPr algn="l" indent="0" marL="0">
+              <a:lnSpc>
+                <a:spcPts val="1620"/>
+              </a:lnSpc>
+              <a:spcAft>
+                <a:spcPts val="300"/>
+              </a:spcAft>
+              <a:buNone/>
+            </a:pPr>
+            <a:r>
+              <a:rPr lang="en-US" sz="1200" dirty="0">
+                <a:solidFill>
+                  <a:srgbClr val="1C2833"/>
+                </a:solidFill>
+                <a:latin typeface="Arial" pitchFamily="34" charset="0"/>
+                <a:ea typeface="Arial" pitchFamily="34" charset="-122"/>
+                <a:cs typeface="Arial" pitchFamily="34" charset="-120"/>
+              </a:rPr>
+              <a:t> of these sūtras (looking for completions to a base).</a:t>
+            </a:r>
+            <a:endParaRPr lang="en-US" sz="1200" dirty="0"/>
+          </a:p>
+          <a:p>
+            <a:pPr algn="l" marL="342900" indent="-342900">
+              <a:lnSpc>
+                <a:spcPts val="1620"/>
+              </a:lnSpc>
+              <a:spcAft>
+                <a:spcPts val="300"/>
+              </a:spcAft>
+              <a:buSzPct val="100000"/>
+              <a:buChar char="•"/>
+            </a:pPr>
+            <a:r>
+              <a:rPr lang="en-US" sz="1200" dirty="0">
+                <a:solidFill>
+                  <a:srgbClr val="1C2833"/>
+                </a:solidFill>
+                <a:latin typeface="Arial" pitchFamily="34" charset="0"/>
+                <a:ea typeface="Arial" pitchFamily="34" charset="-122"/>
+                <a:cs typeface="Arial" pitchFamily="34" charset="-120"/>
+              </a:rPr>
+              <a:t>Be honest: "There is no ancient Sanskrit verse that says 'use the dot method.' What we have is the </a:t>
+            </a:r>
+            <a:pPr algn="l" indent="0" marL="0">
+              <a:lnSpc>
+                <a:spcPts val="1620"/>
+              </a:lnSpc>
+              <a:spcAft>
+                <a:spcPts val="300"/>
+              </a:spcAft>
+              <a:buNone/>
+            </a:pPr>
+            <a:r>
+              <a:rPr lang="en-US" sz="1200" i="1" dirty="0">
+                <a:solidFill>
+                  <a:srgbClr val="1C2833"/>
+                </a:solidFill>
+                <a:latin typeface="Arial" pitchFamily="34" charset="0"/>
+                <a:ea typeface="Arial" pitchFamily="34" charset="-122"/>
+                <a:cs typeface="Arial" pitchFamily="34" charset="-120"/>
+              </a:rPr>
+              <a:t>idea</a:t>
+            </a:r>
+            <a:pPr algn="l" indent="0" marL="0">
+              <a:lnSpc>
+                <a:spcPts val="1620"/>
+              </a:lnSpc>
+              <a:spcAft>
+                <a:spcPts val="300"/>
+              </a:spcAft>
+              <a:buNone/>
+            </a:pPr>
+            <a:r>
+              <a:rPr lang="en-US" sz="1200" dirty="0">
+                <a:solidFill>
+                  <a:srgbClr val="1C2833"/>
+                </a:solidFill>
+                <a:latin typeface="Arial" pitchFamily="34" charset="0"/>
+                <a:ea typeface="Arial" pitchFamily="34" charset="-122"/>
+                <a:cs typeface="Arial" pitchFamily="34" charset="-120"/>
+              </a:rPr>
+              <a:t> of completion that classical Indian math used, and a modern teaching tool that makes it concrete."</a:t>
+            </a:r>
+            <a:endParaRPr lang="en-US" sz="1200" dirty="0"/>
+          </a:p>
+        </p:txBody>
+      </p:sp>
+      <p:sp>
+        <p:nvSpPr>
+          <p:cNvPr id="6" name="Text 4"/>
           <p:cNvSpPr/>
           <p:nvPr/>
         </p:nvSpPr>
